--- a/El modelo de ising para analizar la evasion.pptx
+++ b/El modelo de ising para analizar la evasion.pptx
@@ -5,22 +5,26 @@
     <p:sldMasterId id="2147483648" r:id="rId4"/>
   </p:sldMasterIdLst>
   <p:notesMasterIdLst>
-    <p:notesMasterId r:id="rId15"/>
+    <p:notesMasterId r:id="rId19"/>
   </p:notesMasterIdLst>
   <p:handoutMasterIdLst>
-    <p:handoutMasterId r:id="rId16"/>
+    <p:handoutMasterId r:id="rId20"/>
   </p:handoutMasterIdLst>
   <p:sldIdLst>
     <p:sldId id="256" r:id="rId5"/>
     <p:sldId id="278" r:id="rId6"/>
     <p:sldId id="280" r:id="rId7"/>
     <p:sldId id="279" r:id="rId8"/>
-    <p:sldId id="281" r:id="rId9"/>
+    <p:sldId id="283" r:id="rId9"/>
     <p:sldId id="282" r:id="rId10"/>
-    <p:sldId id="283" r:id="rId11"/>
-    <p:sldId id="277" r:id="rId12"/>
-    <p:sldId id="285" r:id="rId13"/>
-    <p:sldId id="287" r:id="rId14"/>
+    <p:sldId id="291" r:id="rId11"/>
+    <p:sldId id="281" r:id="rId12"/>
+    <p:sldId id="293" r:id="rId13"/>
+    <p:sldId id="294" r:id="rId14"/>
+    <p:sldId id="289" r:id="rId15"/>
+    <p:sldId id="290" r:id="rId16"/>
+    <p:sldId id="285" r:id="rId17"/>
+    <p:sldId id="287" r:id="rId18"/>
   </p:sldIdLst>
   <p:sldSz cx="12192000" cy="6858000"/>
   <p:notesSz cx="6858000" cy="9144000"/>
@@ -1624,11 +1628,758 @@
 </dgm:colorsDef>
 </file>
 
+<file path=ppt/diagrams/colors3.xml><?xml version="1.0" encoding="utf-8"?>
+<dgm:colorsDef xmlns:dgm="http://schemas.openxmlformats.org/drawingml/2006/diagram" xmlns:a="http://schemas.openxmlformats.org/drawingml/2006/main" uniqueId="urn:microsoft.com/office/officeart/2005/8/colors/accent1_2">
+  <dgm:title val=""/>
+  <dgm:desc val=""/>
+  <dgm:catLst>
+    <dgm:cat type="accent1" pri="11200"/>
+  </dgm:catLst>
+  <dgm:styleLbl name="node0">
+    <dgm:fillClrLst meth="repeat">
+      <a:schemeClr val="accent1"/>
+    </dgm:fillClrLst>
+    <dgm:linClrLst meth="repeat">
+      <a:schemeClr val="lt1"/>
+    </dgm:linClrLst>
+    <dgm:effectClrLst/>
+    <dgm:txLinClrLst/>
+    <dgm:txFillClrLst/>
+    <dgm:txEffectClrLst/>
+  </dgm:styleLbl>
+  <dgm:styleLbl name="alignNode1">
+    <dgm:fillClrLst meth="repeat">
+      <a:schemeClr val="accent1"/>
+    </dgm:fillClrLst>
+    <dgm:linClrLst meth="repeat">
+      <a:schemeClr val="accent1"/>
+    </dgm:linClrLst>
+    <dgm:effectClrLst/>
+    <dgm:txLinClrLst/>
+    <dgm:txFillClrLst/>
+    <dgm:txEffectClrLst/>
+  </dgm:styleLbl>
+  <dgm:styleLbl name="node1">
+    <dgm:fillClrLst meth="repeat">
+      <a:schemeClr val="accent1"/>
+    </dgm:fillClrLst>
+    <dgm:linClrLst meth="repeat">
+      <a:schemeClr val="lt1"/>
+    </dgm:linClrLst>
+    <dgm:effectClrLst/>
+    <dgm:txLinClrLst/>
+    <dgm:txFillClrLst/>
+    <dgm:txEffectClrLst/>
+  </dgm:styleLbl>
+  <dgm:styleLbl name="lnNode1">
+    <dgm:fillClrLst meth="repeat">
+      <a:schemeClr val="accent1"/>
+    </dgm:fillClrLst>
+    <dgm:linClrLst meth="repeat">
+      <a:schemeClr val="lt1"/>
+    </dgm:linClrLst>
+    <dgm:effectClrLst/>
+    <dgm:txLinClrLst/>
+    <dgm:txFillClrLst/>
+    <dgm:txEffectClrLst/>
+  </dgm:styleLbl>
+  <dgm:styleLbl name="vennNode1">
+    <dgm:fillClrLst meth="repeat">
+      <a:schemeClr val="accent1">
+        <a:alpha val="50000"/>
+      </a:schemeClr>
+    </dgm:fillClrLst>
+    <dgm:linClrLst meth="repeat">
+      <a:schemeClr val="lt1"/>
+    </dgm:linClrLst>
+    <dgm:effectClrLst/>
+    <dgm:txLinClrLst/>
+    <dgm:txFillClrLst/>
+    <dgm:txEffectClrLst/>
+  </dgm:styleLbl>
+  <dgm:styleLbl name="node2">
+    <dgm:fillClrLst meth="repeat">
+      <a:schemeClr val="accent1"/>
+    </dgm:fillClrLst>
+    <dgm:linClrLst meth="repeat">
+      <a:schemeClr val="lt1"/>
+    </dgm:linClrLst>
+    <dgm:effectClrLst/>
+    <dgm:txLinClrLst/>
+    <dgm:txFillClrLst/>
+    <dgm:txEffectClrLst/>
+  </dgm:styleLbl>
+  <dgm:styleLbl name="node3">
+    <dgm:fillClrLst meth="repeat">
+      <a:schemeClr val="accent1"/>
+    </dgm:fillClrLst>
+    <dgm:linClrLst meth="repeat">
+      <a:schemeClr val="lt1"/>
+    </dgm:linClrLst>
+    <dgm:effectClrLst/>
+    <dgm:txLinClrLst/>
+    <dgm:txFillClrLst/>
+    <dgm:txEffectClrLst/>
+  </dgm:styleLbl>
+  <dgm:styleLbl name="node4">
+    <dgm:fillClrLst meth="repeat">
+      <a:schemeClr val="accent1"/>
+    </dgm:fillClrLst>
+    <dgm:linClrLst meth="repeat">
+      <a:schemeClr val="lt1"/>
+    </dgm:linClrLst>
+    <dgm:effectClrLst/>
+    <dgm:txLinClrLst/>
+    <dgm:txFillClrLst/>
+    <dgm:txEffectClrLst/>
+  </dgm:styleLbl>
+  <dgm:styleLbl name="fgImgPlace1">
+    <dgm:fillClrLst meth="repeat">
+      <a:schemeClr val="accent1">
+        <a:tint val="50000"/>
+      </a:schemeClr>
+    </dgm:fillClrLst>
+    <dgm:linClrLst meth="repeat">
+      <a:schemeClr val="lt1"/>
+    </dgm:linClrLst>
+    <dgm:effectClrLst/>
+    <dgm:txLinClrLst/>
+    <dgm:txFillClrLst meth="repeat">
+      <a:schemeClr val="lt1"/>
+    </dgm:txFillClrLst>
+    <dgm:txEffectClrLst/>
+  </dgm:styleLbl>
+  <dgm:styleLbl name="alignImgPlace1">
+    <dgm:fillClrLst meth="repeat">
+      <a:schemeClr val="accent1">
+        <a:tint val="50000"/>
+      </a:schemeClr>
+    </dgm:fillClrLst>
+    <dgm:linClrLst meth="repeat">
+      <a:schemeClr val="lt1"/>
+    </dgm:linClrLst>
+    <dgm:effectClrLst/>
+    <dgm:txLinClrLst/>
+    <dgm:txFillClrLst meth="repeat">
+      <a:schemeClr val="lt1"/>
+    </dgm:txFillClrLst>
+    <dgm:txEffectClrLst/>
+  </dgm:styleLbl>
+  <dgm:styleLbl name="bgImgPlace1">
+    <dgm:fillClrLst meth="repeat">
+      <a:schemeClr val="accent1">
+        <a:tint val="50000"/>
+      </a:schemeClr>
+    </dgm:fillClrLst>
+    <dgm:linClrLst meth="repeat">
+      <a:schemeClr val="lt1"/>
+    </dgm:linClrLst>
+    <dgm:effectClrLst/>
+    <dgm:txLinClrLst/>
+    <dgm:txFillClrLst meth="repeat">
+      <a:schemeClr val="lt1"/>
+    </dgm:txFillClrLst>
+    <dgm:txEffectClrLst/>
+  </dgm:styleLbl>
+  <dgm:styleLbl name="sibTrans2D1">
+    <dgm:fillClrLst meth="repeat">
+      <a:schemeClr val="accent1">
+        <a:tint val="60000"/>
+      </a:schemeClr>
+    </dgm:fillClrLst>
+    <dgm:linClrLst meth="repeat">
+      <a:schemeClr val="accent1">
+        <a:tint val="60000"/>
+      </a:schemeClr>
+    </dgm:linClrLst>
+    <dgm:effectClrLst/>
+    <dgm:txLinClrLst/>
+    <dgm:txFillClrLst/>
+    <dgm:txEffectClrLst/>
+  </dgm:styleLbl>
+  <dgm:styleLbl name="fgSibTrans2D1">
+    <dgm:fillClrLst meth="repeat">
+      <a:schemeClr val="accent1">
+        <a:tint val="60000"/>
+      </a:schemeClr>
+    </dgm:fillClrLst>
+    <dgm:linClrLst meth="repeat">
+      <a:schemeClr val="accent1">
+        <a:tint val="60000"/>
+      </a:schemeClr>
+    </dgm:linClrLst>
+    <dgm:effectClrLst/>
+    <dgm:txLinClrLst/>
+    <dgm:txFillClrLst/>
+    <dgm:txEffectClrLst/>
+  </dgm:styleLbl>
+  <dgm:styleLbl name="bgSibTrans2D1">
+    <dgm:fillClrLst meth="repeat">
+      <a:schemeClr val="accent1">
+        <a:tint val="60000"/>
+      </a:schemeClr>
+    </dgm:fillClrLst>
+    <dgm:linClrLst meth="repeat">
+      <a:schemeClr val="accent1">
+        <a:tint val="60000"/>
+      </a:schemeClr>
+    </dgm:linClrLst>
+    <dgm:effectClrLst/>
+    <dgm:txLinClrLst/>
+    <dgm:txFillClrLst/>
+    <dgm:txEffectClrLst/>
+  </dgm:styleLbl>
+  <dgm:styleLbl name="sibTrans1D1">
+    <dgm:fillClrLst meth="repeat">
+      <a:schemeClr val="accent1"/>
+    </dgm:fillClrLst>
+    <dgm:linClrLst meth="repeat">
+      <a:schemeClr val="accent1"/>
+    </dgm:linClrLst>
+    <dgm:effectClrLst/>
+    <dgm:txLinClrLst/>
+    <dgm:txFillClrLst meth="repeat">
+      <a:schemeClr val="tx1"/>
+    </dgm:txFillClrLst>
+    <dgm:txEffectClrLst/>
+  </dgm:styleLbl>
+  <dgm:styleLbl name="callout">
+    <dgm:fillClrLst meth="repeat">
+      <a:schemeClr val="accent1"/>
+    </dgm:fillClrLst>
+    <dgm:linClrLst meth="repeat">
+      <a:schemeClr val="accent1">
+        <a:tint val="50000"/>
+      </a:schemeClr>
+    </dgm:linClrLst>
+    <dgm:effectClrLst/>
+    <dgm:txLinClrLst/>
+    <dgm:txFillClrLst meth="repeat">
+      <a:schemeClr val="tx1"/>
+    </dgm:txFillClrLst>
+    <dgm:txEffectClrLst/>
+  </dgm:styleLbl>
+  <dgm:styleLbl name="asst0">
+    <dgm:fillClrLst meth="repeat">
+      <a:schemeClr val="accent1"/>
+    </dgm:fillClrLst>
+    <dgm:linClrLst meth="repeat">
+      <a:schemeClr val="lt1"/>
+    </dgm:linClrLst>
+    <dgm:effectClrLst/>
+    <dgm:txLinClrLst/>
+    <dgm:txFillClrLst/>
+    <dgm:txEffectClrLst/>
+  </dgm:styleLbl>
+  <dgm:styleLbl name="asst1">
+    <dgm:fillClrLst meth="repeat">
+      <a:schemeClr val="accent1"/>
+    </dgm:fillClrLst>
+    <dgm:linClrLst meth="repeat">
+      <a:schemeClr val="lt1"/>
+    </dgm:linClrLst>
+    <dgm:effectClrLst/>
+    <dgm:txLinClrLst/>
+    <dgm:txFillClrLst/>
+    <dgm:txEffectClrLst/>
+  </dgm:styleLbl>
+  <dgm:styleLbl name="asst2">
+    <dgm:fillClrLst meth="repeat">
+      <a:schemeClr val="accent1"/>
+    </dgm:fillClrLst>
+    <dgm:linClrLst meth="repeat">
+      <a:schemeClr val="lt1"/>
+    </dgm:linClrLst>
+    <dgm:effectClrLst/>
+    <dgm:txLinClrLst/>
+    <dgm:txFillClrLst/>
+    <dgm:txEffectClrLst/>
+  </dgm:styleLbl>
+  <dgm:styleLbl name="asst3">
+    <dgm:fillClrLst meth="repeat">
+      <a:schemeClr val="accent1"/>
+    </dgm:fillClrLst>
+    <dgm:linClrLst meth="repeat">
+      <a:schemeClr val="lt1"/>
+    </dgm:linClrLst>
+    <dgm:effectClrLst/>
+    <dgm:txLinClrLst/>
+    <dgm:txFillClrLst/>
+    <dgm:txEffectClrLst/>
+  </dgm:styleLbl>
+  <dgm:styleLbl name="asst4">
+    <dgm:fillClrLst meth="repeat">
+      <a:schemeClr val="accent1"/>
+    </dgm:fillClrLst>
+    <dgm:linClrLst meth="repeat">
+      <a:schemeClr val="lt1"/>
+    </dgm:linClrLst>
+    <dgm:effectClrLst/>
+    <dgm:txLinClrLst/>
+    <dgm:txFillClrLst/>
+    <dgm:txEffectClrLst/>
+  </dgm:styleLbl>
+  <dgm:styleLbl name="parChTrans2D1">
+    <dgm:fillClrLst meth="repeat">
+      <a:schemeClr val="accent1">
+        <a:tint val="60000"/>
+      </a:schemeClr>
+    </dgm:fillClrLst>
+    <dgm:linClrLst meth="repeat">
+      <a:schemeClr val="accent1">
+        <a:tint val="60000"/>
+      </a:schemeClr>
+    </dgm:linClrLst>
+    <dgm:effectClrLst/>
+    <dgm:txLinClrLst/>
+    <dgm:txFillClrLst meth="repeat">
+      <a:schemeClr val="lt1"/>
+    </dgm:txFillClrLst>
+    <dgm:txEffectClrLst/>
+  </dgm:styleLbl>
+  <dgm:styleLbl name="parChTrans2D2">
+    <dgm:fillClrLst meth="repeat">
+      <a:schemeClr val="accent1"/>
+    </dgm:fillClrLst>
+    <dgm:linClrLst meth="repeat">
+      <a:schemeClr val="accent1"/>
+    </dgm:linClrLst>
+    <dgm:effectClrLst/>
+    <dgm:txLinClrLst/>
+    <dgm:txFillClrLst meth="repeat">
+      <a:schemeClr val="lt1"/>
+    </dgm:txFillClrLst>
+    <dgm:txEffectClrLst/>
+  </dgm:styleLbl>
+  <dgm:styleLbl name="parChTrans2D3">
+    <dgm:fillClrLst meth="repeat">
+      <a:schemeClr val="accent1"/>
+    </dgm:fillClrLst>
+    <dgm:linClrLst meth="repeat">
+      <a:schemeClr val="accent1"/>
+    </dgm:linClrLst>
+    <dgm:effectClrLst/>
+    <dgm:txLinClrLst/>
+    <dgm:txFillClrLst meth="repeat">
+      <a:schemeClr val="lt1"/>
+    </dgm:txFillClrLst>
+    <dgm:txEffectClrLst/>
+  </dgm:styleLbl>
+  <dgm:styleLbl name="parChTrans2D4">
+    <dgm:fillClrLst meth="repeat">
+      <a:schemeClr val="accent1"/>
+    </dgm:fillClrLst>
+    <dgm:linClrLst meth="repeat">
+      <a:schemeClr val="accent1"/>
+    </dgm:linClrLst>
+    <dgm:effectClrLst/>
+    <dgm:txLinClrLst/>
+    <dgm:txFillClrLst meth="repeat">
+      <a:schemeClr val="lt1"/>
+    </dgm:txFillClrLst>
+    <dgm:txEffectClrLst/>
+  </dgm:styleLbl>
+  <dgm:styleLbl name="parChTrans1D1">
+    <dgm:fillClrLst meth="repeat">
+      <a:schemeClr val="accent1"/>
+    </dgm:fillClrLst>
+    <dgm:linClrLst meth="repeat">
+      <a:schemeClr val="accent1">
+        <a:shade val="60000"/>
+      </a:schemeClr>
+    </dgm:linClrLst>
+    <dgm:effectClrLst/>
+    <dgm:txLinClrLst/>
+    <dgm:txFillClrLst meth="repeat">
+      <a:schemeClr val="tx1"/>
+    </dgm:txFillClrLst>
+    <dgm:txEffectClrLst/>
+  </dgm:styleLbl>
+  <dgm:styleLbl name="parChTrans1D2">
+    <dgm:fillClrLst meth="repeat">
+      <a:schemeClr val="accent1"/>
+    </dgm:fillClrLst>
+    <dgm:linClrLst meth="repeat">
+      <a:schemeClr val="accent1">
+        <a:shade val="60000"/>
+      </a:schemeClr>
+    </dgm:linClrLst>
+    <dgm:effectClrLst/>
+    <dgm:txLinClrLst/>
+    <dgm:txFillClrLst meth="repeat">
+      <a:schemeClr val="tx1"/>
+    </dgm:txFillClrLst>
+    <dgm:txEffectClrLst/>
+  </dgm:styleLbl>
+  <dgm:styleLbl name="parChTrans1D3">
+    <dgm:fillClrLst meth="repeat">
+      <a:schemeClr val="accent1"/>
+    </dgm:fillClrLst>
+    <dgm:linClrLst meth="repeat">
+      <a:schemeClr val="accent1">
+        <a:shade val="80000"/>
+      </a:schemeClr>
+    </dgm:linClrLst>
+    <dgm:effectClrLst/>
+    <dgm:txLinClrLst/>
+    <dgm:txFillClrLst meth="repeat">
+      <a:schemeClr val="tx1"/>
+    </dgm:txFillClrLst>
+    <dgm:txEffectClrLst/>
+  </dgm:styleLbl>
+  <dgm:styleLbl name="parChTrans1D4">
+    <dgm:fillClrLst meth="repeat">
+      <a:schemeClr val="accent1"/>
+    </dgm:fillClrLst>
+    <dgm:linClrLst meth="repeat">
+      <a:schemeClr val="accent1">
+        <a:shade val="80000"/>
+      </a:schemeClr>
+    </dgm:linClrLst>
+    <dgm:effectClrLst/>
+    <dgm:txLinClrLst/>
+    <dgm:txFillClrLst meth="repeat">
+      <a:schemeClr val="tx1"/>
+    </dgm:txFillClrLst>
+    <dgm:txEffectClrLst/>
+  </dgm:styleLbl>
+  <dgm:styleLbl name="fgAcc1">
+    <dgm:fillClrLst meth="repeat">
+      <a:schemeClr val="lt1">
+        <a:alpha val="90000"/>
+      </a:schemeClr>
+    </dgm:fillClrLst>
+    <dgm:linClrLst meth="repeat">
+      <a:schemeClr val="accent1"/>
+    </dgm:linClrLst>
+    <dgm:effectClrLst/>
+    <dgm:txLinClrLst/>
+    <dgm:txFillClrLst meth="repeat">
+      <a:schemeClr val="dk1"/>
+    </dgm:txFillClrLst>
+    <dgm:txEffectClrLst/>
+  </dgm:styleLbl>
+  <dgm:styleLbl name="conFgAcc1">
+    <dgm:fillClrLst meth="repeat">
+      <a:schemeClr val="lt1">
+        <a:alpha val="90000"/>
+      </a:schemeClr>
+    </dgm:fillClrLst>
+    <dgm:linClrLst meth="repeat">
+      <a:schemeClr val="accent1"/>
+    </dgm:linClrLst>
+    <dgm:effectClrLst/>
+    <dgm:txLinClrLst/>
+    <dgm:txFillClrLst meth="repeat">
+      <a:schemeClr val="dk1"/>
+    </dgm:txFillClrLst>
+    <dgm:txEffectClrLst/>
+  </dgm:styleLbl>
+  <dgm:styleLbl name="alignAcc1">
+    <dgm:fillClrLst meth="repeat">
+      <a:schemeClr val="lt1">
+        <a:alpha val="90000"/>
+      </a:schemeClr>
+    </dgm:fillClrLst>
+    <dgm:linClrLst meth="repeat">
+      <a:schemeClr val="accent1"/>
+    </dgm:linClrLst>
+    <dgm:effectClrLst/>
+    <dgm:txLinClrLst/>
+    <dgm:txFillClrLst meth="repeat">
+      <a:schemeClr val="dk1"/>
+    </dgm:txFillClrLst>
+    <dgm:txEffectClrLst/>
+  </dgm:styleLbl>
+  <dgm:styleLbl name="trAlignAcc1">
+    <dgm:fillClrLst meth="repeat">
+      <a:schemeClr val="lt1">
+        <a:alpha val="40000"/>
+      </a:schemeClr>
+    </dgm:fillClrLst>
+    <dgm:linClrLst meth="repeat">
+      <a:schemeClr val="accent1"/>
+    </dgm:linClrLst>
+    <dgm:effectClrLst/>
+    <dgm:txLinClrLst/>
+    <dgm:txFillClrLst meth="repeat">
+      <a:schemeClr val="dk1"/>
+    </dgm:txFillClrLst>
+    <dgm:txEffectClrLst/>
+  </dgm:styleLbl>
+  <dgm:styleLbl name="bgAcc1">
+    <dgm:fillClrLst meth="repeat">
+      <a:schemeClr val="lt1">
+        <a:alpha val="90000"/>
+      </a:schemeClr>
+    </dgm:fillClrLst>
+    <dgm:linClrLst meth="repeat">
+      <a:schemeClr val="accent1"/>
+    </dgm:linClrLst>
+    <dgm:effectClrLst/>
+    <dgm:txLinClrLst/>
+    <dgm:txFillClrLst meth="repeat">
+      <a:schemeClr val="dk1"/>
+    </dgm:txFillClrLst>
+    <dgm:txEffectClrLst/>
+  </dgm:styleLbl>
+  <dgm:styleLbl name="solidFgAcc1">
+    <dgm:fillClrLst meth="repeat">
+      <a:schemeClr val="lt1"/>
+    </dgm:fillClrLst>
+    <dgm:linClrLst meth="repeat">
+      <a:schemeClr val="accent1"/>
+    </dgm:linClrLst>
+    <dgm:effectClrLst/>
+    <dgm:txLinClrLst/>
+    <dgm:txFillClrLst meth="repeat">
+      <a:schemeClr val="dk1"/>
+    </dgm:txFillClrLst>
+    <dgm:txEffectClrLst/>
+  </dgm:styleLbl>
+  <dgm:styleLbl name="solidAlignAcc1">
+    <dgm:fillClrLst meth="repeat">
+      <a:schemeClr val="lt1"/>
+    </dgm:fillClrLst>
+    <dgm:linClrLst meth="repeat">
+      <a:schemeClr val="accent1"/>
+    </dgm:linClrLst>
+    <dgm:effectClrLst/>
+    <dgm:txLinClrLst/>
+    <dgm:txFillClrLst meth="repeat">
+      <a:schemeClr val="dk1"/>
+    </dgm:txFillClrLst>
+    <dgm:txEffectClrLst/>
+  </dgm:styleLbl>
+  <dgm:styleLbl name="solidBgAcc1">
+    <dgm:fillClrLst meth="repeat">
+      <a:schemeClr val="lt1"/>
+    </dgm:fillClrLst>
+    <dgm:linClrLst meth="repeat">
+      <a:schemeClr val="accent1"/>
+    </dgm:linClrLst>
+    <dgm:effectClrLst/>
+    <dgm:txLinClrLst/>
+    <dgm:txFillClrLst meth="repeat">
+      <a:schemeClr val="dk1"/>
+    </dgm:txFillClrLst>
+    <dgm:txEffectClrLst/>
+  </dgm:styleLbl>
+  <dgm:styleLbl name="fgAccFollowNode1">
+    <dgm:fillClrLst meth="repeat">
+      <a:schemeClr val="accent1">
+        <a:alpha val="90000"/>
+        <a:tint val="40000"/>
+      </a:schemeClr>
+    </dgm:fillClrLst>
+    <dgm:linClrLst meth="repeat">
+      <a:schemeClr val="accent1">
+        <a:alpha val="90000"/>
+        <a:tint val="40000"/>
+      </a:schemeClr>
+    </dgm:linClrLst>
+    <dgm:effectClrLst/>
+    <dgm:txLinClrLst/>
+    <dgm:txFillClrLst meth="repeat">
+      <a:schemeClr val="dk1"/>
+    </dgm:txFillClrLst>
+    <dgm:txEffectClrLst/>
+  </dgm:styleLbl>
+  <dgm:styleLbl name="alignAccFollowNode1">
+    <dgm:fillClrLst meth="repeat">
+      <a:schemeClr val="accent1">
+        <a:alpha val="90000"/>
+        <a:tint val="40000"/>
+      </a:schemeClr>
+    </dgm:fillClrLst>
+    <dgm:linClrLst meth="repeat">
+      <a:schemeClr val="accent1">
+        <a:alpha val="90000"/>
+        <a:tint val="40000"/>
+      </a:schemeClr>
+    </dgm:linClrLst>
+    <dgm:effectClrLst/>
+    <dgm:txLinClrLst/>
+    <dgm:txFillClrLst meth="repeat">
+      <a:schemeClr val="dk1"/>
+    </dgm:txFillClrLst>
+    <dgm:txEffectClrLst/>
+  </dgm:styleLbl>
+  <dgm:styleLbl name="bgAccFollowNode1">
+    <dgm:fillClrLst meth="repeat">
+      <a:schemeClr val="accent1">
+        <a:alpha val="90000"/>
+        <a:tint val="40000"/>
+      </a:schemeClr>
+    </dgm:fillClrLst>
+    <dgm:linClrLst meth="repeat">
+      <a:schemeClr val="accent1">
+        <a:alpha val="90000"/>
+        <a:tint val="40000"/>
+      </a:schemeClr>
+    </dgm:linClrLst>
+    <dgm:effectClrLst/>
+    <dgm:txLinClrLst/>
+    <dgm:txFillClrLst meth="repeat">
+      <a:schemeClr val="dk1"/>
+    </dgm:txFillClrLst>
+    <dgm:txEffectClrLst/>
+  </dgm:styleLbl>
+  <dgm:styleLbl name="fgAcc0">
+    <dgm:fillClrLst meth="repeat">
+      <a:schemeClr val="lt1">
+        <a:alpha val="90000"/>
+      </a:schemeClr>
+    </dgm:fillClrLst>
+    <dgm:linClrLst meth="repeat">
+      <a:schemeClr val="accent1"/>
+    </dgm:linClrLst>
+    <dgm:effectClrLst/>
+    <dgm:txLinClrLst/>
+    <dgm:txFillClrLst meth="repeat">
+      <a:schemeClr val="dk1"/>
+    </dgm:txFillClrLst>
+    <dgm:txEffectClrLst/>
+  </dgm:styleLbl>
+  <dgm:styleLbl name="fgAcc2">
+    <dgm:fillClrLst meth="repeat">
+      <a:schemeClr val="lt1">
+        <a:alpha val="90000"/>
+      </a:schemeClr>
+    </dgm:fillClrLst>
+    <dgm:linClrLst meth="repeat">
+      <a:schemeClr val="accent1"/>
+    </dgm:linClrLst>
+    <dgm:effectClrLst/>
+    <dgm:txLinClrLst/>
+    <dgm:txFillClrLst meth="repeat">
+      <a:schemeClr val="dk1"/>
+    </dgm:txFillClrLst>
+    <dgm:txEffectClrLst/>
+  </dgm:styleLbl>
+  <dgm:styleLbl name="fgAcc3">
+    <dgm:fillClrLst meth="repeat">
+      <a:schemeClr val="lt1">
+        <a:alpha val="90000"/>
+      </a:schemeClr>
+    </dgm:fillClrLst>
+    <dgm:linClrLst meth="repeat">
+      <a:schemeClr val="accent1"/>
+    </dgm:linClrLst>
+    <dgm:effectClrLst/>
+    <dgm:txLinClrLst/>
+    <dgm:txFillClrLst meth="repeat">
+      <a:schemeClr val="dk1"/>
+    </dgm:txFillClrLst>
+    <dgm:txEffectClrLst/>
+  </dgm:styleLbl>
+  <dgm:styleLbl name="fgAcc4">
+    <dgm:fillClrLst meth="repeat">
+      <a:schemeClr val="lt1">
+        <a:alpha val="90000"/>
+      </a:schemeClr>
+    </dgm:fillClrLst>
+    <dgm:linClrLst meth="repeat">
+      <a:schemeClr val="accent1"/>
+    </dgm:linClrLst>
+    <dgm:effectClrLst/>
+    <dgm:txLinClrLst/>
+    <dgm:txFillClrLst meth="repeat">
+      <a:schemeClr val="dk1"/>
+    </dgm:txFillClrLst>
+    <dgm:txEffectClrLst/>
+  </dgm:styleLbl>
+  <dgm:styleLbl name="bgShp">
+    <dgm:fillClrLst meth="repeat">
+      <a:schemeClr val="accent1">
+        <a:tint val="40000"/>
+      </a:schemeClr>
+    </dgm:fillClrLst>
+    <dgm:linClrLst meth="repeat">
+      <a:schemeClr val="accent1"/>
+    </dgm:linClrLst>
+    <dgm:effectClrLst/>
+    <dgm:txLinClrLst/>
+    <dgm:txFillClrLst meth="repeat">
+      <a:schemeClr val="dk1"/>
+    </dgm:txFillClrLst>
+    <dgm:txEffectClrLst/>
+  </dgm:styleLbl>
+  <dgm:styleLbl name="dkBgShp">
+    <dgm:fillClrLst meth="repeat">
+      <a:schemeClr val="accent1">
+        <a:shade val="80000"/>
+      </a:schemeClr>
+    </dgm:fillClrLst>
+    <dgm:linClrLst meth="repeat">
+      <a:schemeClr val="accent1"/>
+    </dgm:linClrLst>
+    <dgm:effectClrLst/>
+    <dgm:txLinClrLst/>
+    <dgm:txFillClrLst meth="repeat">
+      <a:schemeClr val="lt1"/>
+    </dgm:txFillClrLst>
+    <dgm:txEffectClrLst/>
+  </dgm:styleLbl>
+  <dgm:styleLbl name="trBgShp">
+    <dgm:fillClrLst meth="repeat">
+      <a:schemeClr val="accent1">
+        <a:tint val="50000"/>
+        <a:alpha val="40000"/>
+      </a:schemeClr>
+    </dgm:fillClrLst>
+    <dgm:linClrLst meth="repeat">
+      <a:schemeClr val="accent1"/>
+    </dgm:linClrLst>
+    <dgm:effectClrLst/>
+    <dgm:txLinClrLst/>
+    <dgm:txFillClrLst meth="repeat">
+      <a:schemeClr val="lt1"/>
+    </dgm:txFillClrLst>
+    <dgm:txEffectClrLst/>
+  </dgm:styleLbl>
+  <dgm:styleLbl name="fgShp">
+    <dgm:fillClrLst meth="repeat">
+      <a:schemeClr val="accent1">
+        <a:tint val="60000"/>
+      </a:schemeClr>
+    </dgm:fillClrLst>
+    <dgm:linClrLst meth="repeat">
+      <a:schemeClr val="lt1"/>
+    </dgm:linClrLst>
+    <dgm:effectClrLst/>
+    <dgm:txLinClrLst/>
+    <dgm:txFillClrLst meth="repeat">
+      <a:schemeClr val="dk1"/>
+    </dgm:txFillClrLst>
+    <dgm:txEffectClrLst/>
+  </dgm:styleLbl>
+  <dgm:styleLbl name="revTx">
+    <dgm:fillClrLst meth="repeat">
+      <a:schemeClr val="lt1">
+        <a:alpha val="0"/>
+      </a:schemeClr>
+    </dgm:fillClrLst>
+    <dgm:linClrLst meth="repeat">
+      <a:schemeClr val="dk1">
+        <a:alpha val="0"/>
+      </a:schemeClr>
+    </dgm:linClrLst>
+    <dgm:effectClrLst/>
+    <dgm:txLinClrLst/>
+    <dgm:txFillClrLst meth="repeat">
+      <a:schemeClr val="tx1"/>
+    </dgm:txFillClrLst>
+    <dgm:txEffectClrLst/>
+  </dgm:styleLbl>
+</dgm:colorsDef>
+</file>
+
 <file path=ppt/diagrams/data1.xml><?xml version="1.0" encoding="utf-8"?>
 <dgm:dataModel xmlns:dgm="http://schemas.openxmlformats.org/drawingml/2006/diagram" xmlns:a="http://schemas.openxmlformats.org/drawingml/2006/main">
   <dgm:ptLst>
     <dgm:pt modelId="{30BAB4FE-EE60-46EA-BF0C-0C7B78AB8CF8}" type="doc">
-      <dgm:prSet loTypeId="urn:microsoft.com/office/officeart/2008/layout/LinedList" loCatId="list" qsTypeId="urn:microsoft.com/office/officeart/2005/8/quickstyle/simple4" qsCatId="simple" csTypeId="urn:microsoft.com/office/officeart/2005/8/colors/accent3_2" csCatId="accent3"/>
+      <dgm:prSet loTypeId="urn:microsoft.com/office/officeart/2008/layout/LinedList" loCatId="list" qsTypeId="urn:microsoft.com/office/officeart/2005/8/quickstyle/simple4" qsCatId="simple" csTypeId="urn:microsoft.com/office/officeart/2005/8/colors/accent3_2" csCatId="accent3" phldr="1"/>
       <dgm:spPr/>
       <dgm:t>
         <a:bodyPr/>
@@ -1647,7 +2398,7 @@
         <a:p>
           <a:r>
             <a:rPr lang="en-US" sz="4000" dirty="0" err="1"/>
-            <a:t>Impacto</a:t>
+            <a:t>Motivaciones</a:t>
           </a:r>
           <a:endParaRPr lang="en-US" sz="4000" dirty="0"/>
         </a:p>
@@ -1682,6 +2433,14 @@
         <a:bodyPr/>
         <a:lstStyle/>
         <a:p>
+          <a:r>
+            <a:rPr lang="en-US" sz="4000" dirty="0" err="1"/>
+            <a:t>Impacto</a:t>
+          </a:r>
+          <a:r>
+            <a:rPr lang="en-US" sz="4000" dirty="0"/>
+            <a:t> y </a:t>
+          </a:r>
           <a:r>
             <a:rPr lang="en-US" sz="4000" dirty="0" err="1"/>
             <a:t>Consecuencias</a:t>
@@ -2113,6 +2872,444 @@
 </dgm:dataModel>
 </file>
 
+<file path=ppt/diagrams/data3.xml><?xml version="1.0" encoding="utf-8"?>
+<dgm:dataModel xmlns:dgm="http://schemas.openxmlformats.org/drawingml/2006/diagram" xmlns:a="http://schemas.openxmlformats.org/drawingml/2006/main">
+  <dgm:ptLst>
+    <dgm:pt modelId="{5C9D5002-B15D-4A12-B4C5-9C718C6EF9AD}" type="doc">
+      <dgm:prSet loTypeId="urn:microsoft.com/office/officeart/2018/2/layout/IconVerticalSolidList" loCatId="icon" qsTypeId="urn:microsoft.com/office/officeart/2005/8/quickstyle/simple1" qsCatId="simple" csTypeId="urn:microsoft.com/office/officeart/2005/8/colors/accent1_2" csCatId="accent1" phldr="1"/>
+      <dgm:spPr/>
+      <dgm:t>
+        <a:bodyPr/>
+        <a:lstStyle/>
+        <a:p>
+          <a:endParaRPr lang="en-US"/>
+        </a:p>
+      </dgm:t>
+    </dgm:pt>
+    <dgm:pt modelId="{BB548C03-456F-4B13-9585-DB01C3F42BAE}">
+      <dgm:prSet/>
+      <dgm:spPr/>
+      <dgm:t>
+        <a:bodyPr/>
+        <a:lstStyle/>
+        <a:p>
+          <a:pPr>
+            <a:lnSpc>
+              <a:spcPct val="100000"/>
+            </a:lnSpc>
+          </a:pPr>
+          <a:r>
+            <a:rPr lang="es-ES" dirty="0"/>
+            <a:t>Alta temperatura + Baja presión fiscal</a:t>
+          </a:r>
+          <a:endParaRPr lang="en-US" dirty="0"/>
+        </a:p>
+      </dgm:t>
+    </dgm:pt>
+    <dgm:pt modelId="{A5F31932-3B31-4A1D-B224-622B762743CC}" type="parTrans" cxnId="{8E7D95AC-58E8-45DE-98AC-C10C668D074E}">
+      <dgm:prSet/>
+      <dgm:spPr/>
+      <dgm:t>
+        <a:bodyPr/>
+        <a:lstStyle/>
+        <a:p>
+          <a:endParaRPr lang="en-US"/>
+        </a:p>
+      </dgm:t>
+    </dgm:pt>
+    <dgm:pt modelId="{AC52958F-10B5-4BE8-9BE8-D5A698E57908}" type="sibTrans" cxnId="{8E7D95AC-58E8-45DE-98AC-C10C668D074E}">
+      <dgm:prSet/>
+      <dgm:spPr/>
+      <dgm:t>
+        <a:bodyPr/>
+        <a:lstStyle/>
+        <a:p>
+          <a:endParaRPr lang="en-US"/>
+        </a:p>
+      </dgm:t>
+    </dgm:pt>
+    <dgm:pt modelId="{14A91672-5114-4879-A8D0-4BABECB448CB}">
+      <dgm:prSet/>
+      <dgm:spPr/>
+      <dgm:t>
+        <a:bodyPr/>
+        <a:lstStyle/>
+        <a:p>
+          <a:pPr>
+            <a:lnSpc>
+              <a:spcPct val="100000"/>
+            </a:lnSpc>
+          </a:pPr>
+          <a:r>
+            <a:rPr lang="es-ES" dirty="0"/>
+            <a:t>Alta temperatura + Alta presión fiscal</a:t>
+          </a:r>
+          <a:endParaRPr lang="en-US" dirty="0"/>
+        </a:p>
+      </dgm:t>
+    </dgm:pt>
+    <dgm:pt modelId="{0C344EF4-D915-4A75-B840-BDF962C6A51D}" type="parTrans" cxnId="{9DF1313E-ECBC-4233-9E5E-E0435BB4529E}">
+      <dgm:prSet/>
+      <dgm:spPr/>
+      <dgm:t>
+        <a:bodyPr/>
+        <a:lstStyle/>
+        <a:p>
+          <a:endParaRPr lang="en-US"/>
+        </a:p>
+      </dgm:t>
+    </dgm:pt>
+    <dgm:pt modelId="{E344F457-A984-441A-BDEF-0C86748A0634}" type="sibTrans" cxnId="{9DF1313E-ECBC-4233-9E5E-E0435BB4529E}">
+      <dgm:prSet/>
+      <dgm:spPr/>
+      <dgm:t>
+        <a:bodyPr/>
+        <a:lstStyle/>
+        <a:p>
+          <a:endParaRPr lang="en-US"/>
+        </a:p>
+      </dgm:t>
+    </dgm:pt>
+    <dgm:pt modelId="{0285CD1F-B720-401F-9D02-526A117E69C4}">
+      <dgm:prSet/>
+      <dgm:spPr/>
+      <dgm:t>
+        <a:bodyPr/>
+        <a:lstStyle/>
+        <a:p>
+          <a:pPr>
+            <a:lnSpc>
+              <a:spcPct val="100000"/>
+            </a:lnSpc>
+          </a:pPr>
+          <a:r>
+            <a:rPr lang="es-ES" dirty="0"/>
+            <a:t>Baja temperatura + Baja presión fiscal</a:t>
+          </a:r>
+          <a:endParaRPr lang="en-US" dirty="0"/>
+        </a:p>
+      </dgm:t>
+    </dgm:pt>
+    <dgm:pt modelId="{CF6103E0-8558-4A8A-8A7B-5B3117326F19}" type="parTrans" cxnId="{9CE39DF2-F373-4983-B550-901D24023704}">
+      <dgm:prSet/>
+      <dgm:spPr/>
+      <dgm:t>
+        <a:bodyPr/>
+        <a:lstStyle/>
+        <a:p>
+          <a:endParaRPr lang="en-US"/>
+        </a:p>
+      </dgm:t>
+    </dgm:pt>
+    <dgm:pt modelId="{A673CE0C-B1B9-4D25-9CF8-C260606A802F}" type="sibTrans" cxnId="{9CE39DF2-F373-4983-B550-901D24023704}">
+      <dgm:prSet/>
+      <dgm:spPr/>
+      <dgm:t>
+        <a:bodyPr/>
+        <a:lstStyle/>
+        <a:p>
+          <a:endParaRPr lang="en-US"/>
+        </a:p>
+      </dgm:t>
+    </dgm:pt>
+    <dgm:pt modelId="{42946B30-F209-4FC7-856F-917278548CDF}">
+      <dgm:prSet/>
+      <dgm:spPr/>
+      <dgm:t>
+        <a:bodyPr/>
+        <a:lstStyle/>
+        <a:p>
+          <a:pPr>
+            <a:lnSpc>
+              <a:spcPct val="100000"/>
+            </a:lnSpc>
+          </a:pPr>
+          <a:r>
+            <a:rPr lang="es-ES" dirty="0"/>
+            <a:t>Baja temperatura + Alta presión fiscal</a:t>
+          </a:r>
+          <a:endParaRPr lang="en-US" dirty="0"/>
+        </a:p>
+      </dgm:t>
+    </dgm:pt>
+    <dgm:pt modelId="{3E5966A7-BDE5-45D7-93B7-E3302A0B4B1C}" type="parTrans" cxnId="{E7B8EF12-F9DE-4BE3-99F7-6EC1FF8F4D32}">
+      <dgm:prSet/>
+      <dgm:spPr/>
+      <dgm:t>
+        <a:bodyPr/>
+        <a:lstStyle/>
+        <a:p>
+          <a:endParaRPr lang="en-US"/>
+        </a:p>
+      </dgm:t>
+    </dgm:pt>
+    <dgm:pt modelId="{CA908EBA-1492-427D-9C70-651C1039B429}" type="sibTrans" cxnId="{E7B8EF12-F9DE-4BE3-99F7-6EC1FF8F4D32}">
+      <dgm:prSet/>
+      <dgm:spPr/>
+      <dgm:t>
+        <a:bodyPr/>
+        <a:lstStyle/>
+        <a:p>
+          <a:endParaRPr lang="en-US"/>
+        </a:p>
+      </dgm:t>
+    </dgm:pt>
+    <dgm:pt modelId="{9379DC0E-7CA0-4527-A2CF-729643C645D7}" type="pres">
+      <dgm:prSet presAssocID="{5C9D5002-B15D-4A12-B4C5-9C718C6EF9AD}" presName="root" presStyleCnt="0">
+        <dgm:presLayoutVars>
+          <dgm:dir/>
+          <dgm:resizeHandles val="exact"/>
+        </dgm:presLayoutVars>
+      </dgm:prSet>
+      <dgm:spPr/>
+    </dgm:pt>
+    <dgm:pt modelId="{3D4C016B-5BFC-4001-9BE0-8975EA9E40CF}" type="pres">
+      <dgm:prSet presAssocID="{42946B30-F209-4FC7-856F-917278548CDF}" presName="compNode" presStyleCnt="0"/>
+      <dgm:spPr/>
+    </dgm:pt>
+    <dgm:pt modelId="{FA432C18-2628-471D-99D3-219277B81B43}" type="pres">
+      <dgm:prSet presAssocID="{42946B30-F209-4FC7-856F-917278548CDF}" presName="bgRect" presStyleLbl="bgShp" presStyleIdx="0" presStyleCnt="4"/>
+      <dgm:spPr/>
+    </dgm:pt>
+    <dgm:pt modelId="{022014BD-FCE2-4868-BFF4-50C907C0DBB8}" type="pres">
+      <dgm:prSet presAssocID="{42946B30-F209-4FC7-856F-917278548CDF}" presName="iconRect" presStyleLbl="node1" presStyleIdx="0" presStyleCnt="4"/>
+      <dgm:spPr>
+        <a:blipFill>
+          <a:blip xmlns:r="http://schemas.openxmlformats.org/officeDocument/2006/relationships" r:embed="rId1">
+            <a:extLst>
+              <a:ext uri="{96DAC541-7B7A-43D3-8B79-37D633B846F1}">
+                <asvg:svgBlip xmlns:asvg="http://schemas.microsoft.com/office/drawing/2016/SVG/main" r:embed="rId2"/>
+              </a:ext>
+            </a:extLst>
+          </a:blip>
+          <a:srcRect/>
+          <a:stretch>
+            <a:fillRect/>
+          </a:stretch>
+        </a:blipFill>
+        <a:ln>
+          <a:noFill/>
+        </a:ln>
+      </dgm:spPr>
+      <dgm:extLst>
+        <a:ext uri="{E40237B7-FDA0-4F09-8148-C483321AD2D9}">
+          <dgm14:cNvPr xmlns:dgm14="http://schemas.microsoft.com/office/drawing/2010/diagram" id="0" name="" descr="Downward trend graph with solid fill"/>
+        </a:ext>
+      </dgm:extLst>
+    </dgm:pt>
+    <dgm:pt modelId="{BA0FA268-21EF-4C83-8987-2CA26CCD6D43}" type="pres">
+      <dgm:prSet presAssocID="{42946B30-F209-4FC7-856F-917278548CDF}" presName="spaceRect" presStyleCnt="0"/>
+      <dgm:spPr/>
+    </dgm:pt>
+    <dgm:pt modelId="{95155B34-91BB-45C8-81AA-364DB5B80814}" type="pres">
+      <dgm:prSet presAssocID="{42946B30-F209-4FC7-856F-917278548CDF}" presName="parTx" presStyleLbl="revTx" presStyleIdx="0" presStyleCnt="4">
+        <dgm:presLayoutVars>
+          <dgm:chMax val="0"/>
+          <dgm:chPref val="0"/>
+        </dgm:presLayoutVars>
+      </dgm:prSet>
+      <dgm:spPr/>
+    </dgm:pt>
+    <dgm:pt modelId="{990E7C90-4ED3-4ACC-A7F6-D2F2BDE3DCA9}" type="pres">
+      <dgm:prSet presAssocID="{CA908EBA-1492-427D-9C70-651C1039B429}" presName="sibTrans" presStyleCnt="0"/>
+      <dgm:spPr/>
+    </dgm:pt>
+    <dgm:pt modelId="{D16ED70B-D4A6-43A0-8F1A-701F58B2D7D3}" type="pres">
+      <dgm:prSet presAssocID="{14A91672-5114-4879-A8D0-4BABECB448CB}" presName="compNode" presStyleCnt="0"/>
+      <dgm:spPr/>
+    </dgm:pt>
+    <dgm:pt modelId="{FA22F20B-A377-4036-8878-A133F45CBE28}" type="pres">
+      <dgm:prSet presAssocID="{14A91672-5114-4879-A8D0-4BABECB448CB}" presName="bgRect" presStyleLbl="bgShp" presStyleIdx="1" presStyleCnt="4"/>
+      <dgm:spPr/>
+    </dgm:pt>
+    <dgm:pt modelId="{5ADEDBD4-29C4-4EE7-976A-10BFACF1F231}" type="pres">
+      <dgm:prSet presAssocID="{14A91672-5114-4879-A8D0-4BABECB448CB}" presName="iconRect" presStyleLbl="node1" presStyleIdx="1" presStyleCnt="4"/>
+      <dgm:spPr>
+        <a:blipFill>
+          <a:blip xmlns:r="http://schemas.openxmlformats.org/officeDocument/2006/relationships" r:embed="rId3">
+            <a:extLst>
+              <a:ext uri="{96DAC541-7B7A-43D3-8B79-37D633B846F1}">
+                <asvg:svgBlip xmlns:asvg="http://schemas.microsoft.com/office/drawing/2016/SVG/main" r:embed="rId4"/>
+              </a:ext>
+            </a:extLst>
+          </a:blip>
+          <a:srcRect/>
+          <a:stretch>
+            <a:fillRect/>
+          </a:stretch>
+        </a:blipFill>
+        <a:ln>
+          <a:noFill/>
+        </a:ln>
+      </dgm:spPr>
+      <dgm:extLst>
+        <a:ext uri="{E40237B7-FDA0-4F09-8148-C483321AD2D9}">
+          <dgm14:cNvPr xmlns:dgm14="http://schemas.microsoft.com/office/drawing/2010/diagram" id="0" name="" descr="Bar chart with solid fill"/>
+        </a:ext>
+      </dgm:extLst>
+    </dgm:pt>
+    <dgm:pt modelId="{1A1FE935-C631-4206-B1B9-288E1B1008ED}" type="pres">
+      <dgm:prSet presAssocID="{14A91672-5114-4879-A8D0-4BABECB448CB}" presName="spaceRect" presStyleCnt="0"/>
+      <dgm:spPr/>
+    </dgm:pt>
+    <dgm:pt modelId="{8D86E122-A65E-4EF0-943F-2D6AF505CDCD}" type="pres">
+      <dgm:prSet presAssocID="{14A91672-5114-4879-A8D0-4BABECB448CB}" presName="parTx" presStyleLbl="revTx" presStyleIdx="1" presStyleCnt="4">
+        <dgm:presLayoutVars>
+          <dgm:chMax val="0"/>
+          <dgm:chPref val="0"/>
+        </dgm:presLayoutVars>
+      </dgm:prSet>
+      <dgm:spPr/>
+    </dgm:pt>
+    <dgm:pt modelId="{7272550F-58BD-4CE1-89A4-9ED32E910C0D}" type="pres">
+      <dgm:prSet presAssocID="{E344F457-A984-441A-BDEF-0C86748A0634}" presName="sibTrans" presStyleCnt="0"/>
+      <dgm:spPr/>
+    </dgm:pt>
+    <dgm:pt modelId="{1D4A59D2-8E30-492D-B1CC-7D70EDF22911}" type="pres">
+      <dgm:prSet presAssocID="{0285CD1F-B720-401F-9D02-526A117E69C4}" presName="compNode" presStyleCnt="0"/>
+      <dgm:spPr/>
+    </dgm:pt>
+    <dgm:pt modelId="{29BC95D8-5064-49A8-B44A-4C3DEE02478D}" type="pres">
+      <dgm:prSet presAssocID="{0285CD1F-B720-401F-9D02-526A117E69C4}" presName="bgRect" presStyleLbl="bgShp" presStyleIdx="2" presStyleCnt="4"/>
+      <dgm:spPr/>
+    </dgm:pt>
+    <dgm:pt modelId="{F7156BEF-9A9A-458E-8FC2-3F845097DF20}" type="pres">
+      <dgm:prSet presAssocID="{0285CD1F-B720-401F-9D02-526A117E69C4}" presName="iconRect" presStyleLbl="node1" presStyleIdx="2" presStyleCnt="4"/>
+      <dgm:spPr>
+        <a:blipFill>
+          <a:blip xmlns:r="http://schemas.openxmlformats.org/officeDocument/2006/relationships" r:embed="rId3">
+            <a:extLst>
+              <a:ext uri="{96DAC541-7B7A-43D3-8B79-37D633B846F1}">
+                <asvg:svgBlip xmlns:asvg="http://schemas.microsoft.com/office/drawing/2016/SVG/main" r:embed="rId4"/>
+              </a:ext>
+            </a:extLst>
+          </a:blip>
+          <a:srcRect/>
+          <a:stretch>
+            <a:fillRect/>
+          </a:stretch>
+        </a:blipFill>
+        <a:ln>
+          <a:noFill/>
+        </a:ln>
+      </dgm:spPr>
+      <dgm:extLst>
+        <a:ext uri="{E40237B7-FDA0-4F09-8148-C483321AD2D9}">
+          <dgm14:cNvPr xmlns:dgm14="http://schemas.microsoft.com/office/drawing/2010/diagram" id="0" name="" descr="Bar chart with solid fill"/>
+        </a:ext>
+      </dgm:extLst>
+    </dgm:pt>
+    <dgm:pt modelId="{D118AE45-632F-4BBE-B4DE-D281573AD07D}" type="pres">
+      <dgm:prSet presAssocID="{0285CD1F-B720-401F-9D02-526A117E69C4}" presName="spaceRect" presStyleCnt="0"/>
+      <dgm:spPr/>
+    </dgm:pt>
+    <dgm:pt modelId="{E2242A6E-842E-4B80-BF03-34273757DA56}" type="pres">
+      <dgm:prSet presAssocID="{0285CD1F-B720-401F-9D02-526A117E69C4}" presName="parTx" presStyleLbl="revTx" presStyleIdx="2" presStyleCnt="4">
+        <dgm:presLayoutVars>
+          <dgm:chMax val="0"/>
+          <dgm:chPref val="0"/>
+        </dgm:presLayoutVars>
+      </dgm:prSet>
+      <dgm:spPr/>
+    </dgm:pt>
+    <dgm:pt modelId="{89F587BB-7373-4C2F-8245-458094884CB3}" type="pres">
+      <dgm:prSet presAssocID="{A673CE0C-B1B9-4D25-9CF8-C260606A802F}" presName="sibTrans" presStyleCnt="0"/>
+      <dgm:spPr/>
+    </dgm:pt>
+    <dgm:pt modelId="{EE980958-C375-41E7-B1A2-84B7CCF07192}" type="pres">
+      <dgm:prSet presAssocID="{BB548C03-456F-4B13-9585-DB01C3F42BAE}" presName="compNode" presStyleCnt="0"/>
+      <dgm:spPr/>
+    </dgm:pt>
+    <dgm:pt modelId="{D243BF4D-288B-4437-BD89-5A9C81B8C0BB}" type="pres">
+      <dgm:prSet presAssocID="{BB548C03-456F-4B13-9585-DB01C3F42BAE}" presName="bgRect" presStyleLbl="bgShp" presStyleIdx="3" presStyleCnt="4"/>
+      <dgm:spPr/>
+    </dgm:pt>
+    <dgm:pt modelId="{3964544A-CC28-449E-844A-A7E8732249E0}" type="pres">
+      <dgm:prSet presAssocID="{BB548C03-456F-4B13-9585-DB01C3F42BAE}" presName="iconRect" presStyleLbl="node1" presStyleIdx="3" presStyleCnt="4"/>
+      <dgm:spPr>
+        <a:blipFill>
+          <a:blip xmlns:r="http://schemas.openxmlformats.org/officeDocument/2006/relationships" r:embed="rId5">
+            <a:extLst>
+              <a:ext uri="{28A0092B-C50C-407E-A947-70E740481C1C}">
+                <a14:useLocalDpi xmlns:a14="http://schemas.microsoft.com/office/drawing/2010/main" val="0"/>
+              </a:ext>
+              <a:ext uri="{96DAC541-7B7A-43D3-8B79-37D633B846F1}">
+                <asvg:svgBlip xmlns:asvg="http://schemas.microsoft.com/office/drawing/2016/SVG/main" r:embed="rId6"/>
+              </a:ext>
+            </a:extLst>
+          </a:blip>
+          <a:stretch>
+            <a:fillRect/>
+          </a:stretch>
+        </a:blipFill>
+        <a:ln>
+          <a:noFill/>
+        </a:ln>
+      </dgm:spPr>
+      <dgm:extLst>
+        <a:ext uri="{E40237B7-FDA0-4F09-8148-C483321AD2D9}">
+          <dgm14:cNvPr xmlns:dgm14="http://schemas.microsoft.com/office/drawing/2010/diagram" id="0" name="" descr="Upward trend"/>
+        </a:ext>
+      </dgm:extLst>
+    </dgm:pt>
+    <dgm:pt modelId="{60AE4C58-F93D-44B3-925A-F9B072A01848}" type="pres">
+      <dgm:prSet presAssocID="{BB548C03-456F-4B13-9585-DB01C3F42BAE}" presName="spaceRect" presStyleCnt="0"/>
+      <dgm:spPr/>
+    </dgm:pt>
+    <dgm:pt modelId="{B6A63DA1-A857-4D1C-815F-37421645B5C9}" type="pres">
+      <dgm:prSet presAssocID="{BB548C03-456F-4B13-9585-DB01C3F42BAE}" presName="parTx" presStyleLbl="revTx" presStyleIdx="3" presStyleCnt="4">
+        <dgm:presLayoutVars>
+          <dgm:chMax val="0"/>
+          <dgm:chPref val="0"/>
+        </dgm:presLayoutVars>
+      </dgm:prSet>
+      <dgm:spPr/>
+    </dgm:pt>
+  </dgm:ptLst>
+  <dgm:cxnLst>
+    <dgm:cxn modelId="{E7B8EF12-F9DE-4BE3-99F7-6EC1FF8F4D32}" srcId="{5C9D5002-B15D-4A12-B4C5-9C718C6EF9AD}" destId="{42946B30-F209-4FC7-856F-917278548CDF}" srcOrd="0" destOrd="0" parTransId="{3E5966A7-BDE5-45D7-93B7-E3302A0B4B1C}" sibTransId="{CA908EBA-1492-427D-9C70-651C1039B429}"/>
+    <dgm:cxn modelId="{9DF1313E-ECBC-4233-9E5E-E0435BB4529E}" srcId="{5C9D5002-B15D-4A12-B4C5-9C718C6EF9AD}" destId="{14A91672-5114-4879-A8D0-4BABECB448CB}" srcOrd="1" destOrd="0" parTransId="{0C344EF4-D915-4A75-B840-BDF962C6A51D}" sibTransId="{E344F457-A984-441A-BDEF-0C86748A0634}"/>
+    <dgm:cxn modelId="{8FC21974-DD41-40B6-A21D-3C640E765F28}" type="presOf" srcId="{42946B30-F209-4FC7-856F-917278548CDF}" destId="{95155B34-91BB-45C8-81AA-364DB5B80814}" srcOrd="0" destOrd="0" presId="urn:microsoft.com/office/officeart/2018/2/layout/IconVerticalSolidList"/>
+    <dgm:cxn modelId="{DFE0A48F-AD3F-4E03-8E0C-76BEC139A778}" type="presOf" srcId="{BB548C03-456F-4B13-9585-DB01C3F42BAE}" destId="{B6A63DA1-A857-4D1C-815F-37421645B5C9}" srcOrd="0" destOrd="0" presId="urn:microsoft.com/office/officeart/2018/2/layout/IconVerticalSolidList"/>
+    <dgm:cxn modelId="{8E7D95AC-58E8-45DE-98AC-C10C668D074E}" srcId="{5C9D5002-B15D-4A12-B4C5-9C718C6EF9AD}" destId="{BB548C03-456F-4B13-9585-DB01C3F42BAE}" srcOrd="3" destOrd="0" parTransId="{A5F31932-3B31-4A1D-B224-622B762743CC}" sibTransId="{AC52958F-10B5-4BE8-9BE8-D5A698E57908}"/>
+    <dgm:cxn modelId="{37130DBB-56B1-426D-99E9-3F17C6330ED3}" type="presOf" srcId="{5C9D5002-B15D-4A12-B4C5-9C718C6EF9AD}" destId="{9379DC0E-7CA0-4527-A2CF-729643C645D7}" srcOrd="0" destOrd="0" presId="urn:microsoft.com/office/officeart/2018/2/layout/IconVerticalSolidList"/>
+    <dgm:cxn modelId="{B25A61C8-8E74-41BF-8E17-4F40DEB581C9}" type="presOf" srcId="{0285CD1F-B720-401F-9D02-526A117E69C4}" destId="{E2242A6E-842E-4B80-BF03-34273757DA56}" srcOrd="0" destOrd="0" presId="urn:microsoft.com/office/officeart/2018/2/layout/IconVerticalSolidList"/>
+    <dgm:cxn modelId="{967172D5-2A31-4827-8F97-05D6024C7671}" type="presOf" srcId="{14A91672-5114-4879-A8D0-4BABECB448CB}" destId="{8D86E122-A65E-4EF0-943F-2D6AF505CDCD}" srcOrd="0" destOrd="0" presId="urn:microsoft.com/office/officeart/2018/2/layout/IconVerticalSolidList"/>
+    <dgm:cxn modelId="{9CE39DF2-F373-4983-B550-901D24023704}" srcId="{5C9D5002-B15D-4A12-B4C5-9C718C6EF9AD}" destId="{0285CD1F-B720-401F-9D02-526A117E69C4}" srcOrd="2" destOrd="0" parTransId="{CF6103E0-8558-4A8A-8A7B-5B3117326F19}" sibTransId="{A673CE0C-B1B9-4D25-9CF8-C260606A802F}"/>
+    <dgm:cxn modelId="{ADBAC987-ED3B-49F9-A572-DA894E42D314}" type="presParOf" srcId="{9379DC0E-7CA0-4527-A2CF-729643C645D7}" destId="{3D4C016B-5BFC-4001-9BE0-8975EA9E40CF}" srcOrd="0" destOrd="0" presId="urn:microsoft.com/office/officeart/2018/2/layout/IconVerticalSolidList"/>
+    <dgm:cxn modelId="{2271D1BA-1442-495D-8706-5F8F3C6194BC}" type="presParOf" srcId="{3D4C016B-5BFC-4001-9BE0-8975EA9E40CF}" destId="{FA432C18-2628-471D-99D3-219277B81B43}" srcOrd="0" destOrd="0" presId="urn:microsoft.com/office/officeart/2018/2/layout/IconVerticalSolidList"/>
+    <dgm:cxn modelId="{3C803568-DD4A-442B-A41F-72D869279850}" type="presParOf" srcId="{3D4C016B-5BFC-4001-9BE0-8975EA9E40CF}" destId="{022014BD-FCE2-4868-BFF4-50C907C0DBB8}" srcOrd="1" destOrd="0" presId="urn:microsoft.com/office/officeart/2018/2/layout/IconVerticalSolidList"/>
+    <dgm:cxn modelId="{94497A9F-B09C-491E-ACBB-35A7751A6952}" type="presParOf" srcId="{3D4C016B-5BFC-4001-9BE0-8975EA9E40CF}" destId="{BA0FA268-21EF-4C83-8987-2CA26CCD6D43}" srcOrd="2" destOrd="0" presId="urn:microsoft.com/office/officeart/2018/2/layout/IconVerticalSolidList"/>
+    <dgm:cxn modelId="{F2AB7738-C0A2-4BD4-917A-8EF00D56948F}" type="presParOf" srcId="{3D4C016B-5BFC-4001-9BE0-8975EA9E40CF}" destId="{95155B34-91BB-45C8-81AA-364DB5B80814}" srcOrd="3" destOrd="0" presId="urn:microsoft.com/office/officeart/2018/2/layout/IconVerticalSolidList"/>
+    <dgm:cxn modelId="{7D86CCB2-1591-447F-8BC3-9B895BB2CE80}" type="presParOf" srcId="{9379DC0E-7CA0-4527-A2CF-729643C645D7}" destId="{990E7C90-4ED3-4ACC-A7F6-D2F2BDE3DCA9}" srcOrd="1" destOrd="0" presId="urn:microsoft.com/office/officeart/2018/2/layout/IconVerticalSolidList"/>
+    <dgm:cxn modelId="{95CBF6DF-BE0F-4FCD-B027-63B22F439EDC}" type="presParOf" srcId="{9379DC0E-7CA0-4527-A2CF-729643C645D7}" destId="{D16ED70B-D4A6-43A0-8F1A-701F58B2D7D3}" srcOrd="2" destOrd="0" presId="urn:microsoft.com/office/officeart/2018/2/layout/IconVerticalSolidList"/>
+    <dgm:cxn modelId="{AC67879E-2C61-4C5B-B419-E356CDCF4E69}" type="presParOf" srcId="{D16ED70B-D4A6-43A0-8F1A-701F58B2D7D3}" destId="{FA22F20B-A377-4036-8878-A133F45CBE28}" srcOrd="0" destOrd="0" presId="urn:microsoft.com/office/officeart/2018/2/layout/IconVerticalSolidList"/>
+    <dgm:cxn modelId="{B55DBAC0-7E6C-4402-B6FA-785944642308}" type="presParOf" srcId="{D16ED70B-D4A6-43A0-8F1A-701F58B2D7D3}" destId="{5ADEDBD4-29C4-4EE7-976A-10BFACF1F231}" srcOrd="1" destOrd="0" presId="urn:microsoft.com/office/officeart/2018/2/layout/IconVerticalSolidList"/>
+    <dgm:cxn modelId="{5D6F80FC-535D-4ECB-BF4E-D9ADDEACECF0}" type="presParOf" srcId="{D16ED70B-D4A6-43A0-8F1A-701F58B2D7D3}" destId="{1A1FE935-C631-4206-B1B9-288E1B1008ED}" srcOrd="2" destOrd="0" presId="urn:microsoft.com/office/officeart/2018/2/layout/IconVerticalSolidList"/>
+    <dgm:cxn modelId="{81966225-FB14-4089-A793-7469A8F01BAE}" type="presParOf" srcId="{D16ED70B-D4A6-43A0-8F1A-701F58B2D7D3}" destId="{8D86E122-A65E-4EF0-943F-2D6AF505CDCD}" srcOrd="3" destOrd="0" presId="urn:microsoft.com/office/officeart/2018/2/layout/IconVerticalSolidList"/>
+    <dgm:cxn modelId="{6E748F35-14B5-408B-93D5-66E9F0DD83A7}" type="presParOf" srcId="{9379DC0E-7CA0-4527-A2CF-729643C645D7}" destId="{7272550F-58BD-4CE1-89A4-9ED32E910C0D}" srcOrd="3" destOrd="0" presId="urn:microsoft.com/office/officeart/2018/2/layout/IconVerticalSolidList"/>
+    <dgm:cxn modelId="{33B6E961-5027-44AD-9D0A-EFF4A2CD5C08}" type="presParOf" srcId="{9379DC0E-7CA0-4527-A2CF-729643C645D7}" destId="{1D4A59D2-8E30-492D-B1CC-7D70EDF22911}" srcOrd="4" destOrd="0" presId="urn:microsoft.com/office/officeart/2018/2/layout/IconVerticalSolidList"/>
+    <dgm:cxn modelId="{C2C17D82-91E6-4198-BE28-6022E0FED6D0}" type="presParOf" srcId="{1D4A59D2-8E30-492D-B1CC-7D70EDF22911}" destId="{29BC95D8-5064-49A8-B44A-4C3DEE02478D}" srcOrd="0" destOrd="0" presId="urn:microsoft.com/office/officeart/2018/2/layout/IconVerticalSolidList"/>
+    <dgm:cxn modelId="{98DC170B-F661-45D5-A48A-1E94C7867159}" type="presParOf" srcId="{1D4A59D2-8E30-492D-B1CC-7D70EDF22911}" destId="{F7156BEF-9A9A-458E-8FC2-3F845097DF20}" srcOrd="1" destOrd="0" presId="urn:microsoft.com/office/officeart/2018/2/layout/IconVerticalSolidList"/>
+    <dgm:cxn modelId="{2613F89B-7406-4160-91F0-3E51E14F27AE}" type="presParOf" srcId="{1D4A59D2-8E30-492D-B1CC-7D70EDF22911}" destId="{D118AE45-632F-4BBE-B4DE-D281573AD07D}" srcOrd="2" destOrd="0" presId="urn:microsoft.com/office/officeart/2018/2/layout/IconVerticalSolidList"/>
+    <dgm:cxn modelId="{42E90A92-2F2B-49E0-8D6F-1C39AB4EC189}" type="presParOf" srcId="{1D4A59D2-8E30-492D-B1CC-7D70EDF22911}" destId="{E2242A6E-842E-4B80-BF03-34273757DA56}" srcOrd="3" destOrd="0" presId="urn:microsoft.com/office/officeart/2018/2/layout/IconVerticalSolidList"/>
+    <dgm:cxn modelId="{ACCEC6F6-3887-4FD3-8212-E6D646BB58D3}" type="presParOf" srcId="{9379DC0E-7CA0-4527-A2CF-729643C645D7}" destId="{89F587BB-7373-4C2F-8245-458094884CB3}" srcOrd="5" destOrd="0" presId="urn:microsoft.com/office/officeart/2018/2/layout/IconVerticalSolidList"/>
+    <dgm:cxn modelId="{19802F44-6069-44F8-B720-70BA92E93711}" type="presParOf" srcId="{9379DC0E-7CA0-4527-A2CF-729643C645D7}" destId="{EE980958-C375-41E7-B1A2-84B7CCF07192}" srcOrd="6" destOrd="0" presId="urn:microsoft.com/office/officeart/2018/2/layout/IconVerticalSolidList"/>
+    <dgm:cxn modelId="{FA1CA07D-A300-4224-8A41-43622CF94153}" type="presParOf" srcId="{EE980958-C375-41E7-B1A2-84B7CCF07192}" destId="{D243BF4D-288B-4437-BD89-5A9C81B8C0BB}" srcOrd="0" destOrd="0" presId="urn:microsoft.com/office/officeart/2018/2/layout/IconVerticalSolidList"/>
+    <dgm:cxn modelId="{9A0594CB-E6E7-4371-8EF2-3749DE4C2FE6}" type="presParOf" srcId="{EE980958-C375-41E7-B1A2-84B7CCF07192}" destId="{3964544A-CC28-449E-844A-A7E8732249E0}" srcOrd="1" destOrd="0" presId="urn:microsoft.com/office/officeart/2018/2/layout/IconVerticalSolidList"/>
+    <dgm:cxn modelId="{84BBCFAE-EAEF-440A-AD85-E4C54DA5188C}" type="presParOf" srcId="{EE980958-C375-41E7-B1A2-84B7CCF07192}" destId="{60AE4C58-F93D-44B3-925A-F9B072A01848}" srcOrd="2" destOrd="0" presId="urn:microsoft.com/office/officeart/2018/2/layout/IconVerticalSolidList"/>
+    <dgm:cxn modelId="{BE78F100-55A1-43D6-AC5E-A5D120FD5C67}" type="presParOf" srcId="{EE980958-C375-41E7-B1A2-84B7CCF07192}" destId="{B6A63DA1-A857-4D1C-815F-37421645B5C9}" srcOrd="3" destOrd="0" presId="urn:microsoft.com/office/officeart/2018/2/layout/IconVerticalSolidList"/>
+  </dgm:cxnLst>
+  <dgm:bg/>
+  <dgm:whole/>
+  <dgm:extLst>
+    <a:ext uri="http://schemas.microsoft.com/office/drawing/2008/diagram">
+      <dsp:dataModelExt xmlns:dsp="http://schemas.microsoft.com/office/drawing/2008/diagram" relId="rId7" minVer="http://schemas.openxmlformats.org/drawingml/2006/diagram"/>
+    </a:ext>
+  </dgm:extLst>
+</dgm:dataModel>
+</file>
+
 <file path=ppt/diagrams/drawing1.xml><?xml version="1.0" encoding="utf-8"?>
 <dsp:drawing xmlns:dgm="http://schemas.openxmlformats.org/drawingml/2006/diagram" xmlns:dsp="http://schemas.microsoft.com/office/drawing/2008/diagram" xmlns:a="http://schemas.openxmlformats.org/drawingml/2006/main">
   <dsp:spTree>
@@ -2250,7 +3447,7 @@
           </a:pPr>
           <a:r>
             <a:rPr lang="en-US" sz="4000" kern="1200" dirty="0" err="1"/>
-            <a:t>Impacto</a:t>
+            <a:t>Motivaciones</a:t>
           </a:r>
           <a:endParaRPr lang="en-US" sz="4000" kern="1200" dirty="0"/>
         </a:p>
@@ -2387,6 +3584,14 @@
             </a:spcAft>
             <a:buNone/>
           </a:pPr>
+          <a:r>
+            <a:rPr lang="en-US" sz="4000" kern="1200" dirty="0" err="1"/>
+            <a:t>Impacto</a:t>
+          </a:r>
+          <a:r>
+            <a:rPr lang="en-US" sz="4000" kern="1200" dirty="0"/>
+            <a:t> y </a:t>
+          </a:r>
           <a:r>
             <a:rPr lang="en-US" sz="4000" kern="1200" dirty="0" err="1"/>
             <a:t>Consecuencias</a:t>
@@ -2959,6 +4164,620 @@
       <dsp:txXfrm>
         <a:off x="0" y="3218393"/>
         <a:ext cx="9720072" cy="804475"/>
+      </dsp:txXfrm>
+    </dsp:sp>
+  </dsp:spTree>
+</dsp:drawing>
+</file>
+
+<file path=ppt/diagrams/drawing3.xml><?xml version="1.0" encoding="utf-8"?>
+<dsp:drawing xmlns:dgm="http://schemas.openxmlformats.org/drawingml/2006/diagram" xmlns:dsp="http://schemas.microsoft.com/office/drawing/2008/diagram" xmlns:a="http://schemas.openxmlformats.org/drawingml/2006/main">
+  <dsp:spTree>
+    <dsp:nvGrpSpPr>
+      <dsp:cNvPr id="0" name=""/>
+      <dsp:cNvGrpSpPr/>
+    </dsp:nvGrpSpPr>
+    <dsp:grpSpPr/>
+    <dsp:sp modelId="{FA432C18-2628-471D-99D3-219277B81B43}">
+      <dsp:nvSpPr>
+        <dsp:cNvPr id="0" name=""/>
+        <dsp:cNvSpPr/>
+      </dsp:nvSpPr>
+      <dsp:spPr>
+        <a:xfrm>
+          <a:off x="0" y="1669"/>
+          <a:ext cx="9720072" cy="846320"/>
+        </a:xfrm>
+        <a:prstGeom prst="roundRect">
+          <a:avLst>
+            <a:gd name="adj" fmla="val 10000"/>
+          </a:avLst>
+        </a:prstGeom>
+        <a:solidFill>
+          <a:schemeClr val="accent1">
+            <a:tint val="40000"/>
+            <a:hueOff val="0"/>
+            <a:satOff val="0"/>
+            <a:lumOff val="0"/>
+            <a:alphaOff val="0"/>
+          </a:schemeClr>
+        </a:solidFill>
+        <a:ln>
+          <a:noFill/>
+        </a:ln>
+        <a:effectLst/>
+      </dsp:spPr>
+      <dsp:style>
+        <a:lnRef idx="0">
+          <a:scrgbClr r="0" g="0" b="0"/>
+        </a:lnRef>
+        <a:fillRef idx="1">
+          <a:scrgbClr r="0" g="0" b="0"/>
+        </a:fillRef>
+        <a:effectRef idx="0">
+          <a:scrgbClr r="0" g="0" b="0"/>
+        </a:effectRef>
+        <a:fontRef idx="minor"/>
+      </dsp:style>
+    </dsp:sp>
+    <dsp:sp modelId="{022014BD-FCE2-4868-BFF4-50C907C0DBB8}">
+      <dsp:nvSpPr>
+        <dsp:cNvPr id="0" name=""/>
+        <dsp:cNvSpPr/>
+      </dsp:nvSpPr>
+      <dsp:spPr>
+        <a:xfrm>
+          <a:off x="256011" y="192091"/>
+          <a:ext cx="465476" cy="465476"/>
+        </a:xfrm>
+        <a:prstGeom prst="rect">
+          <a:avLst/>
+        </a:prstGeom>
+        <a:blipFill>
+          <a:blip xmlns:r="http://schemas.openxmlformats.org/officeDocument/2006/relationships" r:embed="rId1">
+            <a:extLst>
+              <a:ext uri="{96DAC541-7B7A-43D3-8B79-37D633B846F1}">
+                <asvg:svgBlip xmlns:asvg="http://schemas.microsoft.com/office/drawing/2016/SVG/main" r:embed="rId2"/>
+              </a:ext>
+            </a:extLst>
+          </a:blip>
+          <a:srcRect/>
+          <a:stretch>
+            <a:fillRect/>
+          </a:stretch>
+        </a:blipFill>
+        <a:ln w="15875" cap="flat" cmpd="sng" algn="ctr">
+          <a:noFill/>
+          <a:prstDash val="solid"/>
+        </a:ln>
+        <a:effectLst/>
+      </dsp:spPr>
+      <dsp:style>
+        <a:lnRef idx="2">
+          <a:scrgbClr r="0" g="0" b="0"/>
+        </a:lnRef>
+        <a:fillRef idx="1">
+          <a:scrgbClr r="0" g="0" b="0"/>
+        </a:fillRef>
+        <a:effectRef idx="0">
+          <a:scrgbClr r="0" g="0" b="0"/>
+        </a:effectRef>
+        <a:fontRef idx="minor">
+          <a:schemeClr val="lt1"/>
+        </a:fontRef>
+      </dsp:style>
+    </dsp:sp>
+    <dsp:sp modelId="{95155B34-91BB-45C8-81AA-364DB5B80814}">
+      <dsp:nvSpPr>
+        <dsp:cNvPr id="0" name=""/>
+        <dsp:cNvSpPr/>
+      </dsp:nvSpPr>
+      <dsp:spPr>
+        <a:xfrm>
+          <a:off x="977499" y="1669"/>
+          <a:ext cx="8742573" cy="846320"/>
+        </a:xfrm>
+        <a:prstGeom prst="rect">
+          <a:avLst/>
+        </a:prstGeom>
+        <a:noFill/>
+        <a:ln>
+          <a:noFill/>
+        </a:ln>
+        <a:effectLst/>
+      </dsp:spPr>
+      <dsp:style>
+        <a:lnRef idx="0">
+          <a:scrgbClr r="0" g="0" b="0"/>
+        </a:lnRef>
+        <a:fillRef idx="0">
+          <a:scrgbClr r="0" g="0" b="0"/>
+        </a:fillRef>
+        <a:effectRef idx="0">
+          <a:scrgbClr r="0" g="0" b="0"/>
+        </a:effectRef>
+        <a:fontRef idx="minor"/>
+      </dsp:style>
+      <dsp:txBody>
+        <a:bodyPr spcFirstLastPara="0" vert="horz" wrap="square" lIns="89569" tIns="89569" rIns="89569" bIns="89569" numCol="1" spcCol="1270" anchor="ctr" anchorCtr="0">
+          <a:noAutofit/>
+        </a:bodyPr>
+        <a:lstStyle/>
+        <a:p>
+          <a:pPr marL="0" lvl="0" indent="0" algn="l" defTabSz="977900">
+            <a:lnSpc>
+              <a:spcPct val="100000"/>
+            </a:lnSpc>
+            <a:spcBef>
+              <a:spcPct val="0"/>
+            </a:spcBef>
+            <a:spcAft>
+              <a:spcPct val="35000"/>
+            </a:spcAft>
+            <a:buNone/>
+          </a:pPr>
+          <a:r>
+            <a:rPr lang="es-ES" sz="2200" kern="1200" dirty="0"/>
+            <a:t>Baja temperatura + Alta presión fiscal</a:t>
+          </a:r>
+          <a:endParaRPr lang="en-US" sz="2200" kern="1200" dirty="0"/>
+        </a:p>
+      </dsp:txBody>
+      <dsp:txXfrm>
+        <a:off x="977499" y="1669"/>
+        <a:ext cx="8742573" cy="846320"/>
+      </dsp:txXfrm>
+    </dsp:sp>
+    <dsp:sp modelId="{FA22F20B-A377-4036-8878-A133F45CBE28}">
+      <dsp:nvSpPr>
+        <dsp:cNvPr id="0" name=""/>
+        <dsp:cNvSpPr/>
+      </dsp:nvSpPr>
+      <dsp:spPr>
+        <a:xfrm>
+          <a:off x="0" y="1059569"/>
+          <a:ext cx="9720072" cy="846320"/>
+        </a:xfrm>
+        <a:prstGeom prst="roundRect">
+          <a:avLst>
+            <a:gd name="adj" fmla="val 10000"/>
+          </a:avLst>
+        </a:prstGeom>
+        <a:solidFill>
+          <a:schemeClr val="accent1">
+            <a:tint val="40000"/>
+            <a:hueOff val="0"/>
+            <a:satOff val="0"/>
+            <a:lumOff val="0"/>
+            <a:alphaOff val="0"/>
+          </a:schemeClr>
+        </a:solidFill>
+        <a:ln>
+          <a:noFill/>
+        </a:ln>
+        <a:effectLst/>
+      </dsp:spPr>
+      <dsp:style>
+        <a:lnRef idx="0">
+          <a:scrgbClr r="0" g="0" b="0"/>
+        </a:lnRef>
+        <a:fillRef idx="1">
+          <a:scrgbClr r="0" g="0" b="0"/>
+        </a:fillRef>
+        <a:effectRef idx="0">
+          <a:scrgbClr r="0" g="0" b="0"/>
+        </a:effectRef>
+        <a:fontRef idx="minor"/>
+      </dsp:style>
+    </dsp:sp>
+    <dsp:sp modelId="{5ADEDBD4-29C4-4EE7-976A-10BFACF1F231}">
+      <dsp:nvSpPr>
+        <dsp:cNvPr id="0" name=""/>
+        <dsp:cNvSpPr/>
+      </dsp:nvSpPr>
+      <dsp:spPr>
+        <a:xfrm>
+          <a:off x="256011" y="1249991"/>
+          <a:ext cx="465476" cy="465476"/>
+        </a:xfrm>
+        <a:prstGeom prst="rect">
+          <a:avLst/>
+        </a:prstGeom>
+        <a:blipFill>
+          <a:blip xmlns:r="http://schemas.openxmlformats.org/officeDocument/2006/relationships" r:embed="rId3">
+            <a:extLst>
+              <a:ext uri="{96DAC541-7B7A-43D3-8B79-37D633B846F1}">
+                <asvg:svgBlip xmlns:asvg="http://schemas.microsoft.com/office/drawing/2016/SVG/main" r:embed="rId4"/>
+              </a:ext>
+            </a:extLst>
+          </a:blip>
+          <a:srcRect/>
+          <a:stretch>
+            <a:fillRect/>
+          </a:stretch>
+        </a:blipFill>
+        <a:ln w="15875" cap="flat" cmpd="sng" algn="ctr">
+          <a:noFill/>
+          <a:prstDash val="solid"/>
+        </a:ln>
+        <a:effectLst/>
+      </dsp:spPr>
+      <dsp:style>
+        <a:lnRef idx="2">
+          <a:scrgbClr r="0" g="0" b="0"/>
+        </a:lnRef>
+        <a:fillRef idx="1">
+          <a:scrgbClr r="0" g="0" b="0"/>
+        </a:fillRef>
+        <a:effectRef idx="0">
+          <a:scrgbClr r="0" g="0" b="0"/>
+        </a:effectRef>
+        <a:fontRef idx="minor">
+          <a:schemeClr val="lt1"/>
+        </a:fontRef>
+      </dsp:style>
+    </dsp:sp>
+    <dsp:sp modelId="{8D86E122-A65E-4EF0-943F-2D6AF505CDCD}">
+      <dsp:nvSpPr>
+        <dsp:cNvPr id="0" name=""/>
+        <dsp:cNvSpPr/>
+      </dsp:nvSpPr>
+      <dsp:spPr>
+        <a:xfrm>
+          <a:off x="977499" y="1059569"/>
+          <a:ext cx="8742573" cy="846320"/>
+        </a:xfrm>
+        <a:prstGeom prst="rect">
+          <a:avLst/>
+        </a:prstGeom>
+        <a:noFill/>
+        <a:ln>
+          <a:noFill/>
+        </a:ln>
+        <a:effectLst/>
+      </dsp:spPr>
+      <dsp:style>
+        <a:lnRef idx="0">
+          <a:scrgbClr r="0" g="0" b="0"/>
+        </a:lnRef>
+        <a:fillRef idx="0">
+          <a:scrgbClr r="0" g="0" b="0"/>
+        </a:fillRef>
+        <a:effectRef idx="0">
+          <a:scrgbClr r="0" g="0" b="0"/>
+        </a:effectRef>
+        <a:fontRef idx="minor"/>
+      </dsp:style>
+      <dsp:txBody>
+        <a:bodyPr spcFirstLastPara="0" vert="horz" wrap="square" lIns="89569" tIns="89569" rIns="89569" bIns="89569" numCol="1" spcCol="1270" anchor="ctr" anchorCtr="0">
+          <a:noAutofit/>
+        </a:bodyPr>
+        <a:lstStyle/>
+        <a:p>
+          <a:pPr marL="0" lvl="0" indent="0" algn="l" defTabSz="977900">
+            <a:lnSpc>
+              <a:spcPct val="100000"/>
+            </a:lnSpc>
+            <a:spcBef>
+              <a:spcPct val="0"/>
+            </a:spcBef>
+            <a:spcAft>
+              <a:spcPct val="35000"/>
+            </a:spcAft>
+            <a:buNone/>
+          </a:pPr>
+          <a:r>
+            <a:rPr lang="es-ES" sz="2200" kern="1200" dirty="0"/>
+            <a:t>Alta temperatura + Alta presión fiscal</a:t>
+          </a:r>
+          <a:endParaRPr lang="en-US" sz="2200" kern="1200" dirty="0"/>
+        </a:p>
+      </dsp:txBody>
+      <dsp:txXfrm>
+        <a:off x="977499" y="1059569"/>
+        <a:ext cx="8742573" cy="846320"/>
+      </dsp:txXfrm>
+    </dsp:sp>
+    <dsp:sp modelId="{29BC95D8-5064-49A8-B44A-4C3DEE02478D}">
+      <dsp:nvSpPr>
+        <dsp:cNvPr id="0" name=""/>
+        <dsp:cNvSpPr/>
+      </dsp:nvSpPr>
+      <dsp:spPr>
+        <a:xfrm>
+          <a:off x="0" y="2117470"/>
+          <a:ext cx="9720072" cy="846320"/>
+        </a:xfrm>
+        <a:prstGeom prst="roundRect">
+          <a:avLst>
+            <a:gd name="adj" fmla="val 10000"/>
+          </a:avLst>
+        </a:prstGeom>
+        <a:solidFill>
+          <a:schemeClr val="accent1">
+            <a:tint val="40000"/>
+            <a:hueOff val="0"/>
+            <a:satOff val="0"/>
+            <a:lumOff val="0"/>
+            <a:alphaOff val="0"/>
+          </a:schemeClr>
+        </a:solidFill>
+        <a:ln>
+          <a:noFill/>
+        </a:ln>
+        <a:effectLst/>
+      </dsp:spPr>
+      <dsp:style>
+        <a:lnRef idx="0">
+          <a:scrgbClr r="0" g="0" b="0"/>
+        </a:lnRef>
+        <a:fillRef idx="1">
+          <a:scrgbClr r="0" g="0" b="0"/>
+        </a:fillRef>
+        <a:effectRef idx="0">
+          <a:scrgbClr r="0" g="0" b="0"/>
+        </a:effectRef>
+        <a:fontRef idx="minor"/>
+      </dsp:style>
+    </dsp:sp>
+    <dsp:sp modelId="{F7156BEF-9A9A-458E-8FC2-3F845097DF20}">
+      <dsp:nvSpPr>
+        <dsp:cNvPr id="0" name=""/>
+        <dsp:cNvSpPr/>
+      </dsp:nvSpPr>
+      <dsp:spPr>
+        <a:xfrm>
+          <a:off x="256011" y="2307892"/>
+          <a:ext cx="465476" cy="465476"/>
+        </a:xfrm>
+        <a:prstGeom prst="rect">
+          <a:avLst/>
+        </a:prstGeom>
+        <a:blipFill>
+          <a:blip xmlns:r="http://schemas.openxmlformats.org/officeDocument/2006/relationships" r:embed="rId3">
+            <a:extLst>
+              <a:ext uri="{96DAC541-7B7A-43D3-8B79-37D633B846F1}">
+                <asvg:svgBlip xmlns:asvg="http://schemas.microsoft.com/office/drawing/2016/SVG/main" r:embed="rId4"/>
+              </a:ext>
+            </a:extLst>
+          </a:blip>
+          <a:srcRect/>
+          <a:stretch>
+            <a:fillRect/>
+          </a:stretch>
+        </a:blipFill>
+        <a:ln w="15875" cap="flat" cmpd="sng" algn="ctr">
+          <a:noFill/>
+          <a:prstDash val="solid"/>
+        </a:ln>
+        <a:effectLst/>
+      </dsp:spPr>
+      <dsp:style>
+        <a:lnRef idx="2">
+          <a:scrgbClr r="0" g="0" b="0"/>
+        </a:lnRef>
+        <a:fillRef idx="1">
+          <a:scrgbClr r="0" g="0" b="0"/>
+        </a:fillRef>
+        <a:effectRef idx="0">
+          <a:scrgbClr r="0" g="0" b="0"/>
+        </a:effectRef>
+        <a:fontRef idx="minor">
+          <a:schemeClr val="lt1"/>
+        </a:fontRef>
+      </dsp:style>
+    </dsp:sp>
+    <dsp:sp modelId="{E2242A6E-842E-4B80-BF03-34273757DA56}">
+      <dsp:nvSpPr>
+        <dsp:cNvPr id="0" name=""/>
+        <dsp:cNvSpPr/>
+      </dsp:nvSpPr>
+      <dsp:spPr>
+        <a:xfrm>
+          <a:off x="977499" y="2117470"/>
+          <a:ext cx="8742573" cy="846320"/>
+        </a:xfrm>
+        <a:prstGeom prst="rect">
+          <a:avLst/>
+        </a:prstGeom>
+        <a:noFill/>
+        <a:ln>
+          <a:noFill/>
+        </a:ln>
+        <a:effectLst/>
+      </dsp:spPr>
+      <dsp:style>
+        <a:lnRef idx="0">
+          <a:scrgbClr r="0" g="0" b="0"/>
+        </a:lnRef>
+        <a:fillRef idx="0">
+          <a:scrgbClr r="0" g="0" b="0"/>
+        </a:fillRef>
+        <a:effectRef idx="0">
+          <a:scrgbClr r="0" g="0" b="0"/>
+        </a:effectRef>
+        <a:fontRef idx="minor"/>
+      </dsp:style>
+      <dsp:txBody>
+        <a:bodyPr spcFirstLastPara="0" vert="horz" wrap="square" lIns="89569" tIns="89569" rIns="89569" bIns="89569" numCol="1" spcCol="1270" anchor="ctr" anchorCtr="0">
+          <a:noAutofit/>
+        </a:bodyPr>
+        <a:lstStyle/>
+        <a:p>
+          <a:pPr marL="0" lvl="0" indent="0" algn="l" defTabSz="977900">
+            <a:lnSpc>
+              <a:spcPct val="100000"/>
+            </a:lnSpc>
+            <a:spcBef>
+              <a:spcPct val="0"/>
+            </a:spcBef>
+            <a:spcAft>
+              <a:spcPct val="35000"/>
+            </a:spcAft>
+            <a:buNone/>
+          </a:pPr>
+          <a:r>
+            <a:rPr lang="es-ES" sz="2200" kern="1200" dirty="0"/>
+            <a:t>Baja temperatura + Baja presión fiscal</a:t>
+          </a:r>
+          <a:endParaRPr lang="en-US" sz="2200" kern="1200" dirty="0"/>
+        </a:p>
+      </dsp:txBody>
+      <dsp:txXfrm>
+        <a:off x="977499" y="2117470"/>
+        <a:ext cx="8742573" cy="846320"/>
+      </dsp:txXfrm>
+    </dsp:sp>
+    <dsp:sp modelId="{D243BF4D-288B-4437-BD89-5A9C81B8C0BB}">
+      <dsp:nvSpPr>
+        <dsp:cNvPr id="0" name=""/>
+        <dsp:cNvSpPr/>
+      </dsp:nvSpPr>
+      <dsp:spPr>
+        <a:xfrm>
+          <a:off x="0" y="3175370"/>
+          <a:ext cx="9720072" cy="846320"/>
+        </a:xfrm>
+        <a:prstGeom prst="roundRect">
+          <a:avLst>
+            <a:gd name="adj" fmla="val 10000"/>
+          </a:avLst>
+        </a:prstGeom>
+        <a:solidFill>
+          <a:schemeClr val="accent1">
+            <a:tint val="40000"/>
+            <a:hueOff val="0"/>
+            <a:satOff val="0"/>
+            <a:lumOff val="0"/>
+            <a:alphaOff val="0"/>
+          </a:schemeClr>
+        </a:solidFill>
+        <a:ln>
+          <a:noFill/>
+        </a:ln>
+        <a:effectLst/>
+      </dsp:spPr>
+      <dsp:style>
+        <a:lnRef idx="0">
+          <a:scrgbClr r="0" g="0" b="0"/>
+        </a:lnRef>
+        <a:fillRef idx="1">
+          <a:scrgbClr r="0" g="0" b="0"/>
+        </a:fillRef>
+        <a:effectRef idx="0">
+          <a:scrgbClr r="0" g="0" b="0"/>
+        </a:effectRef>
+        <a:fontRef idx="minor"/>
+      </dsp:style>
+    </dsp:sp>
+    <dsp:sp modelId="{3964544A-CC28-449E-844A-A7E8732249E0}">
+      <dsp:nvSpPr>
+        <dsp:cNvPr id="0" name=""/>
+        <dsp:cNvSpPr/>
+      </dsp:nvSpPr>
+      <dsp:spPr>
+        <a:xfrm>
+          <a:off x="256011" y="3365792"/>
+          <a:ext cx="465476" cy="465476"/>
+        </a:xfrm>
+        <a:prstGeom prst="rect">
+          <a:avLst/>
+        </a:prstGeom>
+        <a:blipFill>
+          <a:blip xmlns:r="http://schemas.openxmlformats.org/officeDocument/2006/relationships" r:embed="rId5">
+            <a:extLst>
+              <a:ext uri="{28A0092B-C50C-407E-A947-70E740481C1C}">
+                <a14:useLocalDpi xmlns:a14="http://schemas.microsoft.com/office/drawing/2010/main" val="0"/>
+              </a:ext>
+              <a:ext uri="{96DAC541-7B7A-43D3-8B79-37D633B846F1}">
+                <asvg:svgBlip xmlns:asvg="http://schemas.microsoft.com/office/drawing/2016/SVG/main" r:embed="rId6"/>
+              </a:ext>
+            </a:extLst>
+          </a:blip>
+          <a:stretch>
+            <a:fillRect/>
+          </a:stretch>
+        </a:blipFill>
+        <a:ln w="15875" cap="flat" cmpd="sng" algn="ctr">
+          <a:noFill/>
+          <a:prstDash val="solid"/>
+        </a:ln>
+        <a:effectLst/>
+      </dsp:spPr>
+      <dsp:style>
+        <a:lnRef idx="2">
+          <a:scrgbClr r="0" g="0" b="0"/>
+        </a:lnRef>
+        <a:fillRef idx="1">
+          <a:scrgbClr r="0" g="0" b="0"/>
+        </a:fillRef>
+        <a:effectRef idx="0">
+          <a:scrgbClr r="0" g="0" b="0"/>
+        </a:effectRef>
+        <a:fontRef idx="minor">
+          <a:schemeClr val="lt1"/>
+        </a:fontRef>
+      </dsp:style>
+    </dsp:sp>
+    <dsp:sp modelId="{B6A63DA1-A857-4D1C-815F-37421645B5C9}">
+      <dsp:nvSpPr>
+        <dsp:cNvPr id="0" name=""/>
+        <dsp:cNvSpPr/>
+      </dsp:nvSpPr>
+      <dsp:spPr>
+        <a:xfrm>
+          <a:off x="977499" y="3175370"/>
+          <a:ext cx="8742573" cy="846320"/>
+        </a:xfrm>
+        <a:prstGeom prst="rect">
+          <a:avLst/>
+        </a:prstGeom>
+        <a:noFill/>
+        <a:ln>
+          <a:noFill/>
+        </a:ln>
+        <a:effectLst/>
+      </dsp:spPr>
+      <dsp:style>
+        <a:lnRef idx="0">
+          <a:scrgbClr r="0" g="0" b="0"/>
+        </a:lnRef>
+        <a:fillRef idx="0">
+          <a:scrgbClr r="0" g="0" b="0"/>
+        </a:fillRef>
+        <a:effectRef idx="0">
+          <a:scrgbClr r="0" g="0" b="0"/>
+        </a:effectRef>
+        <a:fontRef idx="minor"/>
+      </dsp:style>
+      <dsp:txBody>
+        <a:bodyPr spcFirstLastPara="0" vert="horz" wrap="square" lIns="89569" tIns="89569" rIns="89569" bIns="89569" numCol="1" spcCol="1270" anchor="ctr" anchorCtr="0">
+          <a:noAutofit/>
+        </a:bodyPr>
+        <a:lstStyle/>
+        <a:p>
+          <a:pPr marL="0" lvl="0" indent="0" algn="l" defTabSz="977900">
+            <a:lnSpc>
+              <a:spcPct val="100000"/>
+            </a:lnSpc>
+            <a:spcBef>
+              <a:spcPct val="0"/>
+            </a:spcBef>
+            <a:spcAft>
+              <a:spcPct val="35000"/>
+            </a:spcAft>
+            <a:buNone/>
+          </a:pPr>
+          <a:r>
+            <a:rPr lang="es-ES" sz="2200" kern="1200" dirty="0"/>
+            <a:t>Alta temperatura + Baja presión fiscal</a:t>
+          </a:r>
+          <a:endParaRPr lang="en-US" sz="2200" kern="1200" dirty="0"/>
+        </a:p>
+      </dsp:txBody>
+      <dsp:txXfrm>
+        <a:off x="977499" y="3175370"/>
+        <a:ext cx="8742573" cy="846320"/>
       </dsp:txXfrm>
     </dsp:sp>
   </dsp:spTree>
@@ -3897,6 +5716,300 @@
 </dgm:layoutDef>
 </file>
 
+<file path=ppt/diagrams/layout3.xml><?xml version="1.0" encoding="utf-8"?>
+<dgm:layoutDef xmlns:dgm="http://schemas.openxmlformats.org/drawingml/2006/diagram" xmlns:a="http://schemas.openxmlformats.org/drawingml/2006/main" uniqueId="urn:microsoft.com/office/officeart/2018/2/layout/IconVerticalSolidList">
+  <dgm:title val="Icon Vertical Solid List"/>
+  <dgm:desc val="Use to show a series of visuals from top to bottom with Level 1 or Level 1 and Level 2 text grouped in a shape. Works best with icons or small pictures with lengthier descriptions."/>
+  <dgm:catLst>
+    <dgm:cat type="icon" pri="500"/>
+  </dgm:catLst>
+  <dgm:sampData useDef="1">
+    <dgm:dataModel>
+      <dgm:ptLst/>
+      <dgm:bg/>
+      <dgm:whole/>
+    </dgm:dataModel>
+  </dgm:sampData>
+  <dgm:styleData useDef="1">
+    <dgm:dataModel>
+      <dgm:ptLst/>
+      <dgm:bg/>
+      <dgm:whole/>
+    </dgm:dataModel>
+  </dgm:styleData>
+  <dgm:clrData useDef="1">
+    <dgm:dataModel>
+      <dgm:ptLst/>
+      <dgm:bg/>
+      <dgm:whole/>
+    </dgm:dataModel>
+  </dgm:clrData>
+  <dgm:layoutNode name="root">
+    <dgm:varLst>
+      <dgm:dir/>
+      <dgm:resizeHandles val="exact"/>
+    </dgm:varLst>
+    <dgm:choose name="Name0">
+      <dgm:if name="Name1" axis="self" func="var" arg="dir" op="equ" val="norm">
+        <dgm:alg type="lin">
+          <dgm:param type="linDir" val="fromT"/>
+          <dgm:param type="nodeHorzAlign" val="l"/>
+        </dgm:alg>
+      </dgm:if>
+      <dgm:else name="Name2">
+        <dgm:alg type="lin">
+          <dgm:param type="linDir" val="fromT"/>
+          <dgm:param type="nodeHorzAlign" val="r"/>
+        </dgm:alg>
+      </dgm:else>
+    </dgm:choose>
+    <dgm:shape xmlns:r="http://schemas.openxmlformats.org/officeDocument/2006/relationships" r:blip="">
+      <dgm:adjLst/>
+    </dgm:shape>
+    <dgm:presOf/>
+    <dgm:choose name="Name3">
+      <dgm:if name="Name4" axis="ch" ptType="node" func="cnt" op="lte" val="3">
+        <dgm:constrLst>
+          <dgm:constr type="h" for="ch" forName="compNode" refType="h" fact="0.3"/>
+          <dgm:constr type="w" for="ch" forName="compNode" refType="w"/>
+          <dgm:constr type="h" for="ch" forName="sibTrans" refType="h" refFor="ch" refForName="compNode" fact="0.25"/>
+          <dgm:constr type="primFontSz" for="des" forName="parTx" val="25"/>
+          <dgm:constr type="primFontSz" for="des" forName="desTx" refType="primFontSz" refFor="des" refForName="parTx" op="lte" fact="0.75"/>
+          <dgm:constr type="h" for="des" forName="compNode" op="equ"/>
+          <dgm:constr type="h" for="des" forName="bgRect" op="equ"/>
+          <dgm:constr type="h" for="des" forName="iconRect" op="equ"/>
+          <dgm:constr type="w" for="des" forName="iconRect" op="equ"/>
+          <dgm:constr type="h" for="des" forName="spaceRect" op="equ"/>
+          <dgm:constr type="h" for="des" forName="parTx" op="equ"/>
+          <dgm:constr type="h" for="des" forName="desTx" op="equ"/>
+        </dgm:constrLst>
+      </dgm:if>
+      <dgm:if name="Name5" axis="ch" ptType="node" func="cnt" op="lte" val="4">
+        <dgm:constrLst>
+          <dgm:constr type="h" for="ch" forName="compNode" refType="h" fact="0.3"/>
+          <dgm:constr type="w" for="ch" forName="compNode" refType="w"/>
+          <dgm:constr type="h" for="ch" forName="sibTrans" refType="h" refFor="ch" refForName="compNode" fact="0.25"/>
+          <dgm:constr type="primFontSz" for="des" forName="parTx" val="22"/>
+          <dgm:constr type="primFontSz" for="des" forName="desTx" refType="primFontSz" refFor="des" refForName="parTx" op="lte" fact="0.75"/>
+          <dgm:constr type="h" for="des" forName="compNode" op="equ"/>
+          <dgm:constr type="h" for="des" forName="bgRect" op="equ"/>
+          <dgm:constr type="h" for="des" forName="iconRect" op="equ"/>
+          <dgm:constr type="w" for="des" forName="iconRect" op="equ"/>
+          <dgm:constr type="h" for="des" forName="spaceRect" op="equ"/>
+          <dgm:constr type="h" for="des" forName="parTx" op="equ"/>
+          <dgm:constr type="h" for="des" forName="desTx" op="equ"/>
+        </dgm:constrLst>
+      </dgm:if>
+      <dgm:if name="Name6" axis="ch" ptType="node" func="cnt" op="lte" val="6">
+        <dgm:constrLst>
+          <dgm:constr type="h" for="ch" forName="compNode" refType="h" fact="0.3"/>
+          <dgm:constr type="w" for="ch" forName="compNode" refType="w"/>
+          <dgm:constr type="h" for="ch" forName="sibTrans" refType="h" refFor="ch" refForName="compNode" fact="0.25"/>
+          <dgm:constr type="primFontSz" for="des" forName="parTx" val="19"/>
+          <dgm:constr type="primFontSz" for="des" forName="desTx" refType="primFontSz" refFor="des" refForName="parTx" op="lte" fact="0.75"/>
+          <dgm:constr type="h" for="des" forName="compNode" op="equ"/>
+          <dgm:constr type="h" for="des" forName="bgRect" op="equ"/>
+          <dgm:constr type="h" for="des" forName="iconRect" op="equ"/>
+          <dgm:constr type="w" for="des" forName="iconRect" op="equ"/>
+          <dgm:constr type="h" for="des" forName="spaceRect" op="equ"/>
+          <dgm:constr type="h" for="des" forName="parTx" op="equ"/>
+          <dgm:constr type="h" for="des" forName="desTx" op="equ"/>
+        </dgm:constrLst>
+      </dgm:if>
+      <dgm:else name="Name7">
+        <dgm:constrLst>
+          <dgm:constr type="h" for="ch" forName="compNode" refType="h" fact="0.3"/>
+          <dgm:constr type="w" for="ch" forName="compNode" refType="w"/>
+          <dgm:constr type="h" for="ch" forName="sibTrans" refType="h" refFor="ch" refForName="compNode" fact="0.25"/>
+          <dgm:constr type="primFontSz" for="des" forName="parTx" val="16"/>
+          <dgm:constr type="primFontSz" for="des" forName="desTx" refType="primFontSz" refFor="des" refForName="parTx" op="lte" fact="0.75"/>
+          <dgm:constr type="h" for="des" forName="compNode" op="equ"/>
+          <dgm:constr type="h" for="des" forName="bgRect" op="equ"/>
+          <dgm:constr type="h" for="des" forName="iconRect" op="equ"/>
+          <dgm:constr type="w" for="des" forName="iconRect" op="equ"/>
+          <dgm:constr type="h" for="des" forName="spaceRect" op="equ"/>
+          <dgm:constr type="h" for="des" forName="parTx" op="equ"/>
+          <dgm:constr type="h" for="des" forName="desTx" op="equ"/>
+        </dgm:constrLst>
+      </dgm:else>
+    </dgm:choose>
+    <dgm:ruleLst>
+      <dgm:rule type="h" for="ch" forName="compNode" val="0" fact="NaN" max="NaN"/>
+    </dgm:ruleLst>
+    <dgm:forEach name="Name8" axis="ch" ptType="node">
+      <dgm:layoutNode name="compNode">
+        <dgm:alg type="composite"/>
+        <dgm:shape xmlns:r="http://schemas.openxmlformats.org/officeDocument/2006/relationships" r:blip="">
+          <dgm:adjLst/>
+        </dgm:shape>
+        <dgm:presOf axis="self"/>
+        <dgm:choose name="Name9">
+          <dgm:if name="Name10" axis="ch" ptType="node" func="cnt" op="gte" val="1">
+            <dgm:constrLst>
+              <dgm:constr type="w" for="ch" forName="bgRect" refType="w"/>
+              <dgm:constr type="h" for="ch" forName="bgRect" refType="h"/>
+              <dgm:constr type="l" for="ch" forName="bgRect"/>
+              <dgm:constr type="t" for="ch" forName="bgRect"/>
+              <dgm:constr type="h" for="ch" forName="iconRect" refType="h" fact="0.55"/>
+              <dgm:constr type="w" for="ch" forName="iconRect" refType="h" refFor="ch" refForName="iconRect"/>
+              <dgm:constr type="l" for="ch" forName="iconRect" refType="h" refFor="ch" refForName="iconRect" fact="0.55"/>
+              <dgm:constr type="ctrY" for="ch" forName="iconRect" refType="ctrY" refFor="ch" refForName="bgRect"/>
+              <dgm:constr type="w" for="ch" forName="spaceRect" refType="l" refFor="ch" refForName="iconRect"/>
+              <dgm:constr type="h" for="ch" forName="spaceRect" refType="h"/>
+              <dgm:constr type="l" for="ch" forName="spaceRect" refType="r" refFor="ch" refForName="iconRect"/>
+              <dgm:constr type="t" for="ch" forName="spaceRect"/>
+              <dgm:constr type="w" for="ch" forName="parTx" refType="w" fact="0.45"/>
+              <dgm:constr type="h" for="ch" forName="parTx" refType="h"/>
+              <dgm:constr type="l" for="ch" forName="parTx" refType="r" refFor="ch" refForName="spaceRect"/>
+              <dgm:constr type="t" for="ch" forName="parTx"/>
+              <dgm:constr type="h" for="ch" forName="desTx" refType="h"/>
+              <dgm:constr type="l" for="ch" forName="desTx" refType="r" refFor="ch" refForName="parTx"/>
+              <dgm:constr type="t" for="ch" forName="desTx"/>
+            </dgm:constrLst>
+          </dgm:if>
+          <dgm:else name="Name11">
+            <dgm:constrLst>
+              <dgm:constr type="w" for="ch" forName="bgRect" refType="w"/>
+              <dgm:constr type="h" for="ch" forName="bgRect" refType="h"/>
+              <dgm:constr type="l" for="ch" forName="bgRect"/>
+              <dgm:constr type="t" for="ch" forName="bgRect"/>
+              <dgm:constr type="h" for="ch" forName="iconRect" refType="h" fact="0.55"/>
+              <dgm:constr type="w" for="ch" forName="iconRect" refType="h" refFor="ch" refForName="iconRect"/>
+              <dgm:constr type="l" for="ch" forName="iconRect" refType="h" refFor="ch" refForName="iconRect" fact="0.55"/>
+              <dgm:constr type="ctrY" for="ch" forName="iconRect" refType="ctrY" refFor="ch" refForName="bgRect"/>
+              <dgm:constr type="w" for="ch" forName="spaceRect" refType="l" refFor="ch" refForName="iconRect"/>
+              <dgm:constr type="h" for="ch" forName="spaceRect" refType="h"/>
+              <dgm:constr type="l" for="ch" forName="spaceRect" refType="r" refFor="ch" refForName="iconRect"/>
+              <dgm:constr type="t" for="ch" forName="spaceRect"/>
+              <dgm:constr type="h" for="ch" forName="parTx" refType="h"/>
+              <dgm:constr type="l" for="ch" forName="parTx" refType="r" refFor="ch" refForName="spaceRect"/>
+              <dgm:constr type="t" for="ch" forName="parTx"/>
+            </dgm:constrLst>
+          </dgm:else>
+        </dgm:choose>
+        <dgm:ruleLst>
+          <dgm:rule type="h" val="INF" fact="NaN" max="NaN"/>
+        </dgm:ruleLst>
+        <dgm:layoutNode name="bgRect" styleLbl="bgShp">
+          <dgm:alg type="sp"/>
+          <dgm:shape xmlns:r="http://schemas.openxmlformats.org/officeDocument/2006/relationships" type="roundRect" r:blip="">
+            <dgm:adjLst>
+              <dgm:adj idx="1" val="0.1"/>
+            </dgm:adjLst>
+          </dgm:shape>
+          <dgm:presOf/>
+          <dgm:constrLst/>
+          <dgm:ruleLst/>
+        </dgm:layoutNode>
+        <dgm:layoutNode name="iconRect" styleLbl="node1">
+          <dgm:alg type="sp"/>
+          <dgm:shape xmlns:r="http://schemas.openxmlformats.org/officeDocument/2006/relationships" type="rect" r:blip="" blipPhldr="1">
+            <dgm:adjLst/>
+          </dgm:shape>
+          <dgm:presOf/>
+          <dgm:constrLst/>
+          <dgm:ruleLst/>
+        </dgm:layoutNode>
+        <dgm:layoutNode name="spaceRect">
+          <dgm:alg type="sp"/>
+          <dgm:shape xmlns:r="http://schemas.openxmlformats.org/officeDocument/2006/relationships" r:blip="">
+            <dgm:adjLst/>
+          </dgm:shape>
+          <dgm:presOf/>
+          <dgm:constrLst/>
+          <dgm:ruleLst/>
+        </dgm:layoutNode>
+        <dgm:layoutNode name="parTx" styleLbl="revTx">
+          <dgm:varLst>
+            <dgm:chMax val="0"/>
+            <dgm:chPref val="0"/>
+          </dgm:varLst>
+          <dgm:alg type="tx">
+            <dgm:param type="txAnchorVert" val="mid"/>
+            <dgm:param type="parTxLTRAlign" val="l"/>
+            <dgm:param type="shpTxLTRAlignCh" val="l"/>
+            <dgm:param type="parTxRTLAlign" val="r"/>
+            <dgm:param type="shpTxRTLAlignCh" val="r"/>
+          </dgm:alg>
+          <dgm:shape xmlns:r="http://schemas.openxmlformats.org/officeDocument/2006/relationships" type="rect" r:blip="">
+            <dgm:adjLst/>
+          </dgm:shape>
+          <dgm:presOf axis="self" ptType="node"/>
+          <dgm:constrLst>
+            <dgm:constr type="lMarg" refType="h" fact="0.3"/>
+            <dgm:constr type="rMarg" refType="h" fact="0.3"/>
+            <dgm:constr type="tMarg" refType="h" fact="0.3"/>
+            <dgm:constr type="bMarg" refType="h" fact="0.3"/>
+          </dgm:constrLst>
+          <dgm:ruleLst>
+            <dgm:rule type="primFontSz" val="14" fact="NaN" max="NaN"/>
+            <dgm:rule type="h" val="INF" fact="NaN" max="NaN"/>
+          </dgm:ruleLst>
+        </dgm:layoutNode>
+        <dgm:choose name="Name12">
+          <dgm:if name="Name13" axis="ch" ptType="node" func="cnt" op="gte" val="1">
+            <dgm:layoutNode name="desTx" styleLbl="revTx">
+              <dgm:varLst/>
+              <dgm:alg type="tx">
+                <dgm:param type="txAnchorVertCh" val="mid"/>
+                <dgm:param type="parTxLTRAlign" val="l"/>
+                <dgm:param type="shpTxLTRAlignCh" val="l"/>
+                <dgm:param type="parTxRTLAlign" val="r"/>
+                <dgm:param type="shpTxRTLAlignCh" val="r"/>
+                <dgm:param type="stBulletLvl" val="0"/>
+              </dgm:alg>
+              <dgm:shape xmlns:r="http://schemas.openxmlformats.org/officeDocument/2006/relationships" type="rect" r:blip="">
+                <dgm:adjLst/>
+              </dgm:shape>
+              <dgm:presOf axis="des" ptType="node"/>
+              <dgm:constrLst>
+                <dgm:constr type="primFontSz" val="18"/>
+                <dgm:constr type="secFontSz" refType="primFontSz"/>
+                <dgm:constr type="lMarg" refType="h" fact="0.3"/>
+                <dgm:constr type="rMarg" refType="h" fact="0.3"/>
+                <dgm:constr type="tMarg" refType="h" fact="0.3"/>
+                <dgm:constr type="bMarg" refType="h" fact="0.3"/>
+              </dgm:constrLst>
+              <dgm:ruleLst>
+                <dgm:rule type="primFontSz" val="11" fact="NaN" max="NaN"/>
+              </dgm:ruleLst>
+            </dgm:layoutNode>
+          </dgm:if>
+          <dgm:else name="Name14"/>
+        </dgm:choose>
+      </dgm:layoutNode>
+      <dgm:forEach name="Name15" axis="followSib" ptType="sibTrans" cnt="1">
+        <dgm:layoutNode name="sibTrans">
+          <dgm:alg type="sp"/>
+          <dgm:shape xmlns:r="http://schemas.openxmlformats.org/officeDocument/2006/relationships" r:blip="">
+            <dgm:adjLst/>
+          </dgm:shape>
+          <dgm:presOf axis="self"/>
+          <dgm:constrLst/>
+          <dgm:ruleLst/>
+        </dgm:layoutNode>
+      </dgm:forEach>
+    </dgm:forEach>
+  </dgm:layoutNode>
+  <dgm:extLst>
+    <a:ext uri="{68A01E43-0DF5-4B5B-8FA6-DAF915123BFB}">
+      <dgm1612:lstStyle xmlns:dgm1612="http://schemas.microsoft.com/office/drawing/2016/12/diagram">
+        <a:lvl1pPr>
+          <a:lnSpc>
+            <a:spcPct val="100000"/>
+          </a:lnSpc>
+        </a:lvl1pPr>
+        <a:lvl2pPr>
+          <a:lnSpc>
+            <a:spcPct val="100000"/>
+          </a:lnSpc>
+        </a:lvl2pPr>
+      </dgm1612:lstStyle>
+    </a:ext>
+  </dgm:extLst>
+</dgm:layoutDef>
+</file>
+
 <file path=ppt/diagrams/quickStyle1.xml><?xml version="1.0" encoding="utf-8"?>
 <dgm:styleDef xmlns:dgm="http://schemas.openxmlformats.org/drawingml/2006/diagram" xmlns:a="http://schemas.openxmlformats.org/drawingml/2006/main" uniqueId="urn:microsoft.com/office/officeart/2005/8/quickstyle/simple4">
   <dgm:title val=""/>
@@ -4932,6 +7045,1040 @@
 </file>
 
 <file path=ppt/diagrams/quickStyle2.xml><?xml version="1.0" encoding="utf-8"?>
+<dgm:styleDef xmlns:dgm="http://schemas.openxmlformats.org/drawingml/2006/diagram" xmlns:a="http://schemas.openxmlformats.org/drawingml/2006/main" uniqueId="urn:microsoft.com/office/officeart/2005/8/quickstyle/simple1">
+  <dgm:title val=""/>
+  <dgm:desc val=""/>
+  <dgm:catLst>
+    <dgm:cat type="simple" pri="10100"/>
+  </dgm:catLst>
+  <dgm:scene3d>
+    <a:camera prst="orthographicFront"/>
+    <a:lightRig rig="threePt" dir="t"/>
+  </dgm:scene3d>
+  <dgm:styleLbl name="node0">
+    <dgm:scene3d>
+      <a:camera prst="orthographicFront"/>
+      <a:lightRig rig="threePt" dir="t"/>
+    </dgm:scene3d>
+    <dgm:sp3d/>
+    <dgm:txPr/>
+    <dgm:style>
+      <a:lnRef idx="2">
+        <a:scrgbClr r="0" g="0" b="0"/>
+      </a:lnRef>
+      <a:fillRef idx="1">
+        <a:scrgbClr r="0" g="0" b="0"/>
+      </a:fillRef>
+      <a:effectRef idx="0">
+        <a:scrgbClr r="0" g="0" b="0"/>
+      </a:effectRef>
+      <a:fontRef idx="minor">
+        <a:schemeClr val="lt1"/>
+      </a:fontRef>
+    </dgm:style>
+  </dgm:styleLbl>
+  <dgm:styleLbl name="lnNode1">
+    <dgm:scene3d>
+      <a:camera prst="orthographicFront"/>
+      <a:lightRig rig="threePt" dir="t"/>
+    </dgm:scene3d>
+    <dgm:sp3d/>
+    <dgm:txPr/>
+    <dgm:style>
+      <a:lnRef idx="2">
+        <a:scrgbClr r="0" g="0" b="0"/>
+      </a:lnRef>
+      <a:fillRef idx="1">
+        <a:scrgbClr r="0" g="0" b="0"/>
+      </a:fillRef>
+      <a:effectRef idx="0">
+        <a:scrgbClr r="0" g="0" b="0"/>
+      </a:effectRef>
+      <a:fontRef idx="minor">
+        <a:schemeClr val="lt1"/>
+      </a:fontRef>
+    </dgm:style>
+  </dgm:styleLbl>
+  <dgm:styleLbl name="vennNode1">
+    <dgm:scene3d>
+      <a:camera prst="orthographicFront"/>
+      <a:lightRig rig="threePt" dir="t"/>
+    </dgm:scene3d>
+    <dgm:sp3d/>
+    <dgm:txPr/>
+    <dgm:style>
+      <a:lnRef idx="2">
+        <a:scrgbClr r="0" g="0" b="0"/>
+      </a:lnRef>
+      <a:fillRef idx="1">
+        <a:scrgbClr r="0" g="0" b="0"/>
+      </a:fillRef>
+      <a:effectRef idx="0">
+        <a:scrgbClr r="0" g="0" b="0"/>
+      </a:effectRef>
+      <a:fontRef idx="minor">
+        <a:schemeClr val="tx1"/>
+      </a:fontRef>
+    </dgm:style>
+  </dgm:styleLbl>
+  <dgm:styleLbl name="alignNode1">
+    <dgm:scene3d>
+      <a:camera prst="orthographicFront"/>
+      <a:lightRig rig="threePt" dir="t"/>
+    </dgm:scene3d>
+    <dgm:sp3d/>
+    <dgm:txPr/>
+    <dgm:style>
+      <a:lnRef idx="2">
+        <a:scrgbClr r="0" g="0" b="0"/>
+      </a:lnRef>
+      <a:fillRef idx="1">
+        <a:scrgbClr r="0" g="0" b="0"/>
+      </a:fillRef>
+      <a:effectRef idx="0">
+        <a:scrgbClr r="0" g="0" b="0"/>
+      </a:effectRef>
+      <a:fontRef idx="minor">
+        <a:schemeClr val="lt1"/>
+      </a:fontRef>
+    </dgm:style>
+  </dgm:styleLbl>
+  <dgm:styleLbl name="node1">
+    <dgm:scene3d>
+      <a:camera prst="orthographicFront"/>
+      <a:lightRig rig="threePt" dir="t"/>
+    </dgm:scene3d>
+    <dgm:sp3d/>
+    <dgm:txPr/>
+    <dgm:style>
+      <a:lnRef idx="2">
+        <a:scrgbClr r="0" g="0" b="0"/>
+      </a:lnRef>
+      <a:fillRef idx="1">
+        <a:scrgbClr r="0" g="0" b="0"/>
+      </a:fillRef>
+      <a:effectRef idx="0">
+        <a:scrgbClr r="0" g="0" b="0"/>
+      </a:effectRef>
+      <a:fontRef idx="minor">
+        <a:schemeClr val="lt1"/>
+      </a:fontRef>
+    </dgm:style>
+  </dgm:styleLbl>
+  <dgm:styleLbl name="node2">
+    <dgm:scene3d>
+      <a:camera prst="orthographicFront"/>
+      <a:lightRig rig="threePt" dir="t"/>
+    </dgm:scene3d>
+    <dgm:sp3d/>
+    <dgm:txPr/>
+    <dgm:style>
+      <a:lnRef idx="2">
+        <a:scrgbClr r="0" g="0" b="0"/>
+      </a:lnRef>
+      <a:fillRef idx="1">
+        <a:scrgbClr r="0" g="0" b="0"/>
+      </a:fillRef>
+      <a:effectRef idx="0">
+        <a:scrgbClr r="0" g="0" b="0"/>
+      </a:effectRef>
+      <a:fontRef idx="minor">
+        <a:schemeClr val="lt1"/>
+      </a:fontRef>
+    </dgm:style>
+  </dgm:styleLbl>
+  <dgm:styleLbl name="node3">
+    <dgm:scene3d>
+      <a:camera prst="orthographicFront"/>
+      <a:lightRig rig="threePt" dir="t"/>
+    </dgm:scene3d>
+    <dgm:sp3d/>
+    <dgm:txPr/>
+    <dgm:style>
+      <a:lnRef idx="2">
+        <a:scrgbClr r="0" g="0" b="0"/>
+      </a:lnRef>
+      <a:fillRef idx="1">
+        <a:scrgbClr r="0" g="0" b="0"/>
+      </a:fillRef>
+      <a:effectRef idx="0">
+        <a:scrgbClr r="0" g="0" b="0"/>
+      </a:effectRef>
+      <a:fontRef idx="minor">
+        <a:schemeClr val="lt1"/>
+      </a:fontRef>
+    </dgm:style>
+  </dgm:styleLbl>
+  <dgm:styleLbl name="node4">
+    <dgm:scene3d>
+      <a:camera prst="orthographicFront"/>
+      <a:lightRig rig="threePt" dir="t"/>
+    </dgm:scene3d>
+    <dgm:sp3d/>
+    <dgm:txPr/>
+    <dgm:style>
+      <a:lnRef idx="2">
+        <a:scrgbClr r="0" g="0" b="0"/>
+      </a:lnRef>
+      <a:fillRef idx="1">
+        <a:scrgbClr r="0" g="0" b="0"/>
+      </a:fillRef>
+      <a:effectRef idx="0">
+        <a:scrgbClr r="0" g="0" b="0"/>
+      </a:effectRef>
+      <a:fontRef idx="minor">
+        <a:schemeClr val="lt1"/>
+      </a:fontRef>
+    </dgm:style>
+  </dgm:styleLbl>
+  <dgm:styleLbl name="fgImgPlace1">
+    <dgm:scene3d>
+      <a:camera prst="orthographicFront"/>
+      <a:lightRig rig="threePt" dir="t"/>
+    </dgm:scene3d>
+    <dgm:sp3d/>
+    <dgm:txPr/>
+    <dgm:style>
+      <a:lnRef idx="2">
+        <a:scrgbClr r="0" g="0" b="0"/>
+      </a:lnRef>
+      <a:fillRef idx="1">
+        <a:scrgbClr r="0" g="0" b="0"/>
+      </a:fillRef>
+      <a:effectRef idx="0">
+        <a:scrgbClr r="0" g="0" b="0"/>
+      </a:effectRef>
+      <a:fontRef idx="minor"/>
+    </dgm:style>
+  </dgm:styleLbl>
+  <dgm:styleLbl name="alignImgPlace1">
+    <dgm:scene3d>
+      <a:camera prst="orthographicFront"/>
+      <a:lightRig rig="threePt" dir="t"/>
+    </dgm:scene3d>
+    <dgm:sp3d/>
+    <dgm:txPr/>
+    <dgm:style>
+      <a:lnRef idx="2">
+        <a:scrgbClr r="0" g="0" b="0"/>
+      </a:lnRef>
+      <a:fillRef idx="1">
+        <a:scrgbClr r="0" g="0" b="0"/>
+      </a:fillRef>
+      <a:effectRef idx="0">
+        <a:scrgbClr r="0" g="0" b="0"/>
+      </a:effectRef>
+      <a:fontRef idx="minor"/>
+    </dgm:style>
+  </dgm:styleLbl>
+  <dgm:styleLbl name="bgImgPlace1">
+    <dgm:scene3d>
+      <a:camera prst="orthographicFront"/>
+      <a:lightRig rig="threePt" dir="t"/>
+    </dgm:scene3d>
+    <dgm:sp3d/>
+    <dgm:txPr/>
+    <dgm:style>
+      <a:lnRef idx="2">
+        <a:scrgbClr r="0" g="0" b="0"/>
+      </a:lnRef>
+      <a:fillRef idx="1">
+        <a:scrgbClr r="0" g="0" b="0"/>
+      </a:fillRef>
+      <a:effectRef idx="0">
+        <a:scrgbClr r="0" g="0" b="0"/>
+      </a:effectRef>
+      <a:fontRef idx="minor"/>
+    </dgm:style>
+  </dgm:styleLbl>
+  <dgm:styleLbl name="sibTrans2D1">
+    <dgm:scene3d>
+      <a:camera prst="orthographicFront"/>
+      <a:lightRig rig="threePt" dir="t"/>
+    </dgm:scene3d>
+    <dgm:sp3d/>
+    <dgm:txPr/>
+    <dgm:style>
+      <a:lnRef idx="0">
+        <a:scrgbClr r="0" g="0" b="0"/>
+      </a:lnRef>
+      <a:fillRef idx="1">
+        <a:scrgbClr r="0" g="0" b="0"/>
+      </a:fillRef>
+      <a:effectRef idx="0">
+        <a:scrgbClr r="0" g="0" b="0"/>
+      </a:effectRef>
+      <a:fontRef idx="minor">
+        <a:schemeClr val="lt1"/>
+      </a:fontRef>
+    </dgm:style>
+  </dgm:styleLbl>
+  <dgm:styleLbl name="fgSibTrans2D1">
+    <dgm:scene3d>
+      <a:camera prst="orthographicFront"/>
+      <a:lightRig rig="threePt" dir="t"/>
+    </dgm:scene3d>
+    <dgm:sp3d/>
+    <dgm:txPr/>
+    <dgm:style>
+      <a:lnRef idx="0">
+        <a:scrgbClr r="0" g="0" b="0"/>
+      </a:lnRef>
+      <a:fillRef idx="1">
+        <a:scrgbClr r="0" g="0" b="0"/>
+      </a:fillRef>
+      <a:effectRef idx="0">
+        <a:scrgbClr r="0" g="0" b="0"/>
+      </a:effectRef>
+      <a:fontRef idx="minor">
+        <a:schemeClr val="lt1"/>
+      </a:fontRef>
+    </dgm:style>
+  </dgm:styleLbl>
+  <dgm:styleLbl name="bgSibTrans2D1">
+    <dgm:scene3d>
+      <a:camera prst="orthographicFront"/>
+      <a:lightRig rig="threePt" dir="t"/>
+    </dgm:scene3d>
+    <dgm:sp3d/>
+    <dgm:txPr/>
+    <dgm:style>
+      <a:lnRef idx="0">
+        <a:scrgbClr r="0" g="0" b="0"/>
+      </a:lnRef>
+      <a:fillRef idx="1">
+        <a:scrgbClr r="0" g="0" b="0"/>
+      </a:fillRef>
+      <a:effectRef idx="0">
+        <a:scrgbClr r="0" g="0" b="0"/>
+      </a:effectRef>
+      <a:fontRef idx="minor">
+        <a:schemeClr val="lt1"/>
+      </a:fontRef>
+    </dgm:style>
+  </dgm:styleLbl>
+  <dgm:styleLbl name="sibTrans1D1">
+    <dgm:scene3d>
+      <a:camera prst="orthographicFront"/>
+      <a:lightRig rig="threePt" dir="t"/>
+    </dgm:scene3d>
+    <dgm:sp3d/>
+    <dgm:txPr/>
+    <dgm:style>
+      <a:lnRef idx="1">
+        <a:scrgbClr r="0" g="0" b="0"/>
+      </a:lnRef>
+      <a:fillRef idx="0">
+        <a:scrgbClr r="0" g="0" b="0"/>
+      </a:fillRef>
+      <a:effectRef idx="0">
+        <a:scrgbClr r="0" g="0" b="0"/>
+      </a:effectRef>
+      <a:fontRef idx="minor"/>
+    </dgm:style>
+  </dgm:styleLbl>
+  <dgm:styleLbl name="callout">
+    <dgm:scene3d>
+      <a:camera prst="orthographicFront"/>
+      <a:lightRig rig="threePt" dir="t"/>
+    </dgm:scene3d>
+    <dgm:sp3d/>
+    <dgm:txPr/>
+    <dgm:style>
+      <a:lnRef idx="2">
+        <a:scrgbClr r="0" g="0" b="0"/>
+      </a:lnRef>
+      <a:fillRef idx="1">
+        <a:scrgbClr r="0" g="0" b="0"/>
+      </a:fillRef>
+      <a:effectRef idx="0">
+        <a:scrgbClr r="0" g="0" b="0"/>
+      </a:effectRef>
+      <a:fontRef idx="minor"/>
+    </dgm:style>
+  </dgm:styleLbl>
+  <dgm:styleLbl name="asst0">
+    <dgm:scene3d>
+      <a:camera prst="orthographicFront"/>
+      <a:lightRig rig="threePt" dir="t"/>
+    </dgm:scene3d>
+    <dgm:sp3d/>
+    <dgm:txPr/>
+    <dgm:style>
+      <a:lnRef idx="2">
+        <a:scrgbClr r="0" g="0" b="0"/>
+      </a:lnRef>
+      <a:fillRef idx="1">
+        <a:scrgbClr r="0" g="0" b="0"/>
+      </a:fillRef>
+      <a:effectRef idx="0">
+        <a:scrgbClr r="0" g="0" b="0"/>
+      </a:effectRef>
+      <a:fontRef idx="minor">
+        <a:schemeClr val="lt1"/>
+      </a:fontRef>
+    </dgm:style>
+  </dgm:styleLbl>
+  <dgm:styleLbl name="asst1">
+    <dgm:scene3d>
+      <a:camera prst="orthographicFront"/>
+      <a:lightRig rig="threePt" dir="t"/>
+    </dgm:scene3d>
+    <dgm:sp3d/>
+    <dgm:txPr/>
+    <dgm:style>
+      <a:lnRef idx="2">
+        <a:scrgbClr r="0" g="0" b="0"/>
+      </a:lnRef>
+      <a:fillRef idx="1">
+        <a:scrgbClr r="0" g="0" b="0"/>
+      </a:fillRef>
+      <a:effectRef idx="0">
+        <a:scrgbClr r="0" g="0" b="0"/>
+      </a:effectRef>
+      <a:fontRef idx="minor">
+        <a:schemeClr val="lt1"/>
+      </a:fontRef>
+    </dgm:style>
+  </dgm:styleLbl>
+  <dgm:styleLbl name="asst2">
+    <dgm:scene3d>
+      <a:camera prst="orthographicFront"/>
+      <a:lightRig rig="threePt" dir="t"/>
+    </dgm:scene3d>
+    <dgm:sp3d/>
+    <dgm:txPr/>
+    <dgm:style>
+      <a:lnRef idx="2">
+        <a:scrgbClr r="0" g="0" b="0"/>
+      </a:lnRef>
+      <a:fillRef idx="1">
+        <a:scrgbClr r="0" g="0" b="0"/>
+      </a:fillRef>
+      <a:effectRef idx="0">
+        <a:scrgbClr r="0" g="0" b="0"/>
+      </a:effectRef>
+      <a:fontRef idx="minor">
+        <a:schemeClr val="lt1"/>
+      </a:fontRef>
+    </dgm:style>
+  </dgm:styleLbl>
+  <dgm:styleLbl name="asst3">
+    <dgm:scene3d>
+      <a:camera prst="orthographicFront"/>
+      <a:lightRig rig="threePt" dir="t"/>
+    </dgm:scene3d>
+    <dgm:sp3d/>
+    <dgm:txPr/>
+    <dgm:style>
+      <a:lnRef idx="2">
+        <a:scrgbClr r="0" g="0" b="0"/>
+      </a:lnRef>
+      <a:fillRef idx="1">
+        <a:scrgbClr r="0" g="0" b="0"/>
+      </a:fillRef>
+      <a:effectRef idx="0">
+        <a:scrgbClr r="0" g="0" b="0"/>
+      </a:effectRef>
+      <a:fontRef idx="minor">
+        <a:schemeClr val="lt1"/>
+      </a:fontRef>
+    </dgm:style>
+  </dgm:styleLbl>
+  <dgm:styleLbl name="asst4">
+    <dgm:scene3d>
+      <a:camera prst="orthographicFront"/>
+      <a:lightRig rig="threePt" dir="t"/>
+    </dgm:scene3d>
+    <dgm:sp3d/>
+    <dgm:txPr/>
+    <dgm:style>
+      <a:lnRef idx="2">
+        <a:scrgbClr r="0" g="0" b="0"/>
+      </a:lnRef>
+      <a:fillRef idx="1">
+        <a:scrgbClr r="0" g="0" b="0"/>
+      </a:fillRef>
+      <a:effectRef idx="0">
+        <a:scrgbClr r="0" g="0" b="0"/>
+      </a:effectRef>
+      <a:fontRef idx="minor">
+        <a:schemeClr val="lt1"/>
+      </a:fontRef>
+    </dgm:style>
+  </dgm:styleLbl>
+  <dgm:styleLbl name="parChTrans2D1">
+    <dgm:scene3d>
+      <a:camera prst="orthographicFront"/>
+      <a:lightRig rig="threePt" dir="t"/>
+    </dgm:scene3d>
+    <dgm:sp3d/>
+    <dgm:txPr/>
+    <dgm:style>
+      <a:lnRef idx="2">
+        <a:scrgbClr r="0" g="0" b="0"/>
+      </a:lnRef>
+      <a:fillRef idx="1">
+        <a:scrgbClr r="0" g="0" b="0"/>
+      </a:fillRef>
+      <a:effectRef idx="0">
+        <a:scrgbClr r="0" g="0" b="0"/>
+      </a:effectRef>
+      <a:fontRef idx="minor">
+        <a:schemeClr val="lt1"/>
+      </a:fontRef>
+    </dgm:style>
+  </dgm:styleLbl>
+  <dgm:styleLbl name="parChTrans2D2">
+    <dgm:scene3d>
+      <a:camera prst="orthographicFront"/>
+      <a:lightRig rig="threePt" dir="t"/>
+    </dgm:scene3d>
+    <dgm:sp3d/>
+    <dgm:txPr/>
+    <dgm:style>
+      <a:lnRef idx="2">
+        <a:scrgbClr r="0" g="0" b="0"/>
+      </a:lnRef>
+      <a:fillRef idx="1">
+        <a:scrgbClr r="0" g="0" b="0"/>
+      </a:fillRef>
+      <a:effectRef idx="0">
+        <a:scrgbClr r="0" g="0" b="0"/>
+      </a:effectRef>
+      <a:fontRef idx="minor">
+        <a:schemeClr val="lt1"/>
+      </a:fontRef>
+    </dgm:style>
+  </dgm:styleLbl>
+  <dgm:styleLbl name="parChTrans2D3">
+    <dgm:scene3d>
+      <a:camera prst="orthographicFront"/>
+      <a:lightRig rig="threePt" dir="t"/>
+    </dgm:scene3d>
+    <dgm:sp3d/>
+    <dgm:txPr/>
+    <dgm:style>
+      <a:lnRef idx="2">
+        <a:scrgbClr r="0" g="0" b="0"/>
+      </a:lnRef>
+      <a:fillRef idx="1">
+        <a:scrgbClr r="0" g="0" b="0"/>
+      </a:fillRef>
+      <a:effectRef idx="0">
+        <a:scrgbClr r="0" g="0" b="0"/>
+      </a:effectRef>
+      <a:fontRef idx="minor">
+        <a:schemeClr val="lt1"/>
+      </a:fontRef>
+    </dgm:style>
+  </dgm:styleLbl>
+  <dgm:styleLbl name="parChTrans2D4">
+    <dgm:scene3d>
+      <a:camera prst="orthographicFront"/>
+      <a:lightRig rig="threePt" dir="t"/>
+    </dgm:scene3d>
+    <dgm:sp3d/>
+    <dgm:txPr/>
+    <dgm:style>
+      <a:lnRef idx="2">
+        <a:scrgbClr r="0" g="0" b="0"/>
+      </a:lnRef>
+      <a:fillRef idx="1">
+        <a:scrgbClr r="0" g="0" b="0"/>
+      </a:fillRef>
+      <a:effectRef idx="0">
+        <a:scrgbClr r="0" g="0" b="0"/>
+      </a:effectRef>
+      <a:fontRef idx="minor">
+        <a:schemeClr val="lt1"/>
+      </a:fontRef>
+    </dgm:style>
+  </dgm:styleLbl>
+  <dgm:styleLbl name="parChTrans1D1">
+    <dgm:scene3d>
+      <a:camera prst="orthographicFront"/>
+      <a:lightRig rig="threePt" dir="t"/>
+    </dgm:scene3d>
+    <dgm:sp3d/>
+    <dgm:txPr/>
+    <dgm:style>
+      <a:lnRef idx="2">
+        <a:scrgbClr r="0" g="0" b="0"/>
+      </a:lnRef>
+      <a:fillRef idx="0">
+        <a:scrgbClr r="0" g="0" b="0"/>
+      </a:fillRef>
+      <a:effectRef idx="0">
+        <a:scrgbClr r="0" g="0" b="0"/>
+      </a:effectRef>
+      <a:fontRef idx="minor"/>
+    </dgm:style>
+  </dgm:styleLbl>
+  <dgm:styleLbl name="parChTrans1D2">
+    <dgm:scene3d>
+      <a:camera prst="orthographicFront"/>
+      <a:lightRig rig="threePt" dir="t"/>
+    </dgm:scene3d>
+    <dgm:sp3d/>
+    <dgm:txPr/>
+    <dgm:style>
+      <a:lnRef idx="2">
+        <a:scrgbClr r="0" g="0" b="0"/>
+      </a:lnRef>
+      <a:fillRef idx="0">
+        <a:scrgbClr r="0" g="0" b="0"/>
+      </a:fillRef>
+      <a:effectRef idx="0">
+        <a:scrgbClr r="0" g="0" b="0"/>
+      </a:effectRef>
+      <a:fontRef idx="minor"/>
+    </dgm:style>
+  </dgm:styleLbl>
+  <dgm:styleLbl name="parChTrans1D3">
+    <dgm:scene3d>
+      <a:camera prst="orthographicFront"/>
+      <a:lightRig rig="threePt" dir="t"/>
+    </dgm:scene3d>
+    <dgm:sp3d/>
+    <dgm:txPr/>
+    <dgm:style>
+      <a:lnRef idx="2">
+        <a:scrgbClr r="0" g="0" b="0"/>
+      </a:lnRef>
+      <a:fillRef idx="0">
+        <a:scrgbClr r="0" g="0" b="0"/>
+      </a:fillRef>
+      <a:effectRef idx="0">
+        <a:scrgbClr r="0" g="0" b="0"/>
+      </a:effectRef>
+      <a:fontRef idx="minor"/>
+    </dgm:style>
+  </dgm:styleLbl>
+  <dgm:styleLbl name="parChTrans1D4">
+    <dgm:scene3d>
+      <a:camera prst="orthographicFront"/>
+      <a:lightRig rig="threePt" dir="t"/>
+    </dgm:scene3d>
+    <dgm:sp3d/>
+    <dgm:txPr/>
+    <dgm:style>
+      <a:lnRef idx="2">
+        <a:scrgbClr r="0" g="0" b="0"/>
+      </a:lnRef>
+      <a:fillRef idx="0">
+        <a:scrgbClr r="0" g="0" b="0"/>
+      </a:fillRef>
+      <a:effectRef idx="0">
+        <a:scrgbClr r="0" g="0" b="0"/>
+      </a:effectRef>
+      <a:fontRef idx="minor"/>
+    </dgm:style>
+  </dgm:styleLbl>
+  <dgm:styleLbl name="fgAcc1">
+    <dgm:scene3d>
+      <a:camera prst="orthographicFront"/>
+      <a:lightRig rig="threePt" dir="t"/>
+    </dgm:scene3d>
+    <dgm:sp3d/>
+    <dgm:txPr/>
+    <dgm:style>
+      <a:lnRef idx="2">
+        <a:scrgbClr r="0" g="0" b="0"/>
+      </a:lnRef>
+      <a:fillRef idx="1">
+        <a:scrgbClr r="0" g="0" b="0"/>
+      </a:fillRef>
+      <a:effectRef idx="0">
+        <a:scrgbClr r="0" g="0" b="0"/>
+      </a:effectRef>
+      <a:fontRef idx="minor"/>
+    </dgm:style>
+  </dgm:styleLbl>
+  <dgm:styleLbl name="conFgAcc1">
+    <dgm:scene3d>
+      <a:camera prst="orthographicFront"/>
+      <a:lightRig rig="threePt" dir="t"/>
+    </dgm:scene3d>
+    <dgm:sp3d/>
+    <dgm:txPr/>
+    <dgm:style>
+      <a:lnRef idx="2">
+        <a:scrgbClr r="0" g="0" b="0"/>
+      </a:lnRef>
+      <a:fillRef idx="1">
+        <a:scrgbClr r="0" g="0" b="0"/>
+      </a:fillRef>
+      <a:effectRef idx="0">
+        <a:scrgbClr r="0" g="0" b="0"/>
+      </a:effectRef>
+      <a:fontRef idx="minor"/>
+    </dgm:style>
+  </dgm:styleLbl>
+  <dgm:styleLbl name="alignAcc1">
+    <dgm:scene3d>
+      <a:camera prst="orthographicFront"/>
+      <a:lightRig rig="threePt" dir="t"/>
+    </dgm:scene3d>
+    <dgm:sp3d/>
+    <dgm:txPr/>
+    <dgm:style>
+      <a:lnRef idx="2">
+        <a:scrgbClr r="0" g="0" b="0"/>
+      </a:lnRef>
+      <a:fillRef idx="1">
+        <a:scrgbClr r="0" g="0" b="0"/>
+      </a:fillRef>
+      <a:effectRef idx="0">
+        <a:scrgbClr r="0" g="0" b="0"/>
+      </a:effectRef>
+      <a:fontRef idx="minor"/>
+    </dgm:style>
+  </dgm:styleLbl>
+  <dgm:styleLbl name="trAlignAcc1">
+    <dgm:scene3d>
+      <a:camera prst="orthographicFront"/>
+      <a:lightRig rig="threePt" dir="t"/>
+    </dgm:scene3d>
+    <dgm:sp3d/>
+    <dgm:txPr/>
+    <dgm:style>
+      <a:lnRef idx="1">
+        <a:scrgbClr r="0" g="0" b="0"/>
+      </a:lnRef>
+      <a:fillRef idx="1">
+        <a:scrgbClr r="0" g="0" b="0"/>
+      </a:fillRef>
+      <a:effectRef idx="0">
+        <a:scrgbClr r="0" g="0" b="0"/>
+      </a:effectRef>
+      <a:fontRef idx="minor"/>
+    </dgm:style>
+  </dgm:styleLbl>
+  <dgm:styleLbl name="bgAcc1">
+    <dgm:scene3d>
+      <a:camera prst="orthographicFront"/>
+      <a:lightRig rig="threePt" dir="t"/>
+    </dgm:scene3d>
+    <dgm:sp3d/>
+    <dgm:txPr/>
+    <dgm:style>
+      <a:lnRef idx="2">
+        <a:scrgbClr r="0" g="0" b="0"/>
+      </a:lnRef>
+      <a:fillRef idx="1">
+        <a:scrgbClr r="0" g="0" b="0"/>
+      </a:fillRef>
+      <a:effectRef idx="0">
+        <a:scrgbClr r="0" g="0" b="0"/>
+      </a:effectRef>
+      <a:fontRef idx="minor"/>
+    </dgm:style>
+  </dgm:styleLbl>
+  <dgm:styleLbl name="solidFgAcc1">
+    <dgm:scene3d>
+      <a:camera prst="orthographicFront"/>
+      <a:lightRig rig="threePt" dir="t"/>
+    </dgm:scene3d>
+    <dgm:sp3d/>
+    <dgm:txPr/>
+    <dgm:style>
+      <a:lnRef idx="2">
+        <a:scrgbClr r="0" g="0" b="0"/>
+      </a:lnRef>
+      <a:fillRef idx="1">
+        <a:scrgbClr r="0" g="0" b="0"/>
+      </a:fillRef>
+      <a:effectRef idx="0">
+        <a:scrgbClr r="0" g="0" b="0"/>
+      </a:effectRef>
+      <a:fontRef idx="minor"/>
+    </dgm:style>
+  </dgm:styleLbl>
+  <dgm:styleLbl name="solidAlignAcc1">
+    <dgm:scene3d>
+      <a:camera prst="orthographicFront"/>
+      <a:lightRig rig="threePt" dir="t"/>
+    </dgm:scene3d>
+    <dgm:sp3d/>
+    <dgm:txPr/>
+    <dgm:style>
+      <a:lnRef idx="2">
+        <a:scrgbClr r="0" g="0" b="0"/>
+      </a:lnRef>
+      <a:fillRef idx="1">
+        <a:scrgbClr r="0" g="0" b="0"/>
+      </a:fillRef>
+      <a:effectRef idx="0">
+        <a:scrgbClr r="0" g="0" b="0"/>
+      </a:effectRef>
+      <a:fontRef idx="minor"/>
+    </dgm:style>
+  </dgm:styleLbl>
+  <dgm:styleLbl name="solidBgAcc1">
+    <dgm:scene3d>
+      <a:camera prst="orthographicFront"/>
+      <a:lightRig rig="threePt" dir="t"/>
+    </dgm:scene3d>
+    <dgm:sp3d/>
+    <dgm:txPr/>
+    <dgm:style>
+      <a:lnRef idx="2">
+        <a:scrgbClr r="0" g="0" b="0"/>
+      </a:lnRef>
+      <a:fillRef idx="1">
+        <a:scrgbClr r="0" g="0" b="0"/>
+      </a:fillRef>
+      <a:effectRef idx="0">
+        <a:scrgbClr r="0" g="0" b="0"/>
+      </a:effectRef>
+      <a:fontRef idx="minor"/>
+    </dgm:style>
+  </dgm:styleLbl>
+  <dgm:styleLbl name="fgAccFollowNode1">
+    <dgm:scene3d>
+      <a:camera prst="orthographicFront"/>
+      <a:lightRig rig="threePt" dir="t"/>
+    </dgm:scene3d>
+    <dgm:sp3d/>
+    <dgm:txPr/>
+    <dgm:style>
+      <a:lnRef idx="2">
+        <a:scrgbClr r="0" g="0" b="0"/>
+      </a:lnRef>
+      <a:fillRef idx="1">
+        <a:scrgbClr r="0" g="0" b="0"/>
+      </a:fillRef>
+      <a:effectRef idx="0">
+        <a:scrgbClr r="0" g="0" b="0"/>
+      </a:effectRef>
+      <a:fontRef idx="minor"/>
+    </dgm:style>
+  </dgm:styleLbl>
+  <dgm:styleLbl name="alignAccFollowNode1">
+    <dgm:scene3d>
+      <a:camera prst="orthographicFront"/>
+      <a:lightRig rig="threePt" dir="t"/>
+    </dgm:scene3d>
+    <dgm:sp3d/>
+    <dgm:txPr/>
+    <dgm:style>
+      <a:lnRef idx="2">
+        <a:scrgbClr r="0" g="0" b="0"/>
+      </a:lnRef>
+      <a:fillRef idx="1">
+        <a:scrgbClr r="0" g="0" b="0"/>
+      </a:fillRef>
+      <a:effectRef idx="0">
+        <a:scrgbClr r="0" g="0" b="0"/>
+      </a:effectRef>
+      <a:fontRef idx="minor"/>
+    </dgm:style>
+  </dgm:styleLbl>
+  <dgm:styleLbl name="bgAccFollowNode1">
+    <dgm:scene3d>
+      <a:camera prst="orthographicFront"/>
+      <a:lightRig rig="threePt" dir="t"/>
+    </dgm:scene3d>
+    <dgm:sp3d/>
+    <dgm:txPr/>
+    <dgm:style>
+      <a:lnRef idx="2">
+        <a:scrgbClr r="0" g="0" b="0"/>
+      </a:lnRef>
+      <a:fillRef idx="1">
+        <a:scrgbClr r="0" g="0" b="0"/>
+      </a:fillRef>
+      <a:effectRef idx="0">
+        <a:scrgbClr r="0" g="0" b="0"/>
+      </a:effectRef>
+      <a:fontRef idx="minor"/>
+    </dgm:style>
+  </dgm:styleLbl>
+  <dgm:styleLbl name="fgAcc0">
+    <dgm:scene3d>
+      <a:camera prst="orthographicFront"/>
+      <a:lightRig rig="threePt" dir="t"/>
+    </dgm:scene3d>
+    <dgm:sp3d/>
+    <dgm:txPr/>
+    <dgm:style>
+      <a:lnRef idx="2">
+        <a:scrgbClr r="0" g="0" b="0"/>
+      </a:lnRef>
+      <a:fillRef idx="1">
+        <a:scrgbClr r="0" g="0" b="0"/>
+      </a:fillRef>
+      <a:effectRef idx="0">
+        <a:scrgbClr r="0" g="0" b="0"/>
+      </a:effectRef>
+      <a:fontRef idx="minor"/>
+    </dgm:style>
+  </dgm:styleLbl>
+  <dgm:styleLbl name="fgAcc2">
+    <dgm:scene3d>
+      <a:camera prst="orthographicFront"/>
+      <a:lightRig rig="threePt" dir="t"/>
+    </dgm:scene3d>
+    <dgm:sp3d/>
+    <dgm:txPr/>
+    <dgm:style>
+      <a:lnRef idx="2">
+        <a:scrgbClr r="0" g="0" b="0"/>
+      </a:lnRef>
+      <a:fillRef idx="1">
+        <a:scrgbClr r="0" g="0" b="0"/>
+      </a:fillRef>
+      <a:effectRef idx="0">
+        <a:scrgbClr r="0" g="0" b="0"/>
+      </a:effectRef>
+      <a:fontRef idx="minor"/>
+    </dgm:style>
+  </dgm:styleLbl>
+  <dgm:styleLbl name="fgAcc3">
+    <dgm:scene3d>
+      <a:camera prst="orthographicFront"/>
+      <a:lightRig rig="threePt" dir="t"/>
+    </dgm:scene3d>
+    <dgm:sp3d/>
+    <dgm:txPr/>
+    <dgm:style>
+      <a:lnRef idx="2">
+        <a:scrgbClr r="0" g="0" b="0"/>
+      </a:lnRef>
+      <a:fillRef idx="1">
+        <a:scrgbClr r="0" g="0" b="0"/>
+      </a:fillRef>
+      <a:effectRef idx="0">
+        <a:scrgbClr r="0" g="0" b="0"/>
+      </a:effectRef>
+      <a:fontRef idx="minor"/>
+    </dgm:style>
+  </dgm:styleLbl>
+  <dgm:styleLbl name="fgAcc4">
+    <dgm:scene3d>
+      <a:camera prst="orthographicFront"/>
+      <a:lightRig rig="threePt" dir="t"/>
+    </dgm:scene3d>
+    <dgm:sp3d/>
+    <dgm:txPr/>
+    <dgm:style>
+      <a:lnRef idx="2">
+        <a:scrgbClr r="0" g="0" b="0"/>
+      </a:lnRef>
+      <a:fillRef idx="1">
+        <a:scrgbClr r="0" g="0" b="0"/>
+      </a:fillRef>
+      <a:effectRef idx="0">
+        <a:scrgbClr r="0" g="0" b="0"/>
+      </a:effectRef>
+      <a:fontRef idx="minor"/>
+    </dgm:style>
+  </dgm:styleLbl>
+  <dgm:styleLbl name="bgShp">
+    <dgm:scene3d>
+      <a:camera prst="orthographicFront"/>
+      <a:lightRig rig="threePt" dir="t"/>
+    </dgm:scene3d>
+    <dgm:sp3d/>
+    <dgm:txPr/>
+    <dgm:style>
+      <a:lnRef idx="0">
+        <a:scrgbClr r="0" g="0" b="0"/>
+      </a:lnRef>
+      <a:fillRef idx="1">
+        <a:scrgbClr r="0" g="0" b="0"/>
+      </a:fillRef>
+      <a:effectRef idx="0">
+        <a:scrgbClr r="0" g="0" b="0"/>
+      </a:effectRef>
+      <a:fontRef idx="minor"/>
+    </dgm:style>
+  </dgm:styleLbl>
+  <dgm:styleLbl name="dkBgShp">
+    <dgm:scene3d>
+      <a:camera prst="orthographicFront"/>
+      <a:lightRig rig="threePt" dir="t"/>
+    </dgm:scene3d>
+    <dgm:sp3d/>
+    <dgm:txPr/>
+    <dgm:style>
+      <a:lnRef idx="0">
+        <a:scrgbClr r="0" g="0" b="0"/>
+      </a:lnRef>
+      <a:fillRef idx="1">
+        <a:scrgbClr r="0" g="0" b="0"/>
+      </a:fillRef>
+      <a:effectRef idx="0">
+        <a:scrgbClr r="0" g="0" b="0"/>
+      </a:effectRef>
+      <a:fontRef idx="minor"/>
+    </dgm:style>
+  </dgm:styleLbl>
+  <dgm:styleLbl name="trBgShp">
+    <dgm:scene3d>
+      <a:camera prst="orthographicFront"/>
+      <a:lightRig rig="threePt" dir="t"/>
+    </dgm:scene3d>
+    <dgm:sp3d/>
+    <dgm:txPr/>
+    <dgm:style>
+      <a:lnRef idx="0">
+        <a:scrgbClr r="0" g="0" b="0"/>
+      </a:lnRef>
+      <a:fillRef idx="1">
+        <a:scrgbClr r="0" g="0" b="0"/>
+      </a:fillRef>
+      <a:effectRef idx="0">
+        <a:scrgbClr r="0" g="0" b="0"/>
+      </a:effectRef>
+      <a:fontRef idx="minor"/>
+    </dgm:style>
+  </dgm:styleLbl>
+  <dgm:styleLbl name="fgShp">
+    <dgm:scene3d>
+      <a:camera prst="orthographicFront"/>
+      <a:lightRig rig="threePt" dir="t"/>
+    </dgm:scene3d>
+    <dgm:sp3d/>
+    <dgm:txPr/>
+    <dgm:style>
+      <a:lnRef idx="2">
+        <a:scrgbClr r="0" g="0" b="0"/>
+      </a:lnRef>
+      <a:fillRef idx="1">
+        <a:scrgbClr r="0" g="0" b="0"/>
+      </a:fillRef>
+      <a:effectRef idx="0">
+        <a:scrgbClr r="0" g="0" b="0"/>
+      </a:effectRef>
+      <a:fontRef idx="minor"/>
+    </dgm:style>
+  </dgm:styleLbl>
+  <dgm:styleLbl name="revTx">
+    <dgm:scene3d>
+      <a:camera prst="orthographicFront"/>
+      <a:lightRig rig="threePt" dir="t"/>
+    </dgm:scene3d>
+    <dgm:sp3d/>
+    <dgm:txPr/>
+    <dgm:style>
+      <a:lnRef idx="0">
+        <a:scrgbClr r="0" g="0" b="0"/>
+      </a:lnRef>
+      <a:fillRef idx="0">
+        <a:scrgbClr r="0" g="0" b="0"/>
+      </a:fillRef>
+      <a:effectRef idx="0">
+        <a:scrgbClr r="0" g="0" b="0"/>
+      </a:effectRef>
+      <a:fontRef idx="minor"/>
+    </dgm:style>
+  </dgm:styleLbl>
+</dgm:styleDef>
+</file>
+
+<file path=ppt/diagrams/quickStyle3.xml><?xml version="1.0" encoding="utf-8"?>
 <dgm:styleDef xmlns:dgm="http://schemas.openxmlformats.org/drawingml/2006/diagram" xmlns:a="http://schemas.openxmlformats.org/drawingml/2006/main" uniqueId="urn:microsoft.com/office/officeart/2005/8/quickstyle/simple1">
   <dgm:title val=""/>
   <dgm:desc val=""/>
@@ -6641,7 +9788,7 @@
             <a:pPr rtl="0"/>
             <a:fld id="{4B725628-3A68-42F4-BA86-981817953149}" type="slidenum">
               <a:rPr lang="en-GB" smtClean="0"/>
-              <a:t>8</a:t>
+              <a:t>9</a:t>
             </a:fld>
             <a:endParaRPr lang="en-GB" dirty="0"/>
           </a:p>
@@ -6650,7 +9797,265 @@
     </p:spTree>
     <p:extLst>
       <p:ext uri="{BB962C8B-B14F-4D97-AF65-F5344CB8AC3E}">
-        <p14:creationId xmlns:p14="http://schemas.microsoft.com/office/powerpoint/2010/main" val="3959845782"/>
+        <p14:creationId xmlns:p14="http://schemas.microsoft.com/office/powerpoint/2010/main" val="941608059"/>
+      </p:ext>
+    </p:extLst>
+  </p:cSld>
+  <p:clrMapOvr>
+    <a:masterClrMapping/>
+  </p:clrMapOvr>
+</p:notes>
+</file>
+
+<file path=ppt/notesSlides/notesSlide3.xml><?xml version="1.0" encoding="utf-8"?>
+<p:notes xmlns:a="http://schemas.openxmlformats.org/drawingml/2006/main" xmlns:r="http://schemas.openxmlformats.org/officeDocument/2006/relationships" xmlns:p="http://schemas.openxmlformats.org/presentationml/2006/main">
+  <p:cSld>
+    <p:spTree>
+      <p:nvGrpSpPr>
+        <p:cNvPr id="1" name=""/>
+        <p:cNvGrpSpPr/>
+        <p:nvPr/>
+      </p:nvGrpSpPr>
+      <p:grpSpPr>
+        <a:xfrm>
+          <a:off x="0" y="0"/>
+          <a:ext cx="0" cy="0"/>
+          <a:chOff x="0" y="0"/>
+          <a:chExt cx="0" cy="0"/>
+        </a:xfrm>
+      </p:grpSpPr>
+      <p:sp>
+        <p:nvSpPr>
+          <p:cNvPr id="2" name="Slide Image Placeholder 1"/>
+          <p:cNvSpPr>
+            <a:spLocks noGrp="1" noRot="1" noChangeAspect="1"/>
+          </p:cNvSpPr>
+          <p:nvPr>
+            <p:ph type="sldImg"/>
+          </p:nvPr>
+        </p:nvSpPr>
+        <p:spPr/>
+      </p:sp>
+      <p:sp>
+        <p:nvSpPr>
+          <p:cNvPr id="3" name="Notes Placeholder 2"/>
+          <p:cNvSpPr>
+            <a:spLocks noGrp="1"/>
+          </p:cNvSpPr>
+          <p:nvPr>
+            <p:ph type="body" idx="1"/>
+          </p:nvPr>
+        </p:nvSpPr>
+        <p:spPr/>
+        <p:txBody>
+          <a:bodyPr rtlCol="0"/>
+          <a:lstStyle/>
+          <a:p>
+            <a:pPr rtl="0"/>
+            <a:endParaRPr lang="en-GB" dirty="0"/>
+          </a:p>
+        </p:txBody>
+      </p:sp>
+      <p:sp>
+        <p:nvSpPr>
+          <p:cNvPr id="4" name="Slide Number Placeholder 3"/>
+          <p:cNvSpPr>
+            <a:spLocks noGrp="1"/>
+          </p:cNvSpPr>
+          <p:nvPr>
+            <p:ph type="sldNum" sz="quarter" idx="10"/>
+          </p:nvPr>
+        </p:nvSpPr>
+        <p:spPr/>
+        <p:txBody>
+          <a:bodyPr rtlCol="0"/>
+          <a:lstStyle/>
+          <a:p>
+            <a:pPr rtl="0"/>
+            <a:fld id="{4B725628-3A68-42F4-BA86-981817953149}" type="slidenum">
+              <a:rPr lang="en-GB" smtClean="0"/>
+              <a:t>10</a:t>
+            </a:fld>
+            <a:endParaRPr lang="en-GB" dirty="0"/>
+          </a:p>
+        </p:txBody>
+      </p:sp>
+    </p:spTree>
+    <p:extLst>
+      <p:ext uri="{BB962C8B-B14F-4D97-AF65-F5344CB8AC3E}">
+        <p14:creationId xmlns:p14="http://schemas.microsoft.com/office/powerpoint/2010/main" val="1603740095"/>
+      </p:ext>
+    </p:extLst>
+  </p:cSld>
+  <p:clrMapOvr>
+    <a:masterClrMapping/>
+  </p:clrMapOvr>
+</p:notes>
+</file>
+
+<file path=ppt/notesSlides/notesSlide4.xml><?xml version="1.0" encoding="utf-8"?>
+<p:notes xmlns:a="http://schemas.openxmlformats.org/drawingml/2006/main" xmlns:r="http://schemas.openxmlformats.org/officeDocument/2006/relationships" xmlns:p="http://schemas.openxmlformats.org/presentationml/2006/main">
+  <p:cSld>
+    <p:spTree>
+      <p:nvGrpSpPr>
+        <p:cNvPr id="1" name=""/>
+        <p:cNvGrpSpPr/>
+        <p:nvPr/>
+      </p:nvGrpSpPr>
+      <p:grpSpPr>
+        <a:xfrm>
+          <a:off x="0" y="0"/>
+          <a:ext cx="0" cy="0"/>
+          <a:chOff x="0" y="0"/>
+          <a:chExt cx="0" cy="0"/>
+        </a:xfrm>
+      </p:grpSpPr>
+      <p:sp>
+        <p:nvSpPr>
+          <p:cNvPr id="2" name="Slide Image Placeholder 1"/>
+          <p:cNvSpPr>
+            <a:spLocks noGrp="1" noRot="1" noChangeAspect="1"/>
+          </p:cNvSpPr>
+          <p:nvPr>
+            <p:ph type="sldImg"/>
+          </p:nvPr>
+        </p:nvSpPr>
+        <p:spPr/>
+      </p:sp>
+      <p:sp>
+        <p:nvSpPr>
+          <p:cNvPr id="3" name="Notes Placeholder 2"/>
+          <p:cNvSpPr>
+            <a:spLocks noGrp="1"/>
+          </p:cNvSpPr>
+          <p:nvPr>
+            <p:ph type="body" idx="1"/>
+          </p:nvPr>
+        </p:nvSpPr>
+        <p:spPr/>
+        <p:txBody>
+          <a:bodyPr rtlCol="0"/>
+          <a:lstStyle/>
+          <a:p>
+            <a:pPr rtl="0"/>
+            <a:endParaRPr lang="en-GB" dirty="0"/>
+          </a:p>
+        </p:txBody>
+      </p:sp>
+      <p:sp>
+        <p:nvSpPr>
+          <p:cNvPr id="4" name="Slide Number Placeholder 3"/>
+          <p:cNvSpPr>
+            <a:spLocks noGrp="1"/>
+          </p:cNvSpPr>
+          <p:nvPr>
+            <p:ph type="sldNum" sz="quarter" idx="10"/>
+          </p:nvPr>
+        </p:nvSpPr>
+        <p:spPr/>
+        <p:txBody>
+          <a:bodyPr rtlCol="0"/>
+          <a:lstStyle/>
+          <a:p>
+            <a:pPr rtl="0"/>
+            <a:fld id="{4B725628-3A68-42F4-BA86-981817953149}" type="slidenum">
+              <a:rPr lang="en-GB" smtClean="0"/>
+              <a:t>11</a:t>
+            </a:fld>
+            <a:endParaRPr lang="en-GB" dirty="0"/>
+          </a:p>
+        </p:txBody>
+      </p:sp>
+    </p:spTree>
+    <p:extLst>
+      <p:ext uri="{BB962C8B-B14F-4D97-AF65-F5344CB8AC3E}">
+        <p14:creationId xmlns:p14="http://schemas.microsoft.com/office/powerpoint/2010/main" val="1052946963"/>
+      </p:ext>
+    </p:extLst>
+  </p:cSld>
+  <p:clrMapOvr>
+    <a:masterClrMapping/>
+  </p:clrMapOvr>
+</p:notes>
+</file>
+
+<file path=ppt/notesSlides/notesSlide5.xml><?xml version="1.0" encoding="utf-8"?>
+<p:notes xmlns:a="http://schemas.openxmlformats.org/drawingml/2006/main" xmlns:r="http://schemas.openxmlformats.org/officeDocument/2006/relationships" xmlns:p="http://schemas.openxmlformats.org/presentationml/2006/main">
+  <p:cSld>
+    <p:spTree>
+      <p:nvGrpSpPr>
+        <p:cNvPr id="1" name=""/>
+        <p:cNvGrpSpPr/>
+        <p:nvPr/>
+      </p:nvGrpSpPr>
+      <p:grpSpPr>
+        <a:xfrm>
+          <a:off x="0" y="0"/>
+          <a:ext cx="0" cy="0"/>
+          <a:chOff x="0" y="0"/>
+          <a:chExt cx="0" cy="0"/>
+        </a:xfrm>
+      </p:grpSpPr>
+      <p:sp>
+        <p:nvSpPr>
+          <p:cNvPr id="2" name="Slide Image Placeholder 1"/>
+          <p:cNvSpPr>
+            <a:spLocks noGrp="1" noRot="1" noChangeAspect="1"/>
+          </p:cNvSpPr>
+          <p:nvPr>
+            <p:ph type="sldImg"/>
+          </p:nvPr>
+        </p:nvSpPr>
+        <p:spPr/>
+      </p:sp>
+      <p:sp>
+        <p:nvSpPr>
+          <p:cNvPr id="3" name="Notes Placeholder 2"/>
+          <p:cNvSpPr>
+            <a:spLocks noGrp="1"/>
+          </p:cNvSpPr>
+          <p:nvPr>
+            <p:ph type="body" idx="1"/>
+          </p:nvPr>
+        </p:nvSpPr>
+        <p:spPr/>
+        <p:txBody>
+          <a:bodyPr rtlCol="0"/>
+          <a:lstStyle/>
+          <a:p>
+            <a:pPr rtl="0"/>
+            <a:endParaRPr lang="en-GB" dirty="0"/>
+          </a:p>
+        </p:txBody>
+      </p:sp>
+      <p:sp>
+        <p:nvSpPr>
+          <p:cNvPr id="4" name="Slide Number Placeholder 3"/>
+          <p:cNvSpPr>
+            <a:spLocks noGrp="1"/>
+          </p:cNvSpPr>
+          <p:nvPr>
+            <p:ph type="sldNum" sz="quarter" idx="10"/>
+          </p:nvPr>
+        </p:nvSpPr>
+        <p:spPr/>
+        <p:txBody>
+          <a:bodyPr rtlCol="0"/>
+          <a:lstStyle/>
+          <a:p>
+            <a:pPr rtl="0"/>
+            <a:fld id="{4B725628-3A68-42F4-BA86-981817953149}" type="slidenum">
+              <a:rPr lang="en-GB" smtClean="0"/>
+              <a:t>12</a:t>
+            </a:fld>
+            <a:endParaRPr lang="en-GB" dirty="0"/>
+          </a:p>
+        </p:txBody>
+      </p:sp>
+    </p:spTree>
+    <p:extLst>
+      <p:ext uri="{BB962C8B-B14F-4D97-AF65-F5344CB8AC3E}">
+        <p14:creationId xmlns:p14="http://schemas.microsoft.com/office/powerpoint/2010/main" val="3467637433"/>
       </p:ext>
     </p:extLst>
   </p:cSld>
@@ -27593,6 +30998,858 @@
           <p:cNvPr id="2" name="Title 1">
             <a:extLst>
               <a:ext uri="{FF2B5EF4-FFF2-40B4-BE49-F238E27FC236}">
+                <a16:creationId xmlns:a16="http://schemas.microsoft.com/office/drawing/2014/main" id="{7A4919D0-F177-4BBA-9A0B-DBA69E2ED764}"/>
+              </a:ext>
+            </a:extLst>
+          </p:cNvPr>
+          <p:cNvSpPr>
+            <a:spLocks noGrp="1"/>
+          </p:cNvSpPr>
+          <p:nvPr>
+            <p:ph type="title"/>
+          </p:nvPr>
+        </p:nvSpPr>
+        <p:spPr>
+          <a:xfrm>
+            <a:off x="1024128" y="585216"/>
+            <a:ext cx="9720072" cy="1499616"/>
+          </a:xfrm>
+        </p:spPr>
+        <p:txBody>
+          <a:bodyPr rtlCol="0" anchor="ctr">
+            <a:normAutofit/>
+          </a:bodyPr>
+          <a:lstStyle/>
+          <a:p>
+            <a:pPr rtl="0"/>
+            <a:r>
+              <a:rPr lang="en-GB" dirty="0" err="1"/>
+              <a:t>Simulación</a:t>
+            </a:r>
+            <a:r>
+              <a:rPr lang="en-GB" dirty="0"/>
+              <a:t> – </a:t>
+            </a:r>
+            <a:r>
+              <a:rPr lang="en-GB" dirty="0" err="1"/>
+              <a:t>Comportamiento</a:t>
+            </a:r>
+            <a:r>
+              <a:rPr lang="en-GB" dirty="0"/>
+              <a:t> </a:t>
+            </a:r>
+            <a:r>
+              <a:rPr lang="en-GB" dirty="0" err="1"/>
+              <a:t>eStático</a:t>
+            </a:r>
+            <a:endParaRPr lang="en-GB" dirty="0"/>
+          </a:p>
+        </p:txBody>
+      </p:sp>
+      <p:sp>
+        <p:nvSpPr>
+          <p:cNvPr id="4" name="Date Placeholder 3">
+            <a:extLst>
+              <a:ext uri="{FF2B5EF4-FFF2-40B4-BE49-F238E27FC236}">
+                <a16:creationId xmlns:a16="http://schemas.microsoft.com/office/drawing/2014/main" id="{FB5C8163-4DA8-BD4C-198B-32E4C6A6CECF}"/>
+              </a:ext>
+            </a:extLst>
+          </p:cNvPr>
+          <p:cNvSpPr>
+            <a:spLocks noGrp="1"/>
+          </p:cNvSpPr>
+          <p:nvPr>
+            <p:ph type="dt" sz="half" idx="10"/>
+          </p:nvPr>
+        </p:nvSpPr>
+        <p:spPr>
+          <a:xfrm>
+            <a:off x="1024129" y="6470704"/>
+            <a:ext cx="2154143" cy="274320"/>
+          </a:xfrm>
+        </p:spPr>
+        <p:txBody>
+          <a:bodyPr anchor="ctr">
+            <a:normAutofit/>
+          </a:bodyPr>
+          <a:lstStyle/>
+          <a:p>
+            <a:pPr rtl="0">
+              <a:spcAft>
+                <a:spcPts val="600"/>
+              </a:spcAft>
+            </a:pPr>
+            <a:r>
+              <a:rPr lang="en-US" noProof="0"/>
+              <a:t>02/07/2025</a:t>
+            </a:r>
+            <a:endParaRPr lang="en-GB" noProof="0"/>
+          </a:p>
+        </p:txBody>
+      </p:sp>
+      <p:sp>
+        <p:nvSpPr>
+          <p:cNvPr id="6" name="Slide Number Placeholder 5">
+            <a:extLst>
+              <a:ext uri="{FF2B5EF4-FFF2-40B4-BE49-F238E27FC236}">
+                <a16:creationId xmlns:a16="http://schemas.microsoft.com/office/drawing/2014/main" id="{870484B8-5401-A575-83E7-06F8B0E029A8}"/>
+              </a:ext>
+            </a:extLst>
+          </p:cNvPr>
+          <p:cNvSpPr>
+            <a:spLocks noGrp="1"/>
+          </p:cNvSpPr>
+          <p:nvPr>
+            <p:ph type="sldNum" sz="quarter" idx="12"/>
+          </p:nvPr>
+        </p:nvSpPr>
+        <p:spPr>
+          <a:xfrm>
+            <a:off x="10837333" y="6470704"/>
+            <a:ext cx="973667" cy="274320"/>
+          </a:xfrm>
+        </p:spPr>
+        <p:txBody>
+          <a:bodyPr anchor="ctr">
+            <a:normAutofit/>
+          </a:bodyPr>
+          <a:lstStyle/>
+          <a:p>
+            <a:pPr rtl="0">
+              <a:spcAft>
+                <a:spcPts val="600"/>
+              </a:spcAft>
+            </a:pPr>
+            <a:fld id="{4FAB73BC-B049-4115-A692-8D63A059BFB8}" type="slidenum">
+              <a:rPr lang="en-GB" noProof="0" smtClean="0"/>
+              <a:pPr rtl="0">
+                <a:spcAft>
+                  <a:spcPts val="600"/>
+                </a:spcAft>
+              </a:pPr>
+              <a:t>10</a:t>
+            </a:fld>
+            <a:endParaRPr lang="en-GB" noProof="0"/>
+          </a:p>
+        </p:txBody>
+      </p:sp>
+      <p:graphicFrame>
+        <p:nvGraphicFramePr>
+          <p:cNvPr id="8" name="Content Placeholder 4">
+            <a:extLst>
+              <a:ext uri="{FF2B5EF4-FFF2-40B4-BE49-F238E27FC236}">
+                <a16:creationId xmlns:a16="http://schemas.microsoft.com/office/drawing/2014/main" id="{774032CC-261F-6C6E-11DE-32D691FF640D}"/>
+              </a:ext>
+            </a:extLst>
+          </p:cNvPr>
+          <p:cNvGraphicFramePr>
+            <a:graphicFrameLocks noGrp="1"/>
+          </p:cNvGraphicFramePr>
+          <p:nvPr>
+            <p:ph idx="1"/>
+          </p:nvPr>
+        </p:nvGraphicFramePr>
+        <p:xfrm>
+          <a:off x="1024128" y="2286000"/>
+          <a:ext cx="9720073" cy="4023360"/>
+        </p:xfrm>
+        <a:graphic>
+          <a:graphicData uri="http://schemas.openxmlformats.org/drawingml/2006/diagram">
+            <dgm:relIds xmlns:dgm="http://schemas.openxmlformats.org/drawingml/2006/diagram" xmlns:r="http://schemas.openxmlformats.org/officeDocument/2006/relationships" r:dm="rId3" r:lo="rId4" r:qs="rId5" r:cs="rId6"/>
+          </a:graphicData>
+        </a:graphic>
+      </p:graphicFrame>
+      <p:pic>
+        <p:nvPicPr>
+          <p:cNvPr id="9" name="Picture 2" descr="Imagen corporativa - Fundación San Pablo Andalucía CEU">
+            <a:extLst>
+              <a:ext uri="{FF2B5EF4-FFF2-40B4-BE49-F238E27FC236}">
+                <a16:creationId xmlns:a16="http://schemas.microsoft.com/office/drawing/2014/main" id="{E586BB0D-CC6B-090F-F1A4-DBE8ED120FFF}"/>
+              </a:ext>
+            </a:extLst>
+          </p:cNvPr>
+          <p:cNvPicPr/>
+          <p:nvPr/>
+        </p:nvPicPr>
+        <p:blipFill>
+          <a:blip r:embed="rId8">
+            <a:extLst>
+              <a:ext uri="{28A0092B-C50C-407E-A947-70E740481C1C}">
+                <a14:useLocalDpi xmlns:a14="http://schemas.microsoft.com/office/drawing/2010/main" val="0"/>
+              </a:ext>
+            </a:extLst>
+          </a:blip>
+          <a:srcRect/>
+          <a:stretch>
+            <a:fillRect/>
+          </a:stretch>
+        </p:blipFill>
+        <p:spPr bwMode="auto">
+          <a:xfrm>
+            <a:off x="11250040" y="6189735"/>
+            <a:ext cx="945214" cy="668265"/>
+          </a:xfrm>
+          <a:prstGeom prst="rect">
+            <a:avLst/>
+          </a:prstGeom>
+          <a:noFill/>
+          <a:extLst>
+            <a:ext uri="{909E8E84-426E-40DD-AFC4-6F175D3DCCD1}">
+              <a14:hiddenFill xmlns:a14="http://schemas.microsoft.com/office/drawing/2010/main">
+                <a:solidFill>
+                  <a:srgbClr val="FFFFFF"/>
+                </a:solidFill>
+              </a14:hiddenFill>
+            </a:ext>
+          </a:extLst>
+        </p:spPr>
+      </p:pic>
+    </p:spTree>
+    <p:extLst>
+      <p:ext uri="{BB962C8B-B14F-4D97-AF65-F5344CB8AC3E}">
+        <p14:creationId xmlns:p14="http://schemas.microsoft.com/office/powerpoint/2010/main" val="2112812559"/>
+      </p:ext>
+    </p:extLst>
+  </p:cSld>
+  <p:clrMapOvr>
+    <a:masterClrMapping/>
+  </p:clrMapOvr>
+</p:sld>
+</file>
+
+<file path=ppt/slides/slide11.xml><?xml version="1.0" encoding="utf-8"?>
+<p:sld xmlns:a="http://schemas.openxmlformats.org/drawingml/2006/main" xmlns:r="http://schemas.openxmlformats.org/officeDocument/2006/relationships" xmlns:p="http://schemas.openxmlformats.org/presentationml/2006/main">
+  <p:cSld>
+    <p:bg>
+      <p:bgPr>
+        <a:solidFill>
+          <a:schemeClr val="bg1"/>
+        </a:solidFill>
+        <a:effectLst/>
+      </p:bgPr>
+    </p:bg>
+    <p:spTree>
+      <p:nvGrpSpPr>
+        <p:cNvPr id="1" name=""/>
+        <p:cNvGrpSpPr/>
+        <p:nvPr/>
+      </p:nvGrpSpPr>
+      <p:grpSpPr>
+        <a:xfrm>
+          <a:off x="0" y="0"/>
+          <a:ext cx="0" cy="0"/>
+          <a:chOff x="0" y="0"/>
+          <a:chExt cx="0" cy="0"/>
+        </a:xfrm>
+      </p:grpSpPr>
+      <p:sp>
+        <p:nvSpPr>
+          <p:cNvPr id="2" name="Title 1">
+            <a:extLst>
+              <a:ext uri="{FF2B5EF4-FFF2-40B4-BE49-F238E27FC236}">
+                <a16:creationId xmlns:a16="http://schemas.microsoft.com/office/drawing/2014/main" id="{7A4919D0-F177-4BBA-9A0B-DBA69E2ED764}"/>
+              </a:ext>
+            </a:extLst>
+          </p:cNvPr>
+          <p:cNvSpPr>
+            <a:spLocks noGrp="1"/>
+          </p:cNvSpPr>
+          <p:nvPr>
+            <p:ph type="title"/>
+          </p:nvPr>
+        </p:nvSpPr>
+        <p:spPr>
+          <a:xfrm>
+            <a:off x="1024128" y="585216"/>
+            <a:ext cx="9720072" cy="1499616"/>
+          </a:xfrm>
+        </p:spPr>
+        <p:txBody>
+          <a:bodyPr rtlCol="0">
+            <a:normAutofit/>
+          </a:bodyPr>
+          <a:lstStyle/>
+          <a:p>
+            <a:pPr rtl="0"/>
+            <a:r>
+              <a:rPr lang="en-GB" dirty="0" err="1"/>
+              <a:t>Simulación</a:t>
+            </a:r>
+            <a:endParaRPr lang="en-GB" dirty="0"/>
+          </a:p>
+        </p:txBody>
+      </p:sp>
+      <p:pic>
+        <p:nvPicPr>
+          <p:cNvPr id="3" name="Picture 2" descr="Imagen corporativa - Fundación San Pablo Andalucía CEU">
+            <a:extLst>
+              <a:ext uri="{FF2B5EF4-FFF2-40B4-BE49-F238E27FC236}">
+                <a16:creationId xmlns:a16="http://schemas.microsoft.com/office/drawing/2014/main" id="{0BD81BE2-64ED-D40F-4D9B-A23BFEB2BED4}"/>
+              </a:ext>
+            </a:extLst>
+          </p:cNvPr>
+          <p:cNvPicPr>
+            <a:picLocks noChangeAspect="1" noChangeArrowheads="1"/>
+          </p:cNvPicPr>
+          <p:nvPr/>
+        </p:nvPicPr>
+        <p:blipFill>
+          <a:blip r:embed="rId3">
+            <a:extLst>
+              <a:ext uri="{28A0092B-C50C-407E-A947-70E740481C1C}">
+                <a14:useLocalDpi xmlns:a14="http://schemas.microsoft.com/office/drawing/2010/main" val="0"/>
+              </a:ext>
+            </a:extLst>
+          </a:blip>
+          <a:srcRect/>
+          <a:stretch>
+            <a:fillRect/>
+          </a:stretch>
+        </p:blipFill>
+        <p:spPr bwMode="auto">
+          <a:xfrm>
+            <a:off x="11250040" y="6189735"/>
+            <a:ext cx="945214" cy="668265"/>
+          </a:xfrm>
+          <a:prstGeom prst="rect">
+            <a:avLst/>
+          </a:prstGeom>
+          <a:noFill/>
+          <a:extLst>
+            <a:ext uri="{909E8E84-426E-40DD-AFC4-6F175D3DCCD1}">
+              <a14:hiddenFill xmlns:a14="http://schemas.microsoft.com/office/drawing/2010/main">
+                <a:solidFill>
+                  <a:srgbClr val="FFFFFF"/>
+                </a:solidFill>
+              </a14:hiddenFill>
+            </a:ext>
+          </a:extLst>
+        </p:spPr>
+      </p:pic>
+      <p:sp>
+        <p:nvSpPr>
+          <p:cNvPr id="4" name="Date Placeholder 3">
+            <a:extLst>
+              <a:ext uri="{FF2B5EF4-FFF2-40B4-BE49-F238E27FC236}">
+                <a16:creationId xmlns:a16="http://schemas.microsoft.com/office/drawing/2014/main" id="{FB5C8163-4DA8-BD4C-198B-32E4C6A6CECF}"/>
+              </a:ext>
+            </a:extLst>
+          </p:cNvPr>
+          <p:cNvSpPr>
+            <a:spLocks noGrp="1"/>
+          </p:cNvSpPr>
+          <p:nvPr>
+            <p:ph type="dt" sz="half" idx="10"/>
+          </p:nvPr>
+        </p:nvSpPr>
+        <p:spPr/>
+        <p:txBody>
+          <a:bodyPr/>
+          <a:lstStyle/>
+          <a:p>
+            <a:pPr rtl="0"/>
+            <a:r>
+              <a:rPr lang="en-US" noProof="0"/>
+              <a:t>02/07/2025</a:t>
+            </a:r>
+            <a:endParaRPr lang="en-GB" noProof="0" dirty="0"/>
+          </a:p>
+        </p:txBody>
+      </p:sp>
+      <p:sp>
+        <p:nvSpPr>
+          <p:cNvPr id="6" name="Slide Number Placeholder 5">
+            <a:extLst>
+              <a:ext uri="{FF2B5EF4-FFF2-40B4-BE49-F238E27FC236}">
+                <a16:creationId xmlns:a16="http://schemas.microsoft.com/office/drawing/2014/main" id="{870484B8-5401-A575-83E7-06F8B0E029A8}"/>
+              </a:ext>
+            </a:extLst>
+          </p:cNvPr>
+          <p:cNvSpPr>
+            <a:spLocks noGrp="1"/>
+          </p:cNvSpPr>
+          <p:nvPr>
+            <p:ph type="sldNum" sz="quarter" idx="12"/>
+          </p:nvPr>
+        </p:nvSpPr>
+        <p:spPr/>
+        <p:txBody>
+          <a:bodyPr/>
+          <a:lstStyle/>
+          <a:p>
+            <a:pPr rtl="0"/>
+            <a:fld id="{4FAB73BC-B049-4115-A692-8D63A059BFB8}" type="slidenum">
+              <a:rPr lang="en-GB" noProof="0" smtClean="0"/>
+              <a:t>11</a:t>
+            </a:fld>
+            <a:endParaRPr lang="en-GB" noProof="0" dirty="0"/>
+          </a:p>
+        </p:txBody>
+      </p:sp>
+      <p:pic>
+        <p:nvPicPr>
+          <p:cNvPr id="9" name="Content Placeholder 8">
+            <a:extLst>
+              <a:ext uri="{FF2B5EF4-FFF2-40B4-BE49-F238E27FC236}">
+                <a16:creationId xmlns:a16="http://schemas.microsoft.com/office/drawing/2014/main" id="{1C047714-8B56-300F-2F59-F5596C9354B0}"/>
+              </a:ext>
+            </a:extLst>
+          </p:cNvPr>
+          <p:cNvPicPr>
+            <a:picLocks noGrp="1" noChangeAspect="1"/>
+          </p:cNvPicPr>
+          <p:nvPr>
+            <p:ph idx="1"/>
+          </p:nvPr>
+        </p:nvPicPr>
+        <p:blipFill>
+          <a:blip r:embed="rId4"/>
+          <a:stretch>
+            <a:fillRect/>
+          </a:stretch>
+        </p:blipFill>
+        <p:spPr>
+          <a:xfrm>
+            <a:off x="3354748" y="2084832"/>
+            <a:ext cx="5058832" cy="3922506"/>
+          </a:xfrm>
+        </p:spPr>
+      </p:pic>
+    </p:spTree>
+    <p:extLst>
+      <p:ext uri="{BB962C8B-B14F-4D97-AF65-F5344CB8AC3E}">
+        <p14:creationId xmlns:p14="http://schemas.microsoft.com/office/powerpoint/2010/main" val="976452764"/>
+      </p:ext>
+    </p:extLst>
+  </p:cSld>
+  <p:clrMapOvr>
+    <a:masterClrMapping/>
+  </p:clrMapOvr>
+</p:sld>
+</file>
+
+<file path=ppt/slides/slide12.xml><?xml version="1.0" encoding="utf-8"?>
+<p:sld xmlns:a="http://schemas.openxmlformats.org/drawingml/2006/main" xmlns:r="http://schemas.openxmlformats.org/officeDocument/2006/relationships" xmlns:p="http://schemas.openxmlformats.org/presentationml/2006/main">
+  <p:cSld>
+    <p:bg>
+      <p:bgPr>
+        <a:solidFill>
+          <a:schemeClr val="bg1"/>
+        </a:solidFill>
+        <a:effectLst/>
+      </p:bgPr>
+    </p:bg>
+    <p:spTree>
+      <p:nvGrpSpPr>
+        <p:cNvPr id="1" name=""/>
+        <p:cNvGrpSpPr/>
+        <p:nvPr/>
+      </p:nvGrpSpPr>
+      <p:grpSpPr>
+        <a:xfrm>
+          <a:off x="0" y="0"/>
+          <a:ext cx="0" cy="0"/>
+          <a:chOff x="0" y="0"/>
+          <a:chExt cx="0" cy="0"/>
+        </a:xfrm>
+      </p:grpSpPr>
+      <p:sp>
+        <p:nvSpPr>
+          <p:cNvPr id="2" name="Title 1">
+            <a:extLst>
+              <a:ext uri="{FF2B5EF4-FFF2-40B4-BE49-F238E27FC236}">
+                <a16:creationId xmlns:a16="http://schemas.microsoft.com/office/drawing/2014/main" id="{7A4919D0-F177-4BBA-9A0B-DBA69E2ED764}"/>
+              </a:ext>
+            </a:extLst>
+          </p:cNvPr>
+          <p:cNvSpPr>
+            <a:spLocks noGrp="1"/>
+          </p:cNvSpPr>
+          <p:nvPr>
+            <p:ph type="title"/>
+          </p:nvPr>
+        </p:nvSpPr>
+        <p:spPr>
+          <a:xfrm>
+            <a:off x="1024128" y="585216"/>
+            <a:ext cx="9720072" cy="1499616"/>
+          </a:xfrm>
+        </p:spPr>
+        <p:txBody>
+          <a:bodyPr rtlCol="0">
+            <a:normAutofit/>
+          </a:bodyPr>
+          <a:lstStyle/>
+          <a:p>
+            <a:pPr rtl="0"/>
+            <a:r>
+              <a:rPr lang="en-GB" dirty="0" err="1"/>
+              <a:t>Simulación</a:t>
+            </a:r>
+            <a:endParaRPr lang="en-GB" dirty="0"/>
+          </a:p>
+        </p:txBody>
+      </p:sp>
+      <p:pic>
+        <p:nvPicPr>
+          <p:cNvPr id="3" name="Picture 2" descr="Imagen corporativa - Fundación San Pablo Andalucía CEU">
+            <a:extLst>
+              <a:ext uri="{FF2B5EF4-FFF2-40B4-BE49-F238E27FC236}">
+                <a16:creationId xmlns:a16="http://schemas.microsoft.com/office/drawing/2014/main" id="{0BD81BE2-64ED-D40F-4D9B-A23BFEB2BED4}"/>
+              </a:ext>
+            </a:extLst>
+          </p:cNvPr>
+          <p:cNvPicPr>
+            <a:picLocks noChangeAspect="1" noChangeArrowheads="1"/>
+          </p:cNvPicPr>
+          <p:nvPr/>
+        </p:nvPicPr>
+        <p:blipFill>
+          <a:blip r:embed="rId3">
+            <a:extLst>
+              <a:ext uri="{28A0092B-C50C-407E-A947-70E740481C1C}">
+                <a14:useLocalDpi xmlns:a14="http://schemas.microsoft.com/office/drawing/2010/main" val="0"/>
+              </a:ext>
+            </a:extLst>
+          </a:blip>
+          <a:srcRect/>
+          <a:stretch>
+            <a:fillRect/>
+          </a:stretch>
+        </p:blipFill>
+        <p:spPr bwMode="auto">
+          <a:xfrm>
+            <a:off x="11250040" y="6189735"/>
+            <a:ext cx="945214" cy="668265"/>
+          </a:xfrm>
+          <a:prstGeom prst="rect">
+            <a:avLst/>
+          </a:prstGeom>
+          <a:noFill/>
+          <a:extLst>
+            <a:ext uri="{909E8E84-426E-40DD-AFC4-6F175D3DCCD1}">
+              <a14:hiddenFill xmlns:a14="http://schemas.microsoft.com/office/drawing/2010/main">
+                <a:solidFill>
+                  <a:srgbClr val="FFFFFF"/>
+                </a:solidFill>
+              </a14:hiddenFill>
+            </a:ext>
+          </a:extLst>
+        </p:spPr>
+      </p:pic>
+      <p:sp>
+        <p:nvSpPr>
+          <p:cNvPr id="4" name="Date Placeholder 3">
+            <a:extLst>
+              <a:ext uri="{FF2B5EF4-FFF2-40B4-BE49-F238E27FC236}">
+                <a16:creationId xmlns:a16="http://schemas.microsoft.com/office/drawing/2014/main" id="{FB5C8163-4DA8-BD4C-198B-32E4C6A6CECF}"/>
+              </a:ext>
+            </a:extLst>
+          </p:cNvPr>
+          <p:cNvSpPr>
+            <a:spLocks noGrp="1"/>
+          </p:cNvSpPr>
+          <p:nvPr>
+            <p:ph type="dt" sz="half" idx="10"/>
+          </p:nvPr>
+        </p:nvSpPr>
+        <p:spPr/>
+        <p:txBody>
+          <a:bodyPr/>
+          <a:lstStyle/>
+          <a:p>
+            <a:pPr rtl="0"/>
+            <a:r>
+              <a:rPr lang="en-US" noProof="0"/>
+              <a:t>02/07/2025</a:t>
+            </a:r>
+            <a:endParaRPr lang="en-GB" noProof="0" dirty="0"/>
+          </a:p>
+        </p:txBody>
+      </p:sp>
+      <p:sp>
+        <p:nvSpPr>
+          <p:cNvPr id="6" name="Slide Number Placeholder 5">
+            <a:extLst>
+              <a:ext uri="{FF2B5EF4-FFF2-40B4-BE49-F238E27FC236}">
+                <a16:creationId xmlns:a16="http://schemas.microsoft.com/office/drawing/2014/main" id="{870484B8-5401-A575-83E7-06F8B0E029A8}"/>
+              </a:ext>
+            </a:extLst>
+          </p:cNvPr>
+          <p:cNvSpPr>
+            <a:spLocks noGrp="1"/>
+          </p:cNvSpPr>
+          <p:nvPr>
+            <p:ph type="sldNum" sz="quarter" idx="12"/>
+          </p:nvPr>
+        </p:nvSpPr>
+        <p:spPr/>
+        <p:txBody>
+          <a:bodyPr/>
+          <a:lstStyle/>
+          <a:p>
+            <a:pPr rtl="0"/>
+            <a:fld id="{4FAB73BC-B049-4115-A692-8D63A059BFB8}" type="slidenum">
+              <a:rPr lang="en-GB" noProof="0" smtClean="0"/>
+              <a:t>12</a:t>
+            </a:fld>
+            <a:endParaRPr lang="en-GB" noProof="0" dirty="0"/>
+          </a:p>
+        </p:txBody>
+      </p:sp>
+      <p:pic>
+        <p:nvPicPr>
+          <p:cNvPr id="12" name="Content Placeholder 11">
+            <a:extLst>
+              <a:ext uri="{FF2B5EF4-FFF2-40B4-BE49-F238E27FC236}">
+                <a16:creationId xmlns:a16="http://schemas.microsoft.com/office/drawing/2014/main" id="{A9177340-9273-25F1-4259-25A518581293}"/>
+              </a:ext>
+            </a:extLst>
+          </p:cNvPr>
+          <p:cNvPicPr>
+            <a:picLocks noGrp="1" noChangeAspect="1"/>
+          </p:cNvPicPr>
+          <p:nvPr>
+            <p:ph idx="1"/>
+          </p:nvPr>
+        </p:nvPicPr>
+        <p:blipFill>
+          <a:blip r:embed="rId4"/>
+          <a:stretch>
+            <a:fillRect/>
+          </a:stretch>
+        </p:blipFill>
+        <p:spPr>
+          <a:xfrm>
+            <a:off x="3302427" y="2084832"/>
+            <a:ext cx="5163473" cy="3951085"/>
+          </a:xfrm>
+        </p:spPr>
+      </p:pic>
+    </p:spTree>
+    <p:extLst>
+      <p:ext uri="{BB962C8B-B14F-4D97-AF65-F5344CB8AC3E}">
+        <p14:creationId xmlns:p14="http://schemas.microsoft.com/office/powerpoint/2010/main" val="678383754"/>
+      </p:ext>
+    </p:extLst>
+  </p:cSld>
+  <p:clrMapOvr>
+    <a:masterClrMapping/>
+  </p:clrMapOvr>
+</p:sld>
+</file>
+
+<file path=ppt/slides/slide13.xml><?xml version="1.0" encoding="utf-8"?>
+<p:sld xmlns:a="http://schemas.openxmlformats.org/drawingml/2006/main" xmlns:r="http://schemas.openxmlformats.org/officeDocument/2006/relationships" xmlns:p="http://schemas.openxmlformats.org/presentationml/2006/main">
+  <p:cSld>
+    <p:spTree>
+      <p:nvGrpSpPr>
+        <p:cNvPr id="1" name=""/>
+        <p:cNvGrpSpPr/>
+        <p:nvPr/>
+      </p:nvGrpSpPr>
+      <p:grpSpPr>
+        <a:xfrm>
+          <a:off x="0" y="0"/>
+          <a:ext cx="0" cy="0"/>
+          <a:chOff x="0" y="0"/>
+          <a:chExt cx="0" cy="0"/>
+        </a:xfrm>
+      </p:grpSpPr>
+      <p:sp>
+        <p:nvSpPr>
+          <p:cNvPr id="2" name="Title 1">
+            <a:extLst>
+              <a:ext uri="{FF2B5EF4-FFF2-40B4-BE49-F238E27FC236}">
+                <a16:creationId xmlns:a16="http://schemas.microsoft.com/office/drawing/2014/main" id="{F5A89B8A-D2CA-7AB0-05F0-07A329DE5DFF}"/>
+              </a:ext>
+            </a:extLst>
+          </p:cNvPr>
+          <p:cNvSpPr>
+            <a:spLocks noGrp="1"/>
+          </p:cNvSpPr>
+          <p:nvPr>
+            <p:ph type="title"/>
+          </p:nvPr>
+        </p:nvSpPr>
+        <p:spPr/>
+        <p:txBody>
+          <a:bodyPr/>
+          <a:lstStyle/>
+          <a:p>
+            <a:r>
+              <a:rPr lang="es-ES" dirty="0"/>
+              <a:t>Conclusiones y líneas futuras</a:t>
+            </a:r>
+            <a:endParaRPr lang="en-GB" dirty="0"/>
+          </a:p>
+        </p:txBody>
+      </p:sp>
+      <p:sp>
+        <p:nvSpPr>
+          <p:cNvPr id="3" name="Text Placeholder 2">
+            <a:extLst>
+              <a:ext uri="{FF2B5EF4-FFF2-40B4-BE49-F238E27FC236}">
+                <a16:creationId xmlns:a16="http://schemas.microsoft.com/office/drawing/2014/main" id="{BBEE04FF-E68F-F861-6F07-F341D2546FF7}"/>
+              </a:ext>
+            </a:extLst>
+          </p:cNvPr>
+          <p:cNvSpPr>
+            <a:spLocks noGrp="1"/>
+          </p:cNvSpPr>
+          <p:nvPr>
+            <p:ph type="body" idx="1"/>
+          </p:nvPr>
+        </p:nvSpPr>
+        <p:spPr/>
+        <p:txBody>
+          <a:bodyPr/>
+          <a:lstStyle/>
+          <a:p>
+            <a:endParaRPr lang="en-GB" dirty="0"/>
+          </a:p>
+        </p:txBody>
+      </p:sp>
+      <p:sp>
+        <p:nvSpPr>
+          <p:cNvPr id="4" name="Date Placeholder 3">
+            <a:extLst>
+              <a:ext uri="{FF2B5EF4-FFF2-40B4-BE49-F238E27FC236}">
+                <a16:creationId xmlns:a16="http://schemas.microsoft.com/office/drawing/2014/main" id="{111883EF-3158-692D-639E-CD51B2896C14}"/>
+              </a:ext>
+            </a:extLst>
+          </p:cNvPr>
+          <p:cNvSpPr>
+            <a:spLocks noGrp="1"/>
+          </p:cNvSpPr>
+          <p:nvPr>
+            <p:ph type="dt" sz="half" idx="10"/>
+          </p:nvPr>
+        </p:nvSpPr>
+        <p:spPr/>
+        <p:txBody>
+          <a:bodyPr/>
+          <a:lstStyle/>
+          <a:p>
+            <a:pPr rtl="0"/>
+            <a:r>
+              <a:rPr lang="en-US" noProof="0"/>
+              <a:t>02/07/2025</a:t>
+            </a:r>
+            <a:endParaRPr lang="en-GB" noProof="0" dirty="0"/>
+          </a:p>
+        </p:txBody>
+      </p:sp>
+      <p:sp>
+        <p:nvSpPr>
+          <p:cNvPr id="5" name="Slide Number Placeholder 4">
+            <a:extLst>
+              <a:ext uri="{FF2B5EF4-FFF2-40B4-BE49-F238E27FC236}">
+                <a16:creationId xmlns:a16="http://schemas.microsoft.com/office/drawing/2014/main" id="{9E338086-17F1-CA4E-5F1D-23F7D1237226}"/>
+              </a:ext>
+            </a:extLst>
+          </p:cNvPr>
+          <p:cNvSpPr>
+            <a:spLocks noGrp="1"/>
+          </p:cNvSpPr>
+          <p:nvPr>
+            <p:ph type="sldNum" sz="quarter" idx="12"/>
+          </p:nvPr>
+        </p:nvSpPr>
+        <p:spPr/>
+        <p:txBody>
+          <a:bodyPr/>
+          <a:lstStyle/>
+          <a:p>
+            <a:pPr rtl="0"/>
+            <a:fld id="{4FAB73BC-B049-4115-A692-8D63A059BFB8}" type="slidenum">
+              <a:rPr lang="en-GB" noProof="0" smtClean="0"/>
+              <a:t>13</a:t>
+            </a:fld>
+            <a:endParaRPr lang="en-GB" noProof="0" dirty="0"/>
+          </a:p>
+        </p:txBody>
+      </p:sp>
+      <p:pic>
+        <p:nvPicPr>
+          <p:cNvPr id="6" name="Picture 2" descr="Imagen corporativa - Fundación San Pablo Andalucía CEU">
+            <a:extLst>
+              <a:ext uri="{FF2B5EF4-FFF2-40B4-BE49-F238E27FC236}">
+                <a16:creationId xmlns:a16="http://schemas.microsoft.com/office/drawing/2014/main" id="{12C74B94-5575-EA1C-C81D-E34E622EF3DA}"/>
+              </a:ext>
+            </a:extLst>
+          </p:cNvPr>
+          <p:cNvPicPr/>
+          <p:nvPr/>
+        </p:nvPicPr>
+        <p:blipFill>
+          <a:blip r:embed="rId2">
+            <a:extLst>
+              <a:ext uri="{28A0092B-C50C-407E-A947-70E740481C1C}">
+                <a14:useLocalDpi xmlns:a14="http://schemas.microsoft.com/office/drawing/2010/main" val="0"/>
+              </a:ext>
+            </a:extLst>
+          </a:blip>
+          <a:srcRect/>
+          <a:stretch>
+            <a:fillRect/>
+          </a:stretch>
+        </p:blipFill>
+        <p:spPr bwMode="auto">
+          <a:xfrm>
+            <a:off x="11250040" y="6189735"/>
+            <a:ext cx="945214" cy="668265"/>
+          </a:xfrm>
+          <a:prstGeom prst="rect">
+            <a:avLst/>
+          </a:prstGeom>
+          <a:noFill/>
+          <a:extLst>
+            <a:ext uri="{909E8E84-426E-40DD-AFC4-6F175D3DCCD1}">
+              <a14:hiddenFill xmlns:a14="http://schemas.microsoft.com/office/drawing/2010/main">
+                <a:solidFill>
+                  <a:srgbClr val="FFFFFF"/>
+                </a:solidFill>
+              </a14:hiddenFill>
+            </a:ext>
+          </a:extLst>
+        </p:spPr>
+      </p:pic>
+    </p:spTree>
+    <p:extLst>
+      <p:ext uri="{BB962C8B-B14F-4D97-AF65-F5344CB8AC3E}">
+        <p14:creationId xmlns:p14="http://schemas.microsoft.com/office/powerpoint/2010/main" val="4267767920"/>
+      </p:ext>
+    </p:extLst>
+  </p:cSld>
+  <p:clrMapOvr>
+    <a:masterClrMapping/>
+  </p:clrMapOvr>
+</p:sld>
+</file>
+
+<file path=ppt/slides/slide14.xml><?xml version="1.0" encoding="utf-8"?>
+<p:sld xmlns:a="http://schemas.openxmlformats.org/drawingml/2006/main" xmlns:r="http://schemas.openxmlformats.org/officeDocument/2006/relationships" xmlns:p="http://schemas.openxmlformats.org/presentationml/2006/main">
+  <p:cSld>
+    <p:spTree>
+      <p:nvGrpSpPr>
+        <p:cNvPr id="1" name=""/>
+        <p:cNvGrpSpPr/>
+        <p:nvPr/>
+      </p:nvGrpSpPr>
+      <p:grpSpPr>
+        <a:xfrm>
+          <a:off x="0" y="0"/>
+          <a:ext cx="0" cy="0"/>
+          <a:chOff x="0" y="0"/>
+          <a:chExt cx="0" cy="0"/>
+        </a:xfrm>
+      </p:grpSpPr>
+      <p:sp>
+        <p:nvSpPr>
+          <p:cNvPr id="2" name="Title 1">
+            <a:extLst>
+              <a:ext uri="{FF2B5EF4-FFF2-40B4-BE49-F238E27FC236}">
                 <a16:creationId xmlns:a16="http://schemas.microsoft.com/office/drawing/2014/main" id="{18FDB922-1C15-0688-2B96-47D1C6ADEDF9}"/>
               </a:ext>
             </a:extLst>
@@ -27777,7 +32034,7 @@
             </a:pPr>
             <a:r>
               <a:rPr lang="es-ES" dirty="0"/>
-              <a:t> Introducción</a:t>
+              <a:t> Introducción y Objetivos</a:t>
             </a:r>
           </a:p>
           <a:p>
@@ -27787,7 +32044,7 @@
             </a:pPr>
             <a:r>
               <a:rPr lang="es-ES" dirty="0"/>
-              <a:t> Evasión Fiscal y Análisis de datos</a:t>
+              <a:t> Evasión Fiscal</a:t>
             </a:r>
           </a:p>
           <a:p>
@@ -27797,7 +32054,27 @@
             </a:pPr>
             <a:r>
               <a:rPr lang="es-ES" dirty="0"/>
-              <a:t> Modelo de Ising y simulación</a:t>
+              <a:t> Modelo de Ising</a:t>
+            </a:r>
+          </a:p>
+          <a:p>
+            <a:pPr>
+              <a:buFont typeface="Arial" panose="020B0604020202020204" pitchFamily="34" charset="0"/>
+              <a:buChar char="•"/>
+            </a:pPr>
+            <a:r>
+              <a:rPr lang="es-ES" dirty="0"/>
+              <a:t> Análisis de datos</a:t>
+            </a:r>
+          </a:p>
+          <a:p>
+            <a:pPr>
+              <a:buFont typeface="Arial" panose="020B0604020202020204" pitchFamily="34" charset="0"/>
+              <a:buChar char="•"/>
+            </a:pPr>
+            <a:r>
+              <a:rPr lang="es-ES" dirty="0"/>
+              <a:t> Simulación  </a:t>
             </a:r>
           </a:p>
           <a:p>
@@ -27972,7 +32249,7 @@
           <a:p>
             <a:r>
               <a:rPr lang="es-ES" dirty="0"/>
-              <a:t>Introducción</a:t>
+              <a:t>Introducción Y Objetivos</a:t>
             </a:r>
             <a:endParaRPr lang="en-GB" dirty="0"/>
           </a:p>
@@ -27999,7 +32276,7 @@
           <a:bodyPr/>
           <a:lstStyle/>
           <a:p>
-            <a:endParaRPr lang="en-GB"/>
+            <a:endParaRPr lang="en-GB" dirty="0"/>
           </a:p>
         </p:txBody>
       </p:sp>
@@ -28138,6 +32415,37 @@
           <a:chExt cx="0" cy="0"/>
         </a:xfrm>
       </p:grpSpPr>
+      <p:graphicFrame>
+        <p:nvGraphicFramePr>
+          <p:cNvPr id="33" name="Content Placeholder 2">
+            <a:extLst>
+              <a:ext uri="{FF2B5EF4-FFF2-40B4-BE49-F238E27FC236}">
+                <a16:creationId xmlns:a16="http://schemas.microsoft.com/office/drawing/2014/main" id="{27A4C1CE-A784-CE58-543F-E1A09079EAA7}"/>
+              </a:ext>
+            </a:extLst>
+          </p:cNvPr>
+          <p:cNvGraphicFramePr>
+            <a:graphicFrameLocks noGrp="1"/>
+          </p:cNvGraphicFramePr>
+          <p:nvPr>
+            <p:ph idx="1"/>
+            <p:extLst>
+              <p:ext uri="{D42A27DB-BD31-4B8C-83A1-F6EECF244321}">
+                <p14:modId xmlns:p14="http://schemas.microsoft.com/office/powerpoint/2010/main" val="2951283591"/>
+              </p:ext>
+            </p:extLst>
+          </p:nvPr>
+        </p:nvGraphicFramePr>
+        <p:xfrm>
+          <a:off x="1024127" y="2084832"/>
+          <a:ext cx="9720073" cy="4023360"/>
+        </p:xfrm>
+        <a:graphic>
+          <a:graphicData uri="http://schemas.openxmlformats.org/drawingml/2006/diagram">
+            <dgm:relIds xmlns:dgm="http://schemas.openxmlformats.org/drawingml/2006/diagram" xmlns:r="http://schemas.openxmlformats.org/officeDocument/2006/relationships" r:dm="rId2" r:lo="rId3" r:qs="rId4" r:cs="rId5"/>
+          </a:graphicData>
+        </a:graphic>
+      </p:graphicFrame>
       <p:sp>
         <p:nvSpPr>
           <p:cNvPr id="2" name="Title 1">
@@ -28261,37 +32569,6 @@
           </a:p>
         </p:txBody>
       </p:sp>
-      <p:graphicFrame>
-        <p:nvGraphicFramePr>
-          <p:cNvPr id="33" name="Content Placeholder 2">
-            <a:extLst>
-              <a:ext uri="{FF2B5EF4-FFF2-40B4-BE49-F238E27FC236}">
-                <a16:creationId xmlns:a16="http://schemas.microsoft.com/office/drawing/2014/main" id="{27A4C1CE-A784-CE58-543F-E1A09079EAA7}"/>
-              </a:ext>
-            </a:extLst>
-          </p:cNvPr>
-          <p:cNvGraphicFramePr>
-            <a:graphicFrameLocks noGrp="1"/>
-          </p:cNvGraphicFramePr>
-          <p:nvPr>
-            <p:ph idx="1"/>
-            <p:extLst>
-              <p:ext uri="{D42A27DB-BD31-4B8C-83A1-F6EECF244321}">
-                <p14:modId xmlns:p14="http://schemas.microsoft.com/office/powerpoint/2010/main" val="3627694416"/>
-              </p:ext>
-            </p:extLst>
-          </p:nvPr>
-        </p:nvGraphicFramePr>
-        <p:xfrm>
-          <a:off x="1024128" y="2286000"/>
-          <a:ext cx="9720073" cy="4023360"/>
-        </p:xfrm>
-        <a:graphic>
-          <a:graphicData uri="http://schemas.openxmlformats.org/drawingml/2006/diagram">
-            <dgm:relIds xmlns:dgm="http://schemas.openxmlformats.org/drawingml/2006/diagram" xmlns:r="http://schemas.openxmlformats.org/officeDocument/2006/relationships" r:dm="rId2" r:lo="rId3" r:qs="rId4" r:cs="rId5"/>
-          </a:graphicData>
-        </a:graphic>
-      </p:graphicFrame>
       <p:pic>
         <p:nvPicPr>
           <p:cNvPr id="37" name="Graphic 36" descr="Bar graph with downward trend outline">
@@ -28330,7 +32607,7 @@
       </p:pic>
       <p:pic>
         <p:nvPicPr>
-          <p:cNvPr id="39" name="Graphic 38" descr="Bullseye outline">
+          <p:cNvPr id="39" name="Graphic 38" descr="Scales of justice outline">
             <a:extLst>
               <a:ext uri="{FF2B5EF4-FFF2-40B4-BE49-F238E27FC236}">
                 <a16:creationId xmlns:a16="http://schemas.microsoft.com/office/drawing/2014/main" id="{4AD0BC00-053A-5A8B-919F-EBC430B5795B}"/>
@@ -28350,13 +32627,12 @@
               </a:ext>
             </a:extLst>
           </a:blip>
-          <a:stretch>
-            <a:fillRect/>
-          </a:stretch>
+          <a:srcRect/>
+          <a:stretch/>
         </p:blipFill>
         <p:spPr>
           <a:xfrm>
-            <a:off x="9014581" y="2695840"/>
+            <a:off x="9014582" y="2520286"/>
             <a:ext cx="1139069" cy="1139069"/>
           </a:xfrm>
           <a:prstGeom prst="rect">
@@ -28444,7 +32720,7 @@
           <p:cNvPr id="2" name="Title 1">
             <a:extLst>
               <a:ext uri="{FF2B5EF4-FFF2-40B4-BE49-F238E27FC236}">
-                <a16:creationId xmlns:a16="http://schemas.microsoft.com/office/drawing/2014/main" id="{9A95A2F4-C68A-79FA-87A3-657B07BAD8A4}"/>
+                <a16:creationId xmlns:a16="http://schemas.microsoft.com/office/drawing/2014/main" id="{6CBD9861-759F-F11D-009F-AEF33F20660B}"/>
               </a:ext>
             </a:extLst>
           </p:cNvPr>
@@ -28462,47 +32738,18 @@
           <a:p>
             <a:r>
               <a:rPr lang="es-ES" dirty="0"/>
-              <a:t>Análisis de datos</a:t>
+              <a:t>Modelo de Ising</a:t>
             </a:r>
             <a:endParaRPr lang="en-GB" dirty="0"/>
           </a:p>
         </p:txBody>
       </p:sp>
-      <p:pic>
-        <p:nvPicPr>
-          <p:cNvPr id="7" name="Content Placeholder 6">
-            <a:extLst>
-              <a:ext uri="{FF2B5EF4-FFF2-40B4-BE49-F238E27FC236}">
-                <a16:creationId xmlns:a16="http://schemas.microsoft.com/office/drawing/2014/main" id="{EF6654FA-572D-72BD-AC31-9B48DB286AF8}"/>
-              </a:ext>
-            </a:extLst>
-          </p:cNvPr>
-          <p:cNvPicPr>
-            <a:picLocks noGrp="1" noChangeAspect="1"/>
-          </p:cNvPicPr>
-          <p:nvPr>
-            <p:ph idx="1"/>
-          </p:nvPr>
-        </p:nvPicPr>
-        <p:blipFill>
-          <a:blip r:embed="rId2"/>
-          <a:stretch>
-            <a:fillRect/>
-          </a:stretch>
-        </p:blipFill>
-        <p:spPr>
-          <a:xfrm>
-            <a:off x="2672377" y="2286000"/>
-            <a:ext cx="6423383" cy="4022725"/>
-          </a:xfrm>
-        </p:spPr>
-      </p:pic>
       <p:sp>
         <p:nvSpPr>
           <p:cNvPr id="4" name="Date Placeholder 3">
             <a:extLst>
               <a:ext uri="{FF2B5EF4-FFF2-40B4-BE49-F238E27FC236}">
-                <a16:creationId xmlns:a16="http://schemas.microsoft.com/office/drawing/2014/main" id="{1A031CE1-78FC-27D2-1989-AF57BAC6AAAD}"/>
+                <a16:creationId xmlns:a16="http://schemas.microsoft.com/office/drawing/2014/main" id="{DD6FC2E7-C4E5-5D56-8BD2-0E9FA15C54B9}"/>
               </a:ext>
             </a:extLst>
           </p:cNvPr>
@@ -28532,7 +32779,7 @@
           <p:cNvPr id="5" name="Slide Number Placeholder 4">
             <a:extLst>
               <a:ext uri="{FF2B5EF4-FFF2-40B4-BE49-F238E27FC236}">
-                <a16:creationId xmlns:a16="http://schemas.microsoft.com/office/drawing/2014/main" id="{4488F0C1-734B-F05D-5D43-3AAA3C817D6E}"/>
+                <a16:creationId xmlns:a16="http://schemas.microsoft.com/office/drawing/2014/main" id="{7BC60FB1-1ED4-E1CF-CB7C-D1D1C8CD37F6}"/>
               </a:ext>
             </a:extLst>
           </p:cNvPr>
@@ -28559,10 +32806,59 @@
       </p:sp>
       <p:pic>
         <p:nvPicPr>
-          <p:cNvPr id="8" name="Picture 2" descr="Imagen corporativa - Fundación San Pablo Andalucía CEU">
+          <p:cNvPr id="3076" name="Picture 4" descr="Modelo de Ising - Wikipedia, la enciclopedia libre">
             <a:extLst>
               <a:ext uri="{FF2B5EF4-FFF2-40B4-BE49-F238E27FC236}">
-                <a16:creationId xmlns:a16="http://schemas.microsoft.com/office/drawing/2014/main" id="{39AC58A2-EE74-0889-B0D7-8024642E67B4}"/>
+                <a16:creationId xmlns:a16="http://schemas.microsoft.com/office/drawing/2014/main" id="{FD547960-AEAE-1971-EB08-7E74147DB832}"/>
+              </a:ext>
+            </a:extLst>
+          </p:cNvPr>
+          <p:cNvPicPr>
+            <a:picLocks noGrp="1" noChangeAspect="1" noChangeArrowheads="1"/>
+          </p:cNvPicPr>
+          <p:nvPr>
+            <p:ph idx="1"/>
+          </p:nvPr>
+        </p:nvPicPr>
+        <p:blipFill>
+          <a:blip r:embed="rId2">
+            <a:extLst>
+              <a:ext uri="{28A0092B-C50C-407E-A947-70E740481C1C}">
+                <a14:useLocalDpi xmlns:a14="http://schemas.microsoft.com/office/drawing/2010/main" val="0"/>
+              </a:ext>
+            </a:extLst>
+          </a:blip>
+          <a:srcRect/>
+          <a:stretch>
+            <a:fillRect/>
+          </a:stretch>
+        </p:blipFill>
+        <p:spPr bwMode="auto">
+          <a:xfrm>
+            <a:off x="1023938" y="2430262"/>
+            <a:ext cx="9720262" cy="3734200"/>
+          </a:xfrm>
+          <a:prstGeom prst="rect">
+            <a:avLst/>
+          </a:prstGeom>
+          <a:noFill/>
+          <a:extLst>
+            <a:ext uri="{909E8E84-426E-40DD-AFC4-6F175D3DCCD1}">
+              <a14:hiddenFill xmlns:a14="http://schemas.microsoft.com/office/drawing/2010/main">
+                <a:solidFill>
+                  <a:srgbClr val="FFFFFF"/>
+                </a:solidFill>
+              </a14:hiddenFill>
+            </a:ext>
+          </a:extLst>
+        </p:spPr>
+      </p:pic>
+      <p:pic>
+        <p:nvPicPr>
+          <p:cNvPr id="3" name="Picture 2" descr="Imagen corporativa - Fundación San Pablo Andalucía CEU">
+            <a:extLst>
+              <a:ext uri="{FF2B5EF4-FFF2-40B4-BE49-F238E27FC236}">
+                <a16:creationId xmlns:a16="http://schemas.microsoft.com/office/drawing/2014/main" id="{F4B0F101-02D4-7F84-77E1-ADEC77B54442}"/>
               </a:ext>
             </a:extLst>
           </p:cNvPr>
@@ -28605,7 +32901,7 @@
     </p:spTree>
     <p:extLst>
       <p:ext uri="{BB962C8B-B14F-4D97-AF65-F5344CB8AC3E}">
-        <p14:creationId xmlns:p14="http://schemas.microsoft.com/office/powerpoint/2010/main" val="74920178"/>
+        <p14:creationId xmlns:p14="http://schemas.microsoft.com/office/powerpoint/2010/main" val="2517206029"/>
       </p:ext>
     </p:extLst>
   </p:cSld>
@@ -28662,7 +32958,7 @@
           <a:p>
             <a:r>
               <a:rPr lang="es-ES" dirty="0"/>
-              <a:t>Modelo de Ising</a:t>
+              <a:t>Adaptación del Modelo de Ising</a:t>
             </a:r>
             <a:endParaRPr lang="en-GB" dirty="0"/>
           </a:p>
@@ -28866,7 +33162,7 @@
           <p:cNvPr id="2" name="Title 1">
             <a:extLst>
               <a:ext uri="{FF2B5EF4-FFF2-40B4-BE49-F238E27FC236}">
-                <a16:creationId xmlns:a16="http://schemas.microsoft.com/office/drawing/2014/main" id="{6CBD9861-759F-F11D-009F-AEF33F20660B}"/>
+                <a16:creationId xmlns:a16="http://schemas.microsoft.com/office/drawing/2014/main" id="{9A95A2F4-C68A-79FA-87A3-657B07BAD8A4}"/>
               </a:ext>
             </a:extLst>
           </p:cNvPr>
@@ -28884,7 +33180,7 @@
           <a:p>
             <a:r>
               <a:rPr lang="es-ES" dirty="0"/>
-              <a:t>Modelo de Ising</a:t>
+              <a:t>Análisis de datos – VAT GAP</a:t>
             </a:r>
             <a:endParaRPr lang="en-GB" dirty="0"/>
           </a:p>
@@ -28895,7 +33191,7 @@
           <p:cNvPr id="4" name="Date Placeholder 3">
             <a:extLst>
               <a:ext uri="{FF2B5EF4-FFF2-40B4-BE49-F238E27FC236}">
-                <a16:creationId xmlns:a16="http://schemas.microsoft.com/office/drawing/2014/main" id="{DD6FC2E7-C4E5-5D56-8BD2-0E9FA15C54B9}"/>
+                <a16:creationId xmlns:a16="http://schemas.microsoft.com/office/drawing/2014/main" id="{1A031CE1-78FC-27D2-1989-AF57BAC6AAAD}"/>
               </a:ext>
             </a:extLst>
           </p:cNvPr>
@@ -28925,7 +33221,7 @@
           <p:cNvPr id="5" name="Slide Number Placeholder 4">
             <a:extLst>
               <a:ext uri="{FF2B5EF4-FFF2-40B4-BE49-F238E27FC236}">
-                <a16:creationId xmlns:a16="http://schemas.microsoft.com/office/drawing/2014/main" id="{7BC60FB1-1ED4-E1CF-CB7C-D1D1C8CD37F6}"/>
+                <a16:creationId xmlns:a16="http://schemas.microsoft.com/office/drawing/2014/main" id="{4488F0C1-734B-F05D-5D43-3AAA3C817D6E}"/>
               </a:ext>
             </a:extLst>
           </p:cNvPr>
@@ -28952,19 +33248,15 @@
       </p:sp>
       <p:pic>
         <p:nvPicPr>
-          <p:cNvPr id="3076" name="Picture 4" descr="Modelo de Ising - Wikipedia, la enciclopedia libre">
+          <p:cNvPr id="8" name="Picture 2" descr="Imagen corporativa - Fundación San Pablo Andalucía CEU">
             <a:extLst>
               <a:ext uri="{FF2B5EF4-FFF2-40B4-BE49-F238E27FC236}">
-                <a16:creationId xmlns:a16="http://schemas.microsoft.com/office/drawing/2014/main" id="{FD547960-AEAE-1971-EB08-7E74147DB832}"/>
+                <a16:creationId xmlns:a16="http://schemas.microsoft.com/office/drawing/2014/main" id="{39AC58A2-EE74-0889-B0D7-8024642E67B4}"/>
               </a:ext>
             </a:extLst>
           </p:cNvPr>
-          <p:cNvPicPr>
-            <a:picLocks noGrp="1" noChangeAspect="1" noChangeArrowheads="1"/>
-          </p:cNvPicPr>
-          <p:nvPr>
-            <p:ph idx="1"/>
-          </p:nvPr>
+          <p:cNvPicPr/>
+          <p:nvPr/>
         </p:nvPicPr>
         <p:blipFill>
           <a:blip r:embed="rId2">
@@ -28981,8 +33273,8 @@
         </p:blipFill>
         <p:spPr bwMode="auto">
           <a:xfrm>
-            <a:off x="1023938" y="2430262"/>
-            <a:ext cx="9720262" cy="3734200"/>
+            <a:off x="11250040" y="6189735"/>
+            <a:ext cx="945214" cy="668265"/>
           </a:xfrm>
           <a:prstGeom prst="rect">
             <a:avLst/>
@@ -29001,10 +33293,187 @@
       </p:pic>
       <p:pic>
         <p:nvPicPr>
-          <p:cNvPr id="3" name="Picture 2" descr="Imagen corporativa - Fundación San Pablo Andalucía CEU">
+          <p:cNvPr id="10" name="Content Placeholder 9">
             <a:extLst>
               <a:ext uri="{FF2B5EF4-FFF2-40B4-BE49-F238E27FC236}">
-                <a16:creationId xmlns:a16="http://schemas.microsoft.com/office/drawing/2014/main" id="{F4B0F101-02D4-7F84-77E1-ADEC77B54442}"/>
+                <a16:creationId xmlns:a16="http://schemas.microsoft.com/office/drawing/2014/main" id="{6FDED078-96E2-84A3-CE34-773474C3BB4A}"/>
+              </a:ext>
+            </a:extLst>
+          </p:cNvPr>
+          <p:cNvPicPr>
+            <a:picLocks noGrp="1" noChangeAspect="1"/>
+          </p:cNvPicPr>
+          <p:nvPr>
+            <p:ph idx="1"/>
+          </p:nvPr>
+        </p:nvPicPr>
+        <p:blipFill>
+          <a:blip r:embed="rId3"/>
+          <a:stretch>
+            <a:fillRect/>
+          </a:stretch>
+        </p:blipFill>
+        <p:spPr>
+          <a:xfrm>
+            <a:off x="2915897" y="2485607"/>
+            <a:ext cx="5936533" cy="3584322"/>
+          </a:xfrm>
+        </p:spPr>
+      </p:pic>
+    </p:spTree>
+    <p:extLst>
+      <p:ext uri="{BB962C8B-B14F-4D97-AF65-F5344CB8AC3E}">
+        <p14:creationId xmlns:p14="http://schemas.microsoft.com/office/powerpoint/2010/main" val="2718233838"/>
+      </p:ext>
+    </p:extLst>
+  </p:cSld>
+  <p:clrMapOvr>
+    <a:masterClrMapping/>
+  </p:clrMapOvr>
+</p:sld>
+</file>
+
+<file path=ppt/slides/slide8.xml><?xml version="1.0" encoding="utf-8"?>
+<p:sld xmlns:a="http://schemas.openxmlformats.org/drawingml/2006/main" xmlns:r="http://schemas.openxmlformats.org/officeDocument/2006/relationships" xmlns:p="http://schemas.openxmlformats.org/presentationml/2006/main">
+  <p:cSld>
+    <p:spTree>
+      <p:nvGrpSpPr>
+        <p:cNvPr id="1" name=""/>
+        <p:cNvGrpSpPr/>
+        <p:nvPr/>
+      </p:nvGrpSpPr>
+      <p:grpSpPr>
+        <a:xfrm>
+          <a:off x="0" y="0"/>
+          <a:ext cx="0" cy="0"/>
+          <a:chOff x="0" y="0"/>
+          <a:chExt cx="0" cy="0"/>
+        </a:xfrm>
+      </p:grpSpPr>
+      <p:sp>
+        <p:nvSpPr>
+          <p:cNvPr id="2" name="Title 1">
+            <a:extLst>
+              <a:ext uri="{FF2B5EF4-FFF2-40B4-BE49-F238E27FC236}">
+                <a16:creationId xmlns:a16="http://schemas.microsoft.com/office/drawing/2014/main" id="{9A95A2F4-C68A-79FA-87A3-657B07BAD8A4}"/>
+              </a:ext>
+            </a:extLst>
+          </p:cNvPr>
+          <p:cNvSpPr>
+            <a:spLocks noGrp="1"/>
+          </p:cNvSpPr>
+          <p:nvPr>
+            <p:ph type="title"/>
+          </p:nvPr>
+        </p:nvSpPr>
+        <p:spPr/>
+        <p:txBody>
+          <a:bodyPr/>
+          <a:lstStyle/>
+          <a:p>
+            <a:r>
+              <a:rPr lang="es-ES" dirty="0"/>
+              <a:t>Análisis de datos – TAX gap</a:t>
+            </a:r>
+            <a:endParaRPr lang="en-GB" dirty="0"/>
+          </a:p>
+        </p:txBody>
+      </p:sp>
+      <p:pic>
+        <p:nvPicPr>
+          <p:cNvPr id="7" name="Content Placeholder 6">
+            <a:extLst>
+              <a:ext uri="{FF2B5EF4-FFF2-40B4-BE49-F238E27FC236}">
+                <a16:creationId xmlns:a16="http://schemas.microsoft.com/office/drawing/2014/main" id="{EF6654FA-572D-72BD-AC31-9B48DB286AF8}"/>
+              </a:ext>
+            </a:extLst>
+          </p:cNvPr>
+          <p:cNvPicPr>
+            <a:picLocks noGrp="1" noChangeAspect="1"/>
+          </p:cNvPicPr>
+          <p:nvPr>
+            <p:ph idx="1"/>
+          </p:nvPr>
+        </p:nvPicPr>
+        <p:blipFill>
+          <a:blip r:embed="rId2"/>
+          <a:stretch>
+            <a:fillRect/>
+          </a:stretch>
+        </p:blipFill>
+        <p:spPr>
+          <a:xfrm>
+            <a:off x="2672377" y="2286000"/>
+            <a:ext cx="6423383" cy="4022725"/>
+          </a:xfrm>
+        </p:spPr>
+      </p:pic>
+      <p:sp>
+        <p:nvSpPr>
+          <p:cNvPr id="4" name="Date Placeholder 3">
+            <a:extLst>
+              <a:ext uri="{FF2B5EF4-FFF2-40B4-BE49-F238E27FC236}">
+                <a16:creationId xmlns:a16="http://schemas.microsoft.com/office/drawing/2014/main" id="{1A031CE1-78FC-27D2-1989-AF57BAC6AAAD}"/>
+              </a:ext>
+            </a:extLst>
+          </p:cNvPr>
+          <p:cNvSpPr>
+            <a:spLocks noGrp="1"/>
+          </p:cNvSpPr>
+          <p:nvPr>
+            <p:ph type="dt" sz="half" idx="10"/>
+          </p:nvPr>
+        </p:nvSpPr>
+        <p:spPr/>
+        <p:txBody>
+          <a:bodyPr/>
+          <a:lstStyle/>
+          <a:p>
+            <a:pPr rtl="0"/>
+            <a:r>
+              <a:rPr lang="en-US" noProof="0"/>
+              <a:t>02/07/2025</a:t>
+            </a:r>
+            <a:endParaRPr lang="en-GB" noProof="0" dirty="0"/>
+          </a:p>
+        </p:txBody>
+      </p:sp>
+      <p:sp>
+        <p:nvSpPr>
+          <p:cNvPr id="5" name="Slide Number Placeholder 4">
+            <a:extLst>
+              <a:ext uri="{FF2B5EF4-FFF2-40B4-BE49-F238E27FC236}">
+                <a16:creationId xmlns:a16="http://schemas.microsoft.com/office/drawing/2014/main" id="{4488F0C1-734B-F05D-5D43-3AAA3C817D6E}"/>
+              </a:ext>
+            </a:extLst>
+          </p:cNvPr>
+          <p:cNvSpPr>
+            <a:spLocks noGrp="1"/>
+          </p:cNvSpPr>
+          <p:nvPr>
+            <p:ph type="sldNum" sz="quarter" idx="12"/>
+          </p:nvPr>
+        </p:nvSpPr>
+        <p:spPr/>
+        <p:txBody>
+          <a:bodyPr/>
+          <a:lstStyle/>
+          <a:p>
+            <a:pPr rtl="0"/>
+            <a:fld id="{4FAB73BC-B049-4115-A692-8D63A059BFB8}" type="slidenum">
+              <a:rPr lang="en-GB" noProof="0" smtClean="0"/>
+              <a:t>8</a:t>
+            </a:fld>
+            <a:endParaRPr lang="en-GB" noProof="0" dirty="0"/>
+          </a:p>
+        </p:txBody>
+      </p:sp>
+      <p:pic>
+        <p:nvPicPr>
+          <p:cNvPr id="8" name="Picture 2" descr="Imagen corporativa - Fundación San Pablo Andalucía CEU">
+            <a:extLst>
+              <a:ext uri="{FF2B5EF4-FFF2-40B4-BE49-F238E27FC236}">
+                <a16:creationId xmlns:a16="http://schemas.microsoft.com/office/drawing/2014/main" id="{39AC58A2-EE74-0889-B0D7-8024642E67B4}"/>
               </a:ext>
             </a:extLst>
           </p:cNvPr>
@@ -29047,7 +33516,7 @@
     </p:spTree>
     <p:extLst>
       <p:ext uri="{BB962C8B-B14F-4D97-AF65-F5344CB8AC3E}">
-        <p14:creationId xmlns:p14="http://schemas.microsoft.com/office/powerpoint/2010/main" val="2517206029"/>
+        <p14:creationId xmlns:p14="http://schemas.microsoft.com/office/powerpoint/2010/main" val="74920178"/>
       </p:ext>
     </p:extLst>
   </p:cSld>
@@ -29057,17 +33526,9 @@
 </p:sld>
 </file>
 
-<file path=ppt/slides/slide8.xml><?xml version="1.0" encoding="utf-8"?>
+<file path=ppt/slides/slide9.xml><?xml version="1.0" encoding="utf-8"?>
 <p:sld xmlns:a="http://schemas.openxmlformats.org/drawingml/2006/main" xmlns:r="http://schemas.openxmlformats.org/officeDocument/2006/relationships" xmlns:p="http://schemas.openxmlformats.org/presentationml/2006/main">
   <p:cSld>
-    <p:bg>
-      <p:bgPr>
-        <a:solidFill>
-          <a:schemeClr val="bg1"/>
-        </a:solidFill>
-        <a:effectLst/>
-      </p:bgPr>
-    </p:bg>
     <p:spTree>
       <p:nvGrpSpPr>
         <p:cNvPr id="1" name=""/>
@@ -29105,7 +33566,7 @@
           </a:xfrm>
         </p:spPr>
         <p:txBody>
-          <a:bodyPr rtlCol="0">
+          <a:bodyPr rtlCol="0" anchor="ctr">
             <a:normAutofit/>
           </a:bodyPr>
           <a:lstStyle/>
@@ -29115,22 +33576,118 @@
               <a:rPr lang="en-GB" dirty="0" err="1"/>
               <a:t>Simulación</a:t>
             </a:r>
-            <a:endParaRPr lang="en-GB" dirty="0"/>
+            <a:r>
+              <a:rPr lang="en-GB" dirty="0"/>
+              <a:t> – </a:t>
+            </a:r>
+            <a:r>
+              <a:rPr lang="en-GB" dirty="0" err="1"/>
+              <a:t>Método</a:t>
+            </a:r>
+            <a:r>
+              <a:rPr lang="en-GB" dirty="0"/>
+              <a:t> de Montecarlo</a:t>
+            </a:r>
+          </a:p>
+        </p:txBody>
+      </p:sp>
+      <p:sp>
+        <p:nvSpPr>
+          <p:cNvPr id="4" name="Date Placeholder 3">
+            <a:extLst>
+              <a:ext uri="{FF2B5EF4-FFF2-40B4-BE49-F238E27FC236}">
+                <a16:creationId xmlns:a16="http://schemas.microsoft.com/office/drawing/2014/main" id="{FB5C8163-4DA8-BD4C-198B-32E4C6A6CECF}"/>
+              </a:ext>
+            </a:extLst>
+          </p:cNvPr>
+          <p:cNvSpPr>
+            <a:spLocks noGrp="1"/>
+          </p:cNvSpPr>
+          <p:nvPr>
+            <p:ph type="dt" sz="half" idx="10"/>
+          </p:nvPr>
+        </p:nvSpPr>
+        <p:spPr>
+          <a:xfrm>
+            <a:off x="1024129" y="6470704"/>
+            <a:ext cx="2154143" cy="274320"/>
+          </a:xfrm>
+        </p:spPr>
+        <p:txBody>
+          <a:bodyPr anchor="ctr">
+            <a:normAutofit/>
+          </a:bodyPr>
+          <a:lstStyle/>
+          <a:p>
+            <a:pPr rtl="0">
+              <a:spcAft>
+                <a:spcPts val="600"/>
+              </a:spcAft>
+            </a:pPr>
+            <a:r>
+              <a:rPr lang="en-US" noProof="0"/>
+              <a:t>02/07/2025</a:t>
+            </a:r>
+            <a:endParaRPr lang="en-GB" noProof="0"/>
+          </a:p>
+        </p:txBody>
+      </p:sp>
+      <p:sp>
+        <p:nvSpPr>
+          <p:cNvPr id="6" name="Slide Number Placeholder 5">
+            <a:extLst>
+              <a:ext uri="{FF2B5EF4-FFF2-40B4-BE49-F238E27FC236}">
+                <a16:creationId xmlns:a16="http://schemas.microsoft.com/office/drawing/2014/main" id="{870484B8-5401-A575-83E7-06F8B0E029A8}"/>
+              </a:ext>
+            </a:extLst>
+          </p:cNvPr>
+          <p:cNvSpPr>
+            <a:spLocks noGrp="1"/>
+          </p:cNvSpPr>
+          <p:nvPr>
+            <p:ph type="sldNum" sz="quarter" idx="12"/>
+          </p:nvPr>
+        </p:nvSpPr>
+        <p:spPr>
+          <a:xfrm>
+            <a:off x="10837333" y="6470704"/>
+            <a:ext cx="973667" cy="274320"/>
+          </a:xfrm>
+        </p:spPr>
+        <p:txBody>
+          <a:bodyPr anchor="ctr">
+            <a:normAutofit/>
+          </a:bodyPr>
+          <a:lstStyle/>
+          <a:p>
+            <a:pPr rtl="0">
+              <a:spcAft>
+                <a:spcPts val="600"/>
+              </a:spcAft>
+            </a:pPr>
+            <a:fld id="{4FAB73BC-B049-4115-A692-8D63A059BFB8}" type="slidenum">
+              <a:rPr lang="en-GB" noProof="0" smtClean="0"/>
+              <a:pPr rtl="0">
+                <a:spcAft>
+                  <a:spcPts val="600"/>
+                </a:spcAft>
+              </a:pPr>
+              <a:t>9</a:t>
+            </a:fld>
+            <a:endParaRPr lang="en-GB" noProof="0"/>
           </a:p>
         </p:txBody>
       </p:sp>
       <p:pic>
         <p:nvPicPr>
-          <p:cNvPr id="3" name="Picture 2" descr="Imagen corporativa - Fundación San Pablo Andalucía CEU">
+          <p:cNvPr id="9" name="Picture 2" descr="Imagen corporativa - Fundación San Pablo Andalucía CEU">
             <a:extLst>
               <a:ext uri="{FF2B5EF4-FFF2-40B4-BE49-F238E27FC236}">
-                <a16:creationId xmlns:a16="http://schemas.microsoft.com/office/drawing/2014/main" id="{0BD81BE2-64ED-D40F-4D9B-A23BFEB2BED4}"/>
+                <a16:creationId xmlns:a16="http://schemas.microsoft.com/office/drawing/2014/main" id="{E586BB0D-CC6B-090F-F1A4-DBE8ED120FFF}"/>
               </a:ext>
             </a:extLst>
           </p:cNvPr>
-          <p:cNvPicPr>
-            <a:picLocks noChangeAspect="1" noChangeArrowheads="1"/>
-          </p:cNvPicPr>
+          <p:cNvPicPr/>
           <p:nvPr/>
         </p:nvPicPr>
         <p:blipFill>
@@ -29166,72 +33723,12 @@
           </a:extLst>
         </p:spPr>
       </p:pic>
-      <p:sp>
-        <p:nvSpPr>
-          <p:cNvPr id="4" name="Date Placeholder 3">
+      <p:pic>
+        <p:nvPicPr>
+          <p:cNvPr id="15" name="Content Placeholder 14">
             <a:extLst>
               <a:ext uri="{FF2B5EF4-FFF2-40B4-BE49-F238E27FC236}">
-                <a16:creationId xmlns:a16="http://schemas.microsoft.com/office/drawing/2014/main" id="{FB5C8163-4DA8-BD4C-198B-32E4C6A6CECF}"/>
-              </a:ext>
-            </a:extLst>
-          </p:cNvPr>
-          <p:cNvSpPr>
-            <a:spLocks noGrp="1"/>
-          </p:cNvSpPr>
-          <p:nvPr>
-            <p:ph type="dt" sz="half" idx="10"/>
-          </p:nvPr>
-        </p:nvSpPr>
-        <p:spPr/>
-        <p:txBody>
-          <a:bodyPr/>
-          <a:lstStyle/>
-          <a:p>
-            <a:pPr rtl="0"/>
-            <a:r>
-              <a:rPr lang="en-US" noProof="0"/>
-              <a:t>02/07/2025</a:t>
-            </a:r>
-            <a:endParaRPr lang="en-GB" noProof="0" dirty="0"/>
-          </a:p>
-        </p:txBody>
-      </p:sp>
-      <p:sp>
-        <p:nvSpPr>
-          <p:cNvPr id="6" name="Slide Number Placeholder 5">
-            <a:extLst>
-              <a:ext uri="{FF2B5EF4-FFF2-40B4-BE49-F238E27FC236}">
-                <a16:creationId xmlns:a16="http://schemas.microsoft.com/office/drawing/2014/main" id="{870484B8-5401-A575-83E7-06F8B0E029A8}"/>
-              </a:ext>
-            </a:extLst>
-          </p:cNvPr>
-          <p:cNvSpPr>
-            <a:spLocks noGrp="1"/>
-          </p:cNvSpPr>
-          <p:nvPr>
-            <p:ph type="sldNum" sz="quarter" idx="12"/>
-          </p:nvPr>
-        </p:nvSpPr>
-        <p:spPr/>
-        <p:txBody>
-          <a:bodyPr/>
-          <a:lstStyle/>
-          <a:p>
-            <a:pPr rtl="0"/>
-            <a:fld id="{4FAB73BC-B049-4115-A692-8D63A059BFB8}" type="slidenum">
-              <a:rPr lang="en-GB" noProof="0" smtClean="0"/>
-              <a:t>8</a:t>
-            </a:fld>
-            <a:endParaRPr lang="en-GB" noProof="0" dirty="0"/>
-          </a:p>
-        </p:txBody>
-      </p:sp>
-      <p:pic>
-        <p:nvPicPr>
-          <p:cNvPr id="10" name="Content Placeholder 9">
-            <a:extLst>
-              <a:ext uri="{FF2B5EF4-FFF2-40B4-BE49-F238E27FC236}">
-                <a16:creationId xmlns:a16="http://schemas.microsoft.com/office/drawing/2014/main" id="{B11FF929-CD80-54B5-DD35-B23E2090C227}"/>
+                <a16:creationId xmlns:a16="http://schemas.microsoft.com/office/drawing/2014/main" id="{5295F9C5-8F13-2121-E95C-D03D9EC961B6}"/>
               </a:ext>
             </a:extLst>
           </p:cNvPr>
@@ -29250,204 +33747,15 @@
         </p:blipFill>
         <p:spPr>
           <a:xfrm>
-            <a:off x="3310975" y="2286000"/>
-            <a:ext cx="5146188" cy="4022725"/>
+            <a:off x="3833009" y="2286000"/>
+            <a:ext cx="4102120" cy="4022725"/>
           </a:xfrm>
         </p:spPr>
       </p:pic>
     </p:spTree>
     <p:extLst>
       <p:ext uri="{BB962C8B-B14F-4D97-AF65-F5344CB8AC3E}">
-        <p14:creationId xmlns:p14="http://schemas.microsoft.com/office/powerpoint/2010/main" val="1401741552"/>
-      </p:ext>
-    </p:extLst>
-  </p:cSld>
-  <p:clrMapOvr>
-    <a:masterClrMapping/>
-  </p:clrMapOvr>
-</p:sld>
-</file>
-
-<file path=ppt/slides/slide9.xml><?xml version="1.0" encoding="utf-8"?>
-<p:sld xmlns:a="http://schemas.openxmlformats.org/drawingml/2006/main" xmlns:r="http://schemas.openxmlformats.org/officeDocument/2006/relationships" xmlns:p="http://schemas.openxmlformats.org/presentationml/2006/main">
-  <p:cSld>
-    <p:spTree>
-      <p:nvGrpSpPr>
-        <p:cNvPr id="1" name=""/>
-        <p:cNvGrpSpPr/>
-        <p:nvPr/>
-      </p:nvGrpSpPr>
-      <p:grpSpPr>
-        <a:xfrm>
-          <a:off x="0" y="0"/>
-          <a:ext cx="0" cy="0"/>
-          <a:chOff x="0" y="0"/>
-          <a:chExt cx="0" cy="0"/>
-        </a:xfrm>
-      </p:grpSpPr>
-      <p:sp>
-        <p:nvSpPr>
-          <p:cNvPr id="2" name="Title 1">
-            <a:extLst>
-              <a:ext uri="{FF2B5EF4-FFF2-40B4-BE49-F238E27FC236}">
-                <a16:creationId xmlns:a16="http://schemas.microsoft.com/office/drawing/2014/main" id="{F5A89B8A-D2CA-7AB0-05F0-07A329DE5DFF}"/>
-              </a:ext>
-            </a:extLst>
-          </p:cNvPr>
-          <p:cNvSpPr>
-            <a:spLocks noGrp="1"/>
-          </p:cNvSpPr>
-          <p:nvPr>
-            <p:ph type="title"/>
-          </p:nvPr>
-        </p:nvSpPr>
-        <p:spPr/>
-        <p:txBody>
-          <a:bodyPr/>
-          <a:lstStyle/>
-          <a:p>
-            <a:r>
-              <a:rPr lang="es-ES" dirty="0"/>
-              <a:t>Conclusiones y líneas futuras</a:t>
-            </a:r>
-            <a:endParaRPr lang="en-GB" dirty="0"/>
-          </a:p>
-        </p:txBody>
-      </p:sp>
-      <p:sp>
-        <p:nvSpPr>
-          <p:cNvPr id="3" name="Text Placeholder 2">
-            <a:extLst>
-              <a:ext uri="{FF2B5EF4-FFF2-40B4-BE49-F238E27FC236}">
-                <a16:creationId xmlns:a16="http://schemas.microsoft.com/office/drawing/2014/main" id="{BBEE04FF-E68F-F861-6F07-F341D2546FF7}"/>
-              </a:ext>
-            </a:extLst>
-          </p:cNvPr>
-          <p:cNvSpPr>
-            <a:spLocks noGrp="1"/>
-          </p:cNvSpPr>
-          <p:nvPr>
-            <p:ph type="body" idx="1"/>
-          </p:nvPr>
-        </p:nvSpPr>
-        <p:spPr/>
-        <p:txBody>
-          <a:bodyPr/>
-          <a:lstStyle/>
-          <a:p>
-            <a:endParaRPr lang="en-GB" dirty="0"/>
-          </a:p>
-        </p:txBody>
-      </p:sp>
-      <p:sp>
-        <p:nvSpPr>
-          <p:cNvPr id="4" name="Date Placeholder 3">
-            <a:extLst>
-              <a:ext uri="{FF2B5EF4-FFF2-40B4-BE49-F238E27FC236}">
-                <a16:creationId xmlns:a16="http://schemas.microsoft.com/office/drawing/2014/main" id="{111883EF-3158-692D-639E-CD51B2896C14}"/>
-              </a:ext>
-            </a:extLst>
-          </p:cNvPr>
-          <p:cNvSpPr>
-            <a:spLocks noGrp="1"/>
-          </p:cNvSpPr>
-          <p:nvPr>
-            <p:ph type="dt" sz="half" idx="10"/>
-          </p:nvPr>
-        </p:nvSpPr>
-        <p:spPr/>
-        <p:txBody>
-          <a:bodyPr/>
-          <a:lstStyle/>
-          <a:p>
-            <a:pPr rtl="0"/>
-            <a:r>
-              <a:rPr lang="en-US" noProof="0"/>
-              <a:t>02/07/2025</a:t>
-            </a:r>
-            <a:endParaRPr lang="en-GB" noProof="0" dirty="0"/>
-          </a:p>
-        </p:txBody>
-      </p:sp>
-      <p:sp>
-        <p:nvSpPr>
-          <p:cNvPr id="5" name="Slide Number Placeholder 4">
-            <a:extLst>
-              <a:ext uri="{FF2B5EF4-FFF2-40B4-BE49-F238E27FC236}">
-                <a16:creationId xmlns:a16="http://schemas.microsoft.com/office/drawing/2014/main" id="{9E338086-17F1-CA4E-5F1D-23F7D1237226}"/>
-              </a:ext>
-            </a:extLst>
-          </p:cNvPr>
-          <p:cNvSpPr>
-            <a:spLocks noGrp="1"/>
-          </p:cNvSpPr>
-          <p:nvPr>
-            <p:ph type="sldNum" sz="quarter" idx="12"/>
-          </p:nvPr>
-        </p:nvSpPr>
-        <p:spPr/>
-        <p:txBody>
-          <a:bodyPr/>
-          <a:lstStyle/>
-          <a:p>
-            <a:pPr rtl="0"/>
-            <a:fld id="{4FAB73BC-B049-4115-A692-8D63A059BFB8}" type="slidenum">
-              <a:rPr lang="en-GB" noProof="0" smtClean="0"/>
-              <a:t>9</a:t>
-            </a:fld>
-            <a:endParaRPr lang="en-GB" noProof="0" dirty="0"/>
-          </a:p>
-        </p:txBody>
-      </p:sp>
-      <p:pic>
-        <p:nvPicPr>
-          <p:cNvPr id="6" name="Picture 2" descr="Imagen corporativa - Fundación San Pablo Andalucía CEU">
-            <a:extLst>
-              <a:ext uri="{FF2B5EF4-FFF2-40B4-BE49-F238E27FC236}">
-                <a16:creationId xmlns:a16="http://schemas.microsoft.com/office/drawing/2014/main" id="{12C74B94-5575-EA1C-C81D-E34E622EF3DA}"/>
-              </a:ext>
-            </a:extLst>
-          </p:cNvPr>
-          <p:cNvPicPr/>
-          <p:nvPr/>
-        </p:nvPicPr>
-        <p:blipFill>
-          <a:blip r:embed="rId2">
-            <a:extLst>
-              <a:ext uri="{28A0092B-C50C-407E-A947-70E740481C1C}">
-                <a14:useLocalDpi xmlns:a14="http://schemas.microsoft.com/office/drawing/2010/main" val="0"/>
-              </a:ext>
-            </a:extLst>
-          </a:blip>
-          <a:srcRect/>
-          <a:stretch>
-            <a:fillRect/>
-          </a:stretch>
-        </p:blipFill>
-        <p:spPr bwMode="auto">
-          <a:xfrm>
-            <a:off x="11250040" y="6189735"/>
-            <a:ext cx="945214" cy="668265"/>
-          </a:xfrm>
-          <a:prstGeom prst="rect">
-            <a:avLst/>
-          </a:prstGeom>
-          <a:noFill/>
-          <a:extLst>
-            <a:ext uri="{909E8E84-426E-40DD-AFC4-6F175D3DCCD1}">
-              <a14:hiddenFill xmlns:a14="http://schemas.microsoft.com/office/drawing/2010/main">
-                <a:solidFill>
-                  <a:srgbClr val="FFFFFF"/>
-                </a:solidFill>
-              </a14:hiddenFill>
-            </a:ext>
-          </a:extLst>
-        </p:spPr>
-      </p:pic>
-    </p:spTree>
-    <p:extLst>
-      <p:ext uri="{BB962C8B-B14F-4D97-AF65-F5344CB8AC3E}">
-        <p14:creationId xmlns:p14="http://schemas.microsoft.com/office/powerpoint/2010/main" val="4267767920"/>
+        <p14:creationId xmlns:p14="http://schemas.microsoft.com/office/powerpoint/2010/main" val="3787267474"/>
       </p:ext>
     </p:extLst>
   </p:cSld>
